--- a/btc_ai_master_plan_v3.pptx
+++ b/btc_ai_master_plan_v3.pptx
@@ -14,6 +14,9 @@
     <p:sldId id="262" r:id="rId13"/>
     <p:sldId id="263" r:id="rId14"/>
     <p:sldId id="264" r:id="rId15"/>
+    <p:sldId id="265" r:id="rId16"/>
+    <p:sldId id="266" r:id="rId17"/>
+    <p:sldId id="267" r:id="rId18"/>
   </p:sldIdLst>
   <p:sldSz cx="12191695" cy="6858000" type="screen4x3"/>
   <p:notesSz cx="6858000" cy="9144000"/>
@@ -3661,6 +3664,9287 @@
                 <a:latin typeface="Hiragino Sans"/>
               </a:rPr>
               <a:t>01 / 09</a:t>
+            </a:r>
+          </a:p>
+        </p:txBody>
+      </p:sp>
+    </p:spTree>
+  </p:cSld>
+  <p:clrMapOvr>
+    <a:masterClrMapping/>
+  </p:clrMapOvr>
+</p:sld>
+</file>
+
+<file path=ppt/slides/slide10.xml><?xml version="1.0" encoding="utf-8"?>
+<p:sld xmlns:a="http://schemas.openxmlformats.org/drawingml/2006/main" xmlns:p="http://schemas.openxmlformats.org/presentationml/2006/main" xmlns:r="http://schemas.openxmlformats.org/officeDocument/2006/relationships">
+  <p:cSld>
+    <p:bg>
+      <p:bgPr>
+        <a:solidFill>
+          <a:srgbClr val="0B132B"/>
+        </a:solidFill>
+        <a:effectLst/>
+      </p:bgPr>
+    </p:bg>
+    <p:spTree>
+      <p:nvGrpSpPr>
+        <p:cNvPr id="1" name=""/>
+        <p:cNvGrpSpPr/>
+        <p:nvPr/>
+      </p:nvGrpSpPr>
+      <p:grpSpPr/>
+      <p:sp>
+        <p:nvSpPr>
+          <p:cNvPr id="2" name="TextBox 1"/>
+          <p:cNvSpPr txBox="1"/>
+          <p:nvPr/>
+        </p:nvSpPr>
+        <p:spPr>
+          <a:xfrm>
+            <a:off x="507987" y="507987"/>
+            <a:ext cx="11175720" cy="380990"/>
+          </a:xfrm>
+          <a:prstGeom prst="rect">
+            <a:avLst/>
+          </a:prstGeom>
+          <a:noFill/>
+        </p:spPr>
+        <p:txBody>
+          <a:bodyPr wrap="square" anchor="t" lIns="45720" rIns="45720">
+            <a:spAutoFit/>
+          </a:bodyPr>
+          <a:lstStyle/>
+          <a:p>
+            <a:pPr algn="l"/>
+            <a:r>
+              <a:rPr sz="3200" b="1">
+                <a:solidFill>
+                  <a:srgbClr val="FFFFFF"/>
+                </a:solidFill>
+                <a:latin typeface="Hiragino Sans"/>
+              </a:rPr>
+              <a:t>v1 / v2 / v3 戦略比較 — 何が変わったか</a:t>
+            </a:r>
+          </a:p>
+        </p:txBody>
+      </p:sp>
+      <p:sp>
+        <p:nvSpPr>
+          <p:cNvPr id="3" name="Rounded Rectangle 2"/>
+          <p:cNvSpPr/>
+          <p:nvPr/>
+        </p:nvSpPr>
+        <p:spPr>
+          <a:xfrm>
+            <a:off x="507987" y="1047723"/>
+            <a:ext cx="1562060" cy="317492"/>
+          </a:xfrm>
+          <a:prstGeom prst="roundRect">
+            <a:avLst/>
+          </a:prstGeom>
+          <a:solidFill>
+            <a:srgbClr val="252E42"/>
+          </a:solidFill>
+          <a:ln w="12700">
+            <a:solidFill>
+              <a:srgbClr val="FFC72C"/>
+            </a:solidFill>
+          </a:ln>
+          <a:effectLst/>
+        </p:spPr>
+        <p:style>
+          <a:lnRef idx="1">
+            <a:schemeClr val="accent1"/>
+          </a:lnRef>
+          <a:fillRef idx="3">
+            <a:schemeClr val="accent1"/>
+          </a:fillRef>
+          <a:effectRef idx="2">
+            <a:schemeClr val="accent1"/>
+          </a:effectRef>
+          <a:fontRef idx="minor">
+            <a:schemeClr val="lt1"/>
+          </a:fontRef>
+        </p:style>
+        <p:txBody>
+          <a:bodyPr rtlCol="0" anchor="ctr"/>
+          <a:lstStyle/>
+          <a:p>
+            <a:pPr algn="ctr"/>
+          </a:p>
+        </p:txBody>
+      </p:sp>
+      <p:sp>
+        <p:nvSpPr>
+          <p:cNvPr id="4" name="TextBox 3"/>
+          <p:cNvSpPr txBox="1"/>
+          <p:nvPr/>
+        </p:nvSpPr>
+        <p:spPr>
+          <a:xfrm>
+            <a:off x="571485" y="1079473"/>
+            <a:ext cx="1435064" cy="253993"/>
+          </a:xfrm>
+          <a:prstGeom prst="rect">
+            <a:avLst/>
+          </a:prstGeom>
+          <a:noFill/>
+        </p:spPr>
+        <p:txBody>
+          <a:bodyPr wrap="square" anchor="ctr" lIns="45720" rIns="45720">
+            <a:spAutoFit/>
+          </a:bodyPr>
+          <a:lstStyle/>
+          <a:p>
+            <a:pPr algn="ctr"/>
+            <a:r>
+              <a:rPr sz="1300" b="1">
+                <a:solidFill>
+                  <a:srgbClr val="FFC72C"/>
+                </a:solidFill>
+                <a:latin typeface="Hiragino Sans"/>
+              </a:rPr>
+              <a:t>軸</a:t>
+            </a:r>
+          </a:p>
+        </p:txBody>
+      </p:sp>
+      <p:sp>
+        <p:nvSpPr>
+          <p:cNvPr id="5" name="Rounded Rectangle 4"/>
+          <p:cNvSpPr/>
+          <p:nvPr/>
+        </p:nvSpPr>
+        <p:spPr>
+          <a:xfrm>
+            <a:off x="2095447" y="1047723"/>
+            <a:ext cx="1943051" cy="317492"/>
+          </a:xfrm>
+          <a:prstGeom prst="roundRect">
+            <a:avLst/>
+          </a:prstGeom>
+          <a:solidFill>
+            <a:srgbClr val="252E42"/>
+          </a:solidFill>
+          <a:ln w="12700">
+            <a:solidFill>
+              <a:srgbClr val="FFC72C"/>
+            </a:solidFill>
+          </a:ln>
+          <a:effectLst/>
+        </p:spPr>
+        <p:style>
+          <a:lnRef idx="1">
+            <a:schemeClr val="accent1"/>
+          </a:lnRef>
+          <a:fillRef idx="3">
+            <a:schemeClr val="accent1"/>
+          </a:fillRef>
+          <a:effectRef idx="2">
+            <a:schemeClr val="accent1"/>
+          </a:effectRef>
+          <a:fontRef idx="minor">
+            <a:schemeClr val="lt1"/>
+          </a:fontRef>
+        </p:style>
+        <p:txBody>
+          <a:bodyPr rtlCol="0" anchor="ctr"/>
+          <a:lstStyle/>
+          <a:p>
+            <a:pPr algn="ctr"/>
+          </a:p>
+        </p:txBody>
+      </p:sp>
+      <p:sp>
+        <p:nvSpPr>
+          <p:cNvPr id="6" name="TextBox 5"/>
+          <p:cNvSpPr txBox="1"/>
+          <p:nvPr/>
+        </p:nvSpPr>
+        <p:spPr>
+          <a:xfrm>
+            <a:off x="2158946" y="1079473"/>
+            <a:ext cx="1816054" cy="253993"/>
+          </a:xfrm>
+          <a:prstGeom prst="rect">
+            <a:avLst/>
+          </a:prstGeom>
+          <a:noFill/>
+        </p:spPr>
+        <p:txBody>
+          <a:bodyPr wrap="square" anchor="ctr" lIns="45720" rIns="45720">
+            <a:spAutoFit/>
+          </a:bodyPr>
+          <a:lstStyle/>
+          <a:p>
+            <a:pPr algn="ctr"/>
+            <a:r>
+              <a:rPr sz="1300" b="1">
+                <a:solidFill>
+                  <a:srgbClr val="FFC72C"/>
+                </a:solidFill>
+                <a:latin typeface="Hiragino Sans"/>
+              </a:rPr>
+              <a:t>v1 (14ラウンド)</a:t>
+            </a:r>
+          </a:p>
+        </p:txBody>
+      </p:sp>
+      <p:sp>
+        <p:nvSpPr>
+          <p:cNvPr id="7" name="Rounded Rectangle 6"/>
+          <p:cNvSpPr/>
+          <p:nvPr/>
+        </p:nvSpPr>
+        <p:spPr>
+          <a:xfrm>
+            <a:off x="4063898" y="1047723"/>
+            <a:ext cx="1943051" cy="317492"/>
+          </a:xfrm>
+          <a:prstGeom prst="roundRect">
+            <a:avLst/>
+          </a:prstGeom>
+          <a:solidFill>
+            <a:srgbClr val="252E42"/>
+          </a:solidFill>
+          <a:ln w="12700">
+            <a:solidFill>
+              <a:srgbClr val="FFC72C"/>
+            </a:solidFill>
+          </a:ln>
+          <a:effectLst/>
+        </p:spPr>
+        <p:style>
+          <a:lnRef idx="1">
+            <a:schemeClr val="accent1"/>
+          </a:lnRef>
+          <a:fillRef idx="3">
+            <a:schemeClr val="accent1"/>
+          </a:fillRef>
+          <a:effectRef idx="2">
+            <a:schemeClr val="accent1"/>
+          </a:effectRef>
+          <a:fontRef idx="minor">
+            <a:schemeClr val="lt1"/>
+          </a:fontRef>
+        </p:style>
+        <p:txBody>
+          <a:bodyPr rtlCol="0" anchor="ctr"/>
+          <a:lstStyle/>
+          <a:p>
+            <a:pPr algn="ctr"/>
+          </a:p>
+        </p:txBody>
+      </p:sp>
+      <p:sp>
+        <p:nvSpPr>
+          <p:cNvPr id="8" name="TextBox 7"/>
+          <p:cNvSpPr txBox="1"/>
+          <p:nvPr/>
+        </p:nvSpPr>
+        <p:spPr>
+          <a:xfrm>
+            <a:off x="4127396" y="1079473"/>
+            <a:ext cx="1816054" cy="253993"/>
+          </a:xfrm>
+          <a:prstGeom prst="rect">
+            <a:avLst/>
+          </a:prstGeom>
+          <a:noFill/>
+        </p:spPr>
+        <p:txBody>
+          <a:bodyPr wrap="square" anchor="ctr" lIns="45720" rIns="45720">
+            <a:spAutoFit/>
+          </a:bodyPr>
+          <a:lstStyle/>
+          <a:p>
+            <a:pPr algn="ctr"/>
+            <a:r>
+              <a:rPr sz="1300" b="1">
+                <a:solidFill>
+                  <a:srgbClr val="FFC72C"/>
+                </a:solidFill>
+                <a:latin typeface="Hiragino Sans"/>
+              </a:rPr>
+              <a:t>v2 (徹夜)</a:t>
+            </a:r>
+          </a:p>
+        </p:txBody>
+      </p:sp>
+      <p:sp>
+        <p:nvSpPr>
+          <p:cNvPr id="9" name="Rounded Rectangle 8"/>
+          <p:cNvSpPr/>
+          <p:nvPr/>
+        </p:nvSpPr>
+        <p:spPr>
+          <a:xfrm>
+            <a:off x="6032349" y="1047723"/>
+            <a:ext cx="2070048" cy="317492"/>
+          </a:xfrm>
+          <a:prstGeom prst="roundRect">
+            <a:avLst/>
+          </a:prstGeom>
+          <a:solidFill>
+            <a:srgbClr val="252E42"/>
+          </a:solidFill>
+          <a:ln w="12700">
+            <a:solidFill>
+              <a:srgbClr val="FFC72C"/>
+            </a:solidFill>
+          </a:ln>
+          <a:effectLst/>
+        </p:spPr>
+        <p:style>
+          <a:lnRef idx="1">
+            <a:schemeClr val="accent1"/>
+          </a:lnRef>
+          <a:fillRef idx="3">
+            <a:schemeClr val="accent1"/>
+          </a:fillRef>
+          <a:effectRef idx="2">
+            <a:schemeClr val="accent1"/>
+          </a:effectRef>
+          <a:fontRef idx="minor">
+            <a:schemeClr val="lt1"/>
+          </a:fontRef>
+        </p:style>
+        <p:txBody>
+          <a:bodyPr rtlCol="0" anchor="ctr"/>
+          <a:lstStyle/>
+          <a:p>
+            <a:pPr algn="ctr"/>
+          </a:p>
+        </p:txBody>
+      </p:sp>
+      <p:sp>
+        <p:nvSpPr>
+          <p:cNvPr id="10" name="TextBox 9"/>
+          <p:cNvSpPr txBox="1"/>
+          <p:nvPr/>
+        </p:nvSpPr>
+        <p:spPr>
+          <a:xfrm>
+            <a:off x="6095847" y="1079473"/>
+            <a:ext cx="1943051" cy="253993"/>
+          </a:xfrm>
+          <a:prstGeom prst="rect">
+            <a:avLst/>
+          </a:prstGeom>
+          <a:noFill/>
+        </p:spPr>
+        <p:txBody>
+          <a:bodyPr wrap="square" anchor="ctr" lIns="45720" rIns="45720">
+            <a:spAutoFit/>
+          </a:bodyPr>
+          <a:lstStyle/>
+          <a:p>
+            <a:pPr algn="ctr"/>
+            <a:r>
+              <a:rPr sz="1300" b="1">
+                <a:solidFill>
+                  <a:srgbClr val="FFC72C"/>
+                </a:solidFill>
+                <a:latin typeface="Hiragino Sans"/>
+              </a:rPr>
+              <a:t>v3 (本気3者)</a:t>
+            </a:r>
+          </a:p>
+        </p:txBody>
+      </p:sp>
+      <p:sp>
+        <p:nvSpPr>
+          <p:cNvPr id="11" name="Rounded Rectangle 10"/>
+          <p:cNvSpPr/>
+          <p:nvPr/>
+        </p:nvSpPr>
+        <p:spPr>
+          <a:xfrm>
+            <a:off x="507987" y="1428714"/>
+            <a:ext cx="1562060" cy="285742"/>
+          </a:xfrm>
+          <a:prstGeom prst="roundRect">
+            <a:avLst/>
+          </a:prstGeom>
+          <a:solidFill>
+            <a:srgbClr val="252E42"/>
+          </a:solidFill>
+          <a:ln>
+            <a:noFill/>
+          </a:ln>
+          <a:effectLst/>
+        </p:spPr>
+        <p:style>
+          <a:lnRef idx="1">
+            <a:schemeClr val="accent1"/>
+          </a:lnRef>
+          <a:fillRef idx="3">
+            <a:schemeClr val="accent1"/>
+          </a:fillRef>
+          <a:effectRef idx="2">
+            <a:schemeClr val="accent1"/>
+          </a:effectRef>
+          <a:fontRef idx="minor">
+            <a:schemeClr val="lt1"/>
+          </a:fontRef>
+        </p:style>
+        <p:txBody>
+          <a:bodyPr rtlCol="0" anchor="ctr"/>
+          <a:lstStyle/>
+          <a:p>
+            <a:pPr algn="ctr"/>
+          </a:p>
+        </p:txBody>
+      </p:sp>
+      <p:sp>
+        <p:nvSpPr>
+          <p:cNvPr id="12" name="TextBox 11"/>
+          <p:cNvSpPr txBox="1"/>
+          <p:nvPr/>
+        </p:nvSpPr>
+        <p:spPr>
+          <a:xfrm>
+            <a:off x="571485" y="1454113"/>
+            <a:ext cx="1435064" cy="241293"/>
+          </a:xfrm>
+          <a:prstGeom prst="rect">
+            <a:avLst/>
+          </a:prstGeom>
+          <a:noFill/>
+        </p:spPr>
+        <p:txBody>
+          <a:bodyPr wrap="square" anchor="ctr" lIns="45720" rIns="45720">
+            <a:spAutoFit/>
+          </a:bodyPr>
+          <a:lstStyle/>
+          <a:p>
+            <a:pPr algn="l"/>
+            <a:r>
+              <a:rPr sz="1100" b="1">
+                <a:solidFill>
+                  <a:srgbClr val="FFFFFF"/>
+                </a:solidFill>
+                <a:latin typeface="Hiragino Sans"/>
+              </a:rPr>
+              <a:t>議論方式</a:t>
+            </a:r>
+          </a:p>
+        </p:txBody>
+      </p:sp>
+      <p:sp>
+        <p:nvSpPr>
+          <p:cNvPr id="13" name="Rounded Rectangle 12"/>
+          <p:cNvSpPr/>
+          <p:nvPr/>
+        </p:nvSpPr>
+        <p:spPr>
+          <a:xfrm>
+            <a:off x="2095447" y="1428714"/>
+            <a:ext cx="1943051" cy="285742"/>
+          </a:xfrm>
+          <a:prstGeom prst="roundRect">
+            <a:avLst/>
+          </a:prstGeom>
+          <a:solidFill>
+            <a:srgbClr val="252E42"/>
+          </a:solidFill>
+          <a:ln>
+            <a:noFill/>
+          </a:ln>
+          <a:effectLst/>
+        </p:spPr>
+        <p:style>
+          <a:lnRef idx="1">
+            <a:schemeClr val="accent1"/>
+          </a:lnRef>
+          <a:fillRef idx="3">
+            <a:schemeClr val="accent1"/>
+          </a:fillRef>
+          <a:effectRef idx="2">
+            <a:schemeClr val="accent1"/>
+          </a:effectRef>
+          <a:fontRef idx="minor">
+            <a:schemeClr val="lt1"/>
+          </a:fontRef>
+        </p:style>
+        <p:txBody>
+          <a:bodyPr rtlCol="0" anchor="ctr"/>
+          <a:lstStyle/>
+          <a:p>
+            <a:pPr algn="ctr"/>
+          </a:p>
+        </p:txBody>
+      </p:sp>
+      <p:sp>
+        <p:nvSpPr>
+          <p:cNvPr id="14" name="TextBox 13"/>
+          <p:cNvSpPr txBox="1"/>
+          <p:nvPr/>
+        </p:nvSpPr>
+        <p:spPr>
+          <a:xfrm>
+            <a:off x="2158946" y="1454113"/>
+            <a:ext cx="1816054" cy="241293"/>
+          </a:xfrm>
+          <a:prstGeom prst="rect">
+            <a:avLst/>
+          </a:prstGeom>
+          <a:noFill/>
+        </p:spPr>
+        <p:txBody>
+          <a:bodyPr wrap="square" anchor="ctr" lIns="45720" rIns="45720">
+            <a:spAutoFit/>
+          </a:bodyPr>
+          <a:lstStyle/>
+          <a:p>
+            <a:pPr algn="l"/>
+            <a:r>
+              <a:rPr sz="1000" b="0">
+                <a:solidFill>
+                  <a:srgbClr val="FFFFFF"/>
+                </a:solidFill>
+                <a:latin typeface="Hiragino Sans"/>
+              </a:rPr>
+              <a:t>14ラウンド</a:t>
+            </a:r>
+          </a:p>
+        </p:txBody>
+      </p:sp>
+      <p:sp>
+        <p:nvSpPr>
+          <p:cNvPr id="15" name="Rounded Rectangle 14"/>
+          <p:cNvSpPr/>
+          <p:nvPr/>
+        </p:nvSpPr>
+        <p:spPr>
+          <a:xfrm>
+            <a:off x="4063898" y="1428714"/>
+            <a:ext cx="1943051" cy="285742"/>
+          </a:xfrm>
+          <a:prstGeom prst="roundRect">
+            <a:avLst/>
+          </a:prstGeom>
+          <a:solidFill>
+            <a:srgbClr val="252E42"/>
+          </a:solidFill>
+          <a:ln>
+            <a:noFill/>
+          </a:ln>
+          <a:effectLst/>
+        </p:spPr>
+        <p:style>
+          <a:lnRef idx="1">
+            <a:schemeClr val="accent1"/>
+          </a:lnRef>
+          <a:fillRef idx="3">
+            <a:schemeClr val="accent1"/>
+          </a:fillRef>
+          <a:effectRef idx="2">
+            <a:schemeClr val="accent1"/>
+          </a:effectRef>
+          <a:fontRef idx="minor">
+            <a:schemeClr val="lt1"/>
+          </a:fontRef>
+        </p:style>
+        <p:txBody>
+          <a:bodyPr rtlCol="0" anchor="ctr"/>
+          <a:lstStyle/>
+          <a:p>
+            <a:pPr algn="ctr"/>
+          </a:p>
+        </p:txBody>
+      </p:sp>
+      <p:sp>
+        <p:nvSpPr>
+          <p:cNvPr id="16" name="TextBox 15"/>
+          <p:cNvSpPr txBox="1"/>
+          <p:nvPr/>
+        </p:nvSpPr>
+        <p:spPr>
+          <a:xfrm>
+            <a:off x="4127396" y="1454113"/>
+            <a:ext cx="1816054" cy="241293"/>
+          </a:xfrm>
+          <a:prstGeom prst="rect">
+            <a:avLst/>
+          </a:prstGeom>
+          <a:noFill/>
+        </p:spPr>
+        <p:txBody>
+          <a:bodyPr wrap="square" anchor="ctr" lIns="45720" rIns="45720">
+            <a:spAutoFit/>
+          </a:bodyPr>
+          <a:lstStyle/>
+          <a:p>
+            <a:pPr algn="l"/>
+            <a:r>
+              <a:rPr sz="1000" b="0">
+                <a:solidFill>
+                  <a:srgbClr val="FFFFFF"/>
+                </a:solidFill>
+                <a:latin typeface="Hiragino Sans"/>
+              </a:rPr>
+              <a:t>7ラウンド</a:t>
+            </a:r>
+          </a:p>
+        </p:txBody>
+      </p:sp>
+      <p:sp>
+        <p:nvSpPr>
+          <p:cNvPr id="17" name="Rounded Rectangle 16"/>
+          <p:cNvSpPr/>
+          <p:nvPr/>
+        </p:nvSpPr>
+        <p:spPr>
+          <a:xfrm>
+            <a:off x="6032349" y="1428714"/>
+            <a:ext cx="2070048" cy="285742"/>
+          </a:xfrm>
+          <a:prstGeom prst="roundRect">
+            <a:avLst/>
+          </a:prstGeom>
+          <a:solidFill>
+            <a:srgbClr val="252E42"/>
+          </a:solidFill>
+          <a:ln>
+            <a:noFill/>
+          </a:ln>
+          <a:effectLst/>
+        </p:spPr>
+        <p:style>
+          <a:lnRef idx="1">
+            <a:schemeClr val="accent1"/>
+          </a:lnRef>
+          <a:fillRef idx="3">
+            <a:schemeClr val="accent1"/>
+          </a:fillRef>
+          <a:effectRef idx="2">
+            <a:schemeClr val="accent1"/>
+          </a:effectRef>
+          <a:fontRef idx="minor">
+            <a:schemeClr val="lt1"/>
+          </a:fontRef>
+        </p:style>
+        <p:txBody>
+          <a:bodyPr rtlCol="0" anchor="ctr"/>
+          <a:lstStyle/>
+          <a:p>
+            <a:pPr algn="ctr"/>
+          </a:p>
+        </p:txBody>
+      </p:sp>
+      <p:sp>
+        <p:nvSpPr>
+          <p:cNvPr id="18" name="TextBox 17"/>
+          <p:cNvSpPr txBox="1"/>
+          <p:nvPr/>
+        </p:nvSpPr>
+        <p:spPr>
+          <a:xfrm>
+            <a:off x="6095847" y="1454113"/>
+            <a:ext cx="1943051" cy="241293"/>
+          </a:xfrm>
+          <a:prstGeom prst="rect">
+            <a:avLst/>
+          </a:prstGeom>
+          <a:noFill/>
+        </p:spPr>
+        <p:txBody>
+          <a:bodyPr wrap="square" anchor="ctr" lIns="45720" rIns="45720">
+            <a:spAutoFit/>
+          </a:bodyPr>
+          <a:lstStyle/>
+          <a:p>
+            <a:pPr algn="l"/>
+            <a:r>
+              <a:rPr sz="1000" b="0">
+                <a:solidFill>
+                  <a:srgbClr val="FFFFFF"/>
+                </a:solidFill>
+                <a:latin typeface="Hiragino Sans"/>
+              </a:rPr>
+              <a:t>20ラウンド ぐるぐる無制限</a:t>
+            </a:r>
+          </a:p>
+        </p:txBody>
+      </p:sp>
+      <p:sp>
+        <p:nvSpPr>
+          <p:cNvPr id="19" name="Rounded Rectangle 18"/>
+          <p:cNvSpPr/>
+          <p:nvPr/>
+        </p:nvSpPr>
+        <p:spPr>
+          <a:xfrm>
+            <a:off x="507987" y="1746206"/>
+            <a:ext cx="1562060" cy="285742"/>
+          </a:xfrm>
+          <a:prstGeom prst="roundRect">
+            <a:avLst/>
+          </a:prstGeom>
+          <a:solidFill>
+            <a:srgbClr val="1A2238"/>
+          </a:solidFill>
+          <a:ln>
+            <a:noFill/>
+          </a:ln>
+          <a:effectLst/>
+        </p:spPr>
+        <p:style>
+          <a:lnRef idx="1">
+            <a:schemeClr val="accent1"/>
+          </a:lnRef>
+          <a:fillRef idx="3">
+            <a:schemeClr val="accent1"/>
+          </a:fillRef>
+          <a:effectRef idx="2">
+            <a:schemeClr val="accent1"/>
+          </a:effectRef>
+          <a:fontRef idx="minor">
+            <a:schemeClr val="lt1"/>
+          </a:fontRef>
+        </p:style>
+        <p:txBody>
+          <a:bodyPr rtlCol="0" anchor="ctr"/>
+          <a:lstStyle/>
+          <a:p>
+            <a:pPr algn="ctr"/>
+          </a:p>
+        </p:txBody>
+      </p:sp>
+      <p:sp>
+        <p:nvSpPr>
+          <p:cNvPr id="20" name="TextBox 19"/>
+          <p:cNvSpPr txBox="1"/>
+          <p:nvPr/>
+        </p:nvSpPr>
+        <p:spPr>
+          <a:xfrm>
+            <a:off x="571485" y="1771605"/>
+            <a:ext cx="1435064" cy="241293"/>
+          </a:xfrm>
+          <a:prstGeom prst="rect">
+            <a:avLst/>
+          </a:prstGeom>
+          <a:noFill/>
+        </p:spPr>
+        <p:txBody>
+          <a:bodyPr wrap="square" anchor="ctr" lIns="45720" rIns="45720">
+            <a:spAutoFit/>
+          </a:bodyPr>
+          <a:lstStyle/>
+          <a:p>
+            <a:pPr algn="l"/>
+            <a:r>
+              <a:rPr sz="1100" b="1">
+                <a:solidFill>
+                  <a:srgbClr val="FFFFFF"/>
+                </a:solidFill>
+                <a:latin typeface="Hiragino Sans"/>
+              </a:rPr>
+              <a:t>投資効率指標</a:t>
+            </a:r>
+          </a:p>
+        </p:txBody>
+      </p:sp>
+      <p:sp>
+        <p:nvSpPr>
+          <p:cNvPr id="21" name="Rounded Rectangle 20"/>
+          <p:cNvSpPr/>
+          <p:nvPr/>
+        </p:nvSpPr>
+        <p:spPr>
+          <a:xfrm>
+            <a:off x="2095447" y="1746206"/>
+            <a:ext cx="1943051" cy="285742"/>
+          </a:xfrm>
+          <a:prstGeom prst="roundRect">
+            <a:avLst/>
+          </a:prstGeom>
+          <a:solidFill>
+            <a:srgbClr val="1A2238"/>
+          </a:solidFill>
+          <a:ln>
+            <a:noFill/>
+          </a:ln>
+          <a:effectLst/>
+        </p:spPr>
+        <p:style>
+          <a:lnRef idx="1">
+            <a:schemeClr val="accent1"/>
+          </a:lnRef>
+          <a:fillRef idx="3">
+            <a:schemeClr val="accent1"/>
+          </a:fillRef>
+          <a:effectRef idx="2">
+            <a:schemeClr val="accent1"/>
+          </a:effectRef>
+          <a:fontRef idx="minor">
+            <a:schemeClr val="lt1"/>
+          </a:fontRef>
+        </p:style>
+        <p:txBody>
+          <a:bodyPr rtlCol="0" anchor="ctr"/>
+          <a:lstStyle/>
+          <a:p>
+            <a:pPr algn="ctr"/>
+          </a:p>
+        </p:txBody>
+      </p:sp>
+      <p:sp>
+        <p:nvSpPr>
+          <p:cNvPr id="22" name="TextBox 21"/>
+          <p:cNvSpPr txBox="1"/>
+          <p:nvPr/>
+        </p:nvSpPr>
+        <p:spPr>
+          <a:xfrm>
+            <a:off x="2158946" y="1771605"/>
+            <a:ext cx="1816054" cy="241293"/>
+          </a:xfrm>
+          <a:prstGeom prst="rect">
+            <a:avLst/>
+          </a:prstGeom>
+          <a:noFill/>
+        </p:spPr>
+        <p:txBody>
+          <a:bodyPr wrap="square" anchor="ctr" lIns="45720" rIns="45720">
+            <a:spAutoFit/>
+          </a:bodyPr>
+          <a:lstStyle/>
+          <a:p>
+            <a:pPr algn="l"/>
+            <a:r>
+              <a:rPr sz="1000" b="0">
+                <a:solidFill>
+                  <a:srgbClr val="FFFFFF"/>
+                </a:solidFill>
+                <a:latin typeface="Hiragino Sans"/>
+              </a:rPr>
+              <a:t>SAC-Lagrangian + 月コスト目標</a:t>
+            </a:r>
+          </a:p>
+        </p:txBody>
+      </p:sp>
+      <p:sp>
+        <p:nvSpPr>
+          <p:cNvPr id="23" name="Rounded Rectangle 22"/>
+          <p:cNvSpPr/>
+          <p:nvPr/>
+        </p:nvSpPr>
+        <p:spPr>
+          <a:xfrm>
+            <a:off x="4063898" y="1746206"/>
+            <a:ext cx="1943051" cy="285742"/>
+          </a:xfrm>
+          <a:prstGeom prst="roundRect">
+            <a:avLst/>
+          </a:prstGeom>
+          <a:solidFill>
+            <a:srgbClr val="1A2238"/>
+          </a:solidFill>
+          <a:ln>
+            <a:noFill/>
+          </a:ln>
+          <a:effectLst/>
+        </p:spPr>
+        <p:style>
+          <a:lnRef idx="1">
+            <a:schemeClr val="accent1"/>
+          </a:lnRef>
+          <a:fillRef idx="3">
+            <a:schemeClr val="accent1"/>
+          </a:fillRef>
+          <a:effectRef idx="2">
+            <a:schemeClr val="accent1"/>
+          </a:effectRef>
+          <a:fontRef idx="minor">
+            <a:schemeClr val="lt1"/>
+          </a:fontRef>
+        </p:style>
+        <p:txBody>
+          <a:bodyPr rtlCol="0" anchor="ctr"/>
+          <a:lstStyle/>
+          <a:p>
+            <a:pPr algn="ctr"/>
+          </a:p>
+        </p:txBody>
+      </p:sp>
+      <p:sp>
+        <p:nvSpPr>
+          <p:cNvPr id="24" name="TextBox 23"/>
+          <p:cNvSpPr txBox="1"/>
+          <p:nvPr/>
+        </p:nvSpPr>
+        <p:spPr>
+          <a:xfrm>
+            <a:off x="4127396" y="1771605"/>
+            <a:ext cx="1816054" cy="241293"/>
+          </a:xfrm>
+          <a:prstGeom prst="rect">
+            <a:avLst/>
+          </a:prstGeom>
+          <a:noFill/>
+        </p:spPr>
+        <p:txBody>
+          <a:bodyPr wrap="square" anchor="ctr" lIns="45720" rIns="45720">
+            <a:spAutoFit/>
+          </a:bodyPr>
+          <a:lstStyle/>
+          <a:p>
+            <a:pPr algn="l"/>
+            <a:r>
+              <a:rPr sz="1000" b="0">
+                <a:solidFill>
+                  <a:srgbClr val="FFFFFF"/>
+                </a:solidFill>
+                <a:latin typeface="Hiragino Sans"/>
+              </a:rPr>
+              <a:t>ProfitPerHour (バグ含)</a:t>
+            </a:r>
+          </a:p>
+        </p:txBody>
+      </p:sp>
+      <p:sp>
+        <p:nvSpPr>
+          <p:cNvPr id="25" name="Rounded Rectangle 24"/>
+          <p:cNvSpPr/>
+          <p:nvPr/>
+        </p:nvSpPr>
+        <p:spPr>
+          <a:xfrm>
+            <a:off x="6032349" y="1746206"/>
+            <a:ext cx="2070048" cy="285742"/>
+          </a:xfrm>
+          <a:prstGeom prst="roundRect">
+            <a:avLst/>
+          </a:prstGeom>
+          <a:solidFill>
+            <a:srgbClr val="1A2238"/>
+          </a:solidFill>
+          <a:ln>
+            <a:noFill/>
+          </a:ln>
+          <a:effectLst/>
+        </p:spPr>
+        <p:style>
+          <a:lnRef idx="1">
+            <a:schemeClr val="accent1"/>
+          </a:lnRef>
+          <a:fillRef idx="3">
+            <a:schemeClr val="accent1"/>
+          </a:fillRef>
+          <a:effectRef idx="2">
+            <a:schemeClr val="accent1"/>
+          </a:effectRef>
+          <a:fontRef idx="minor">
+            <a:schemeClr val="lt1"/>
+          </a:fontRef>
+        </p:style>
+        <p:txBody>
+          <a:bodyPr rtlCol="0" anchor="ctr"/>
+          <a:lstStyle/>
+          <a:p>
+            <a:pPr algn="ctr"/>
+          </a:p>
+        </p:txBody>
+      </p:sp>
+      <p:sp>
+        <p:nvSpPr>
+          <p:cNvPr id="26" name="TextBox 25"/>
+          <p:cNvSpPr txBox="1"/>
+          <p:nvPr/>
+        </p:nvSpPr>
+        <p:spPr>
+          <a:xfrm>
+            <a:off x="6095847" y="1771605"/>
+            <a:ext cx="1943051" cy="241293"/>
+          </a:xfrm>
+          <a:prstGeom prst="rect">
+            <a:avLst/>
+          </a:prstGeom>
+          <a:noFill/>
+        </p:spPr>
+        <p:txBody>
+          <a:bodyPr wrap="square" anchor="ctr" lIns="45720" rIns="45720">
+            <a:spAutoFit/>
+          </a:bodyPr>
+          <a:lstStyle/>
+          <a:p>
+            <a:pPr algn="l"/>
+            <a:r>
+              <a:rPr sz="1000" b="0">
+                <a:solidFill>
+                  <a:srgbClr val="FFFFFF"/>
+                </a:solidFill>
+                <a:latin typeface="Hiragino Sans"/>
+              </a:rPr>
+              <a:t>Trade-EHR (分母ガード+MA30)</a:t>
+            </a:r>
+          </a:p>
+        </p:txBody>
+      </p:sp>
+      <p:sp>
+        <p:nvSpPr>
+          <p:cNvPr id="27" name="Rounded Rectangle 26"/>
+          <p:cNvSpPr/>
+          <p:nvPr/>
+        </p:nvSpPr>
+        <p:spPr>
+          <a:xfrm>
+            <a:off x="507987" y="2063698"/>
+            <a:ext cx="1562060" cy="285742"/>
+          </a:xfrm>
+          <a:prstGeom prst="roundRect">
+            <a:avLst/>
+          </a:prstGeom>
+          <a:solidFill>
+            <a:srgbClr val="252E42"/>
+          </a:solidFill>
+          <a:ln>
+            <a:noFill/>
+          </a:ln>
+          <a:effectLst/>
+        </p:spPr>
+        <p:style>
+          <a:lnRef idx="1">
+            <a:schemeClr val="accent1"/>
+          </a:lnRef>
+          <a:fillRef idx="3">
+            <a:schemeClr val="accent1"/>
+          </a:fillRef>
+          <a:effectRef idx="2">
+            <a:schemeClr val="accent1"/>
+          </a:effectRef>
+          <a:fontRef idx="minor">
+            <a:schemeClr val="lt1"/>
+          </a:fontRef>
+        </p:style>
+        <p:txBody>
+          <a:bodyPr rtlCol="0" anchor="ctr"/>
+          <a:lstStyle/>
+          <a:p>
+            <a:pPr algn="ctr"/>
+          </a:p>
+        </p:txBody>
+      </p:sp>
+      <p:sp>
+        <p:nvSpPr>
+          <p:cNvPr id="28" name="TextBox 27"/>
+          <p:cNvSpPr txBox="1"/>
+          <p:nvPr/>
+        </p:nvSpPr>
+        <p:spPr>
+          <a:xfrm>
+            <a:off x="571485" y="2089097"/>
+            <a:ext cx="1435064" cy="241293"/>
+          </a:xfrm>
+          <a:prstGeom prst="rect">
+            <a:avLst/>
+          </a:prstGeom>
+          <a:noFill/>
+        </p:spPr>
+        <p:txBody>
+          <a:bodyPr wrap="square" anchor="ctr" lIns="45720" rIns="45720">
+            <a:spAutoFit/>
+          </a:bodyPr>
+          <a:lstStyle/>
+          <a:p>
+            <a:pPr algn="l"/>
+            <a:r>
+              <a:rPr sz="1100" b="1">
+                <a:solidFill>
+                  <a:srgbClr val="FFFFFF"/>
+                </a:solidFill>
+                <a:latin typeface="Hiragino Sans"/>
+              </a:rPr>
+              <a:t>danjer移植</a:t>
+            </a:r>
+          </a:p>
+        </p:txBody>
+      </p:sp>
+      <p:sp>
+        <p:nvSpPr>
+          <p:cNvPr id="29" name="Rounded Rectangle 28"/>
+          <p:cNvSpPr/>
+          <p:nvPr/>
+        </p:nvSpPr>
+        <p:spPr>
+          <a:xfrm>
+            <a:off x="2095447" y="2063698"/>
+            <a:ext cx="1943051" cy="285742"/>
+          </a:xfrm>
+          <a:prstGeom prst="roundRect">
+            <a:avLst/>
+          </a:prstGeom>
+          <a:solidFill>
+            <a:srgbClr val="252E42"/>
+          </a:solidFill>
+          <a:ln>
+            <a:noFill/>
+          </a:ln>
+          <a:effectLst/>
+        </p:spPr>
+        <p:style>
+          <a:lnRef idx="1">
+            <a:schemeClr val="accent1"/>
+          </a:lnRef>
+          <a:fillRef idx="3">
+            <a:schemeClr val="accent1"/>
+          </a:fillRef>
+          <a:effectRef idx="2">
+            <a:schemeClr val="accent1"/>
+          </a:effectRef>
+          <a:fontRef idx="minor">
+            <a:schemeClr val="lt1"/>
+          </a:fontRef>
+        </p:style>
+        <p:txBody>
+          <a:bodyPr rtlCol="0" anchor="ctr"/>
+          <a:lstStyle/>
+          <a:p>
+            <a:pPr algn="ctr"/>
+          </a:p>
+        </p:txBody>
+      </p:sp>
+      <p:sp>
+        <p:nvSpPr>
+          <p:cNvPr id="30" name="TextBox 29"/>
+          <p:cNvSpPr txBox="1"/>
+          <p:nvPr/>
+        </p:nvSpPr>
+        <p:spPr>
+          <a:xfrm>
+            <a:off x="2158946" y="2089097"/>
+            <a:ext cx="1816054" cy="241293"/>
+          </a:xfrm>
+          <a:prstGeom prst="rect">
+            <a:avLst/>
+          </a:prstGeom>
+          <a:noFill/>
+        </p:spPr>
+        <p:txBody>
+          <a:bodyPr wrap="square" anchor="ctr" lIns="45720" rIns="45720">
+            <a:spAutoFit/>
+          </a:bodyPr>
+          <a:lstStyle/>
+          <a:p>
+            <a:pPr algn="l"/>
+            <a:r>
+              <a:rPr sz="1000" b="0">
+                <a:solidFill>
+                  <a:srgbClr val="FFFFFF"/>
+                </a:solidFill>
+                <a:latin typeface="Hiragino Sans"/>
+              </a:rPr>
+              <a:t>DNA-0〜3段階, BC試験</a:t>
+            </a:r>
+          </a:p>
+        </p:txBody>
+      </p:sp>
+      <p:sp>
+        <p:nvSpPr>
+          <p:cNvPr id="31" name="Rounded Rectangle 30"/>
+          <p:cNvSpPr/>
+          <p:nvPr/>
+        </p:nvSpPr>
+        <p:spPr>
+          <a:xfrm>
+            <a:off x="4063898" y="2063698"/>
+            <a:ext cx="1943051" cy="285742"/>
+          </a:xfrm>
+          <a:prstGeom prst="roundRect">
+            <a:avLst/>
+          </a:prstGeom>
+          <a:solidFill>
+            <a:srgbClr val="252E42"/>
+          </a:solidFill>
+          <a:ln>
+            <a:noFill/>
+          </a:ln>
+          <a:effectLst/>
+        </p:spPr>
+        <p:style>
+          <a:lnRef idx="1">
+            <a:schemeClr val="accent1"/>
+          </a:lnRef>
+          <a:fillRef idx="3">
+            <a:schemeClr val="accent1"/>
+          </a:fillRef>
+          <a:effectRef idx="2">
+            <a:schemeClr val="accent1"/>
+          </a:effectRef>
+          <a:fontRef idx="minor">
+            <a:schemeClr val="lt1"/>
+          </a:fontRef>
+        </p:style>
+        <p:txBody>
+          <a:bodyPr rtlCol="0" anchor="ctr"/>
+          <a:lstStyle/>
+          <a:p>
+            <a:pPr algn="ctr"/>
+          </a:p>
+        </p:txBody>
+      </p:sp>
+      <p:sp>
+        <p:nvSpPr>
+          <p:cNvPr id="32" name="TextBox 31"/>
+          <p:cNvSpPr txBox="1"/>
+          <p:nvPr/>
+        </p:nvSpPr>
+        <p:spPr>
+          <a:xfrm>
+            <a:off x="4127396" y="2089097"/>
+            <a:ext cx="1816054" cy="241293"/>
+          </a:xfrm>
+          <a:prstGeom prst="rect">
+            <a:avLst/>
+          </a:prstGeom>
+          <a:noFill/>
+        </p:spPr>
+        <p:txBody>
+          <a:bodyPr wrap="square" anchor="ctr" lIns="45720" rIns="45720">
+            <a:spAutoFit/>
+          </a:bodyPr>
+          <a:lstStyle/>
+          <a:p>
+            <a:pPr algn="l"/>
+            <a:r>
+              <a:rPr sz="1000" b="0">
+                <a:solidFill>
+                  <a:srgbClr val="FFFFFF"/>
+                </a:solidFill>
+                <a:latin typeface="Hiragino Sans"/>
+              </a:rPr>
+              <a:t>RAG+常駐 49,667件全件</a:t>
+            </a:r>
+          </a:p>
+        </p:txBody>
+      </p:sp>
+      <p:sp>
+        <p:nvSpPr>
+          <p:cNvPr id="33" name="Rounded Rectangle 32"/>
+          <p:cNvSpPr/>
+          <p:nvPr/>
+        </p:nvSpPr>
+        <p:spPr>
+          <a:xfrm>
+            <a:off x="6032349" y="2063698"/>
+            <a:ext cx="2070048" cy="285742"/>
+          </a:xfrm>
+          <a:prstGeom prst="roundRect">
+            <a:avLst/>
+          </a:prstGeom>
+          <a:solidFill>
+            <a:srgbClr val="252E42"/>
+          </a:solidFill>
+          <a:ln>
+            <a:noFill/>
+          </a:ln>
+          <a:effectLst/>
+        </p:spPr>
+        <p:style>
+          <a:lnRef idx="1">
+            <a:schemeClr val="accent1"/>
+          </a:lnRef>
+          <a:fillRef idx="3">
+            <a:schemeClr val="accent1"/>
+          </a:fillRef>
+          <a:effectRef idx="2">
+            <a:schemeClr val="accent1"/>
+          </a:effectRef>
+          <a:fontRef idx="minor">
+            <a:schemeClr val="lt1"/>
+          </a:fontRef>
+        </p:style>
+        <p:txBody>
+          <a:bodyPr rtlCol="0" anchor="ctr"/>
+          <a:lstStyle/>
+          <a:p>
+            <a:pPr algn="ctr"/>
+          </a:p>
+        </p:txBody>
+      </p:sp>
+      <p:sp>
+        <p:nvSpPr>
+          <p:cNvPr id="34" name="TextBox 33"/>
+          <p:cNvSpPr txBox="1"/>
+          <p:nvPr/>
+        </p:nvSpPr>
+        <p:spPr>
+          <a:xfrm>
+            <a:off x="6095847" y="2089097"/>
+            <a:ext cx="1943051" cy="241293"/>
+          </a:xfrm>
+          <a:prstGeom prst="rect">
+            <a:avLst/>
+          </a:prstGeom>
+          <a:noFill/>
+        </p:spPr>
+        <p:txBody>
+          <a:bodyPr wrap="square" anchor="ctr" lIns="45720" rIns="45720">
+            <a:spAutoFit/>
+          </a:bodyPr>
+          <a:lstStyle/>
+          <a:p>
+            <a:pPr algn="l"/>
+            <a:r>
+              <a:rPr sz="1000" b="0">
+                <a:solidFill>
+                  <a:srgbClr val="FFFFFF"/>
+                </a:solidFill>
+                <a:latin typeface="Hiragino Sans"/>
+              </a:rPr>
+              <a:t>質ベース絞り込み (投資判断のみ常駐)</a:t>
+            </a:r>
+          </a:p>
+        </p:txBody>
+      </p:sp>
+      <p:sp>
+        <p:nvSpPr>
+          <p:cNvPr id="35" name="Rounded Rectangle 34"/>
+          <p:cNvSpPr/>
+          <p:nvPr/>
+        </p:nvSpPr>
+        <p:spPr>
+          <a:xfrm>
+            <a:off x="507987" y="2381190"/>
+            <a:ext cx="1562060" cy="285742"/>
+          </a:xfrm>
+          <a:prstGeom prst="roundRect">
+            <a:avLst/>
+          </a:prstGeom>
+          <a:solidFill>
+            <a:srgbClr val="1A2238"/>
+          </a:solidFill>
+          <a:ln>
+            <a:noFill/>
+          </a:ln>
+          <a:effectLst/>
+        </p:spPr>
+        <p:style>
+          <a:lnRef idx="1">
+            <a:schemeClr val="accent1"/>
+          </a:lnRef>
+          <a:fillRef idx="3">
+            <a:schemeClr val="accent1"/>
+          </a:fillRef>
+          <a:effectRef idx="2">
+            <a:schemeClr val="accent1"/>
+          </a:effectRef>
+          <a:fontRef idx="minor">
+            <a:schemeClr val="lt1"/>
+          </a:fontRef>
+        </p:style>
+        <p:txBody>
+          <a:bodyPr rtlCol="0" anchor="ctr"/>
+          <a:lstStyle/>
+          <a:p>
+            <a:pPr algn="ctr"/>
+          </a:p>
+        </p:txBody>
+      </p:sp>
+      <p:sp>
+        <p:nvSpPr>
+          <p:cNvPr id="36" name="TextBox 35"/>
+          <p:cNvSpPr txBox="1"/>
+          <p:nvPr/>
+        </p:nvSpPr>
+        <p:spPr>
+          <a:xfrm>
+            <a:off x="571485" y="2406589"/>
+            <a:ext cx="1435064" cy="241293"/>
+          </a:xfrm>
+          <a:prstGeom prst="rect">
+            <a:avLst/>
+          </a:prstGeom>
+          <a:noFill/>
+        </p:spPr>
+        <p:txBody>
+          <a:bodyPr wrap="square" anchor="ctr" lIns="45720" rIns="45720">
+            <a:spAutoFit/>
+          </a:bodyPr>
+          <a:lstStyle/>
+          <a:p>
+            <a:pPr algn="l"/>
+            <a:r>
+              <a:rPr sz="1100" b="1">
+                <a:solidFill>
+                  <a:srgbClr val="FFFFFF"/>
+                </a:solidFill>
+                <a:latin typeface="Hiragino Sans"/>
+              </a:rPr>
+              <a:t>アーキ</a:t>
+            </a:r>
+          </a:p>
+        </p:txBody>
+      </p:sp>
+      <p:sp>
+        <p:nvSpPr>
+          <p:cNvPr id="37" name="Rounded Rectangle 36"/>
+          <p:cNvSpPr/>
+          <p:nvPr/>
+        </p:nvSpPr>
+        <p:spPr>
+          <a:xfrm>
+            <a:off x="2095447" y="2381190"/>
+            <a:ext cx="1943051" cy="285742"/>
+          </a:xfrm>
+          <a:prstGeom prst="roundRect">
+            <a:avLst/>
+          </a:prstGeom>
+          <a:solidFill>
+            <a:srgbClr val="1A2238"/>
+          </a:solidFill>
+          <a:ln>
+            <a:noFill/>
+          </a:ln>
+          <a:effectLst/>
+        </p:spPr>
+        <p:style>
+          <a:lnRef idx="1">
+            <a:schemeClr val="accent1"/>
+          </a:lnRef>
+          <a:fillRef idx="3">
+            <a:schemeClr val="accent1"/>
+          </a:fillRef>
+          <a:effectRef idx="2">
+            <a:schemeClr val="accent1"/>
+          </a:effectRef>
+          <a:fontRef idx="minor">
+            <a:schemeClr val="lt1"/>
+          </a:fontRef>
+        </p:style>
+        <p:txBody>
+          <a:bodyPr rtlCol="0" anchor="ctr"/>
+          <a:lstStyle/>
+          <a:p>
+            <a:pPr algn="ctr"/>
+          </a:p>
+        </p:txBody>
+      </p:sp>
+      <p:sp>
+        <p:nvSpPr>
+          <p:cNvPr id="38" name="TextBox 37"/>
+          <p:cNvSpPr txBox="1"/>
+          <p:nvPr/>
+        </p:nvSpPr>
+        <p:spPr>
+          <a:xfrm>
+            <a:off x="2158946" y="2406589"/>
+            <a:ext cx="1816054" cy="241293"/>
+          </a:xfrm>
+          <a:prstGeom prst="rect">
+            <a:avLst/>
+          </a:prstGeom>
+          <a:noFill/>
+        </p:spPr>
+        <p:txBody>
+          <a:bodyPr wrap="square" anchor="ctr" lIns="45720" rIns="45720">
+            <a:spAutoFit/>
+          </a:bodyPr>
+          <a:lstStyle/>
+          <a:p>
+            <a:pPr algn="l"/>
+            <a:r>
+              <a:rPr sz="1000" b="0">
+                <a:solidFill>
+                  <a:srgbClr val="FFFFFF"/>
+                </a:solidFill>
+                <a:latin typeface="Hiragino Sans"/>
+              </a:rPr>
+              <a:t>10エージェント + Particle Filter</a:t>
+            </a:r>
+          </a:p>
+        </p:txBody>
+      </p:sp>
+      <p:sp>
+        <p:nvSpPr>
+          <p:cNvPr id="39" name="Rounded Rectangle 38"/>
+          <p:cNvSpPr/>
+          <p:nvPr/>
+        </p:nvSpPr>
+        <p:spPr>
+          <a:xfrm>
+            <a:off x="4063898" y="2381190"/>
+            <a:ext cx="1943051" cy="285742"/>
+          </a:xfrm>
+          <a:prstGeom prst="roundRect">
+            <a:avLst/>
+          </a:prstGeom>
+          <a:solidFill>
+            <a:srgbClr val="1A2238"/>
+          </a:solidFill>
+          <a:ln>
+            <a:noFill/>
+          </a:ln>
+          <a:effectLst/>
+        </p:spPr>
+        <p:style>
+          <a:lnRef idx="1">
+            <a:schemeClr val="accent1"/>
+          </a:lnRef>
+          <a:fillRef idx="3">
+            <a:schemeClr val="accent1"/>
+          </a:fillRef>
+          <a:effectRef idx="2">
+            <a:schemeClr val="accent1"/>
+          </a:effectRef>
+          <a:fontRef idx="minor">
+            <a:schemeClr val="lt1"/>
+          </a:fontRef>
+        </p:style>
+        <p:txBody>
+          <a:bodyPr rtlCol="0" anchor="ctr"/>
+          <a:lstStyle/>
+          <a:p>
+            <a:pPr algn="ctr"/>
+          </a:p>
+        </p:txBody>
+      </p:sp>
+      <p:sp>
+        <p:nvSpPr>
+          <p:cNvPr id="40" name="TextBox 39"/>
+          <p:cNvSpPr txBox="1"/>
+          <p:nvPr/>
+        </p:nvSpPr>
+        <p:spPr>
+          <a:xfrm>
+            <a:off x="4127396" y="2406589"/>
+            <a:ext cx="1816054" cy="241293"/>
+          </a:xfrm>
+          <a:prstGeom prst="rect">
+            <a:avLst/>
+          </a:prstGeom>
+          <a:noFill/>
+        </p:spPr>
+        <p:txBody>
+          <a:bodyPr wrap="square" anchor="ctr" lIns="45720" rIns="45720">
+            <a:spAutoFit/>
+          </a:bodyPr>
+          <a:lstStyle/>
+          <a:p>
+            <a:pPr algn="l"/>
+            <a:r>
+              <a:rPr sz="1000" b="0">
+                <a:solidFill>
+                  <a:srgbClr val="FFFFFF"/>
+                </a:solidFill>
+                <a:latin typeface="Hiragino Sans"/>
+              </a:rPr>
+              <a:t>3つの魂 (攻め/守り/師匠)</a:t>
+            </a:r>
+          </a:p>
+        </p:txBody>
+      </p:sp>
+      <p:sp>
+        <p:nvSpPr>
+          <p:cNvPr id="41" name="Rounded Rectangle 40"/>
+          <p:cNvSpPr/>
+          <p:nvPr/>
+        </p:nvSpPr>
+        <p:spPr>
+          <a:xfrm>
+            <a:off x="6032349" y="2381190"/>
+            <a:ext cx="2070048" cy="285742"/>
+          </a:xfrm>
+          <a:prstGeom prst="roundRect">
+            <a:avLst/>
+          </a:prstGeom>
+          <a:solidFill>
+            <a:srgbClr val="1A2238"/>
+          </a:solidFill>
+          <a:ln>
+            <a:noFill/>
+          </a:ln>
+          <a:effectLst/>
+        </p:spPr>
+        <p:style>
+          <a:lnRef idx="1">
+            <a:schemeClr val="accent1"/>
+          </a:lnRef>
+          <a:fillRef idx="3">
+            <a:schemeClr val="accent1"/>
+          </a:fillRef>
+          <a:effectRef idx="2">
+            <a:schemeClr val="accent1"/>
+          </a:effectRef>
+          <a:fontRef idx="minor">
+            <a:schemeClr val="lt1"/>
+          </a:fontRef>
+        </p:style>
+        <p:txBody>
+          <a:bodyPr rtlCol="0" anchor="ctr"/>
+          <a:lstStyle/>
+          <a:p>
+            <a:pPr algn="ctr"/>
+          </a:p>
+        </p:txBody>
+      </p:sp>
+      <p:sp>
+        <p:nvSpPr>
+          <p:cNvPr id="42" name="TextBox 41"/>
+          <p:cNvSpPr txBox="1"/>
+          <p:nvPr/>
+        </p:nvSpPr>
+        <p:spPr>
+          <a:xfrm>
+            <a:off x="6095847" y="2406589"/>
+            <a:ext cx="1943051" cy="241293"/>
+          </a:xfrm>
+          <a:prstGeom prst="rect">
+            <a:avLst/>
+          </a:prstGeom>
+          <a:noFill/>
+        </p:spPr>
+        <p:txBody>
+          <a:bodyPr wrap="square" anchor="ctr" lIns="45720" rIns="45720">
+            <a:spAutoFit/>
+          </a:bodyPr>
+          <a:lstStyle/>
+          <a:p>
+            <a:pPr algn="l"/>
+            <a:r>
+              <a:rPr sz="1000" b="0">
+                <a:solidFill>
+                  <a:srgbClr val="FFFFFF"/>
+                </a:solidFill>
+                <a:latin typeface="Hiragino Sans"/>
+              </a:rPr>
+              <a:t>GAIA-Triad 2.0 (4ノード)</a:t>
+            </a:r>
+          </a:p>
+        </p:txBody>
+      </p:sp>
+      <p:sp>
+        <p:nvSpPr>
+          <p:cNvPr id="43" name="Rounded Rectangle 42"/>
+          <p:cNvSpPr/>
+          <p:nvPr/>
+        </p:nvSpPr>
+        <p:spPr>
+          <a:xfrm>
+            <a:off x="507987" y="2698682"/>
+            <a:ext cx="1562060" cy="285742"/>
+          </a:xfrm>
+          <a:prstGeom prst="roundRect">
+            <a:avLst/>
+          </a:prstGeom>
+          <a:solidFill>
+            <a:srgbClr val="252E42"/>
+          </a:solidFill>
+          <a:ln>
+            <a:noFill/>
+          </a:ln>
+          <a:effectLst/>
+        </p:spPr>
+        <p:style>
+          <a:lnRef idx="1">
+            <a:schemeClr val="accent1"/>
+          </a:lnRef>
+          <a:fillRef idx="3">
+            <a:schemeClr val="accent1"/>
+          </a:fillRef>
+          <a:effectRef idx="2">
+            <a:schemeClr val="accent1"/>
+          </a:effectRef>
+          <a:fontRef idx="minor">
+            <a:schemeClr val="lt1"/>
+          </a:fontRef>
+        </p:style>
+        <p:txBody>
+          <a:bodyPr rtlCol="0" anchor="ctr"/>
+          <a:lstStyle/>
+          <a:p>
+            <a:pPr algn="ctr"/>
+          </a:p>
+        </p:txBody>
+      </p:sp>
+      <p:sp>
+        <p:nvSpPr>
+          <p:cNvPr id="44" name="TextBox 43"/>
+          <p:cNvSpPr txBox="1"/>
+          <p:nvPr/>
+        </p:nvSpPr>
+        <p:spPr>
+          <a:xfrm>
+            <a:off x="571485" y="2724081"/>
+            <a:ext cx="1435064" cy="241293"/>
+          </a:xfrm>
+          <a:prstGeom prst="rect">
+            <a:avLst/>
+          </a:prstGeom>
+          <a:noFill/>
+        </p:spPr>
+        <p:txBody>
+          <a:bodyPr wrap="square" anchor="ctr" lIns="45720" rIns="45720">
+            <a:spAutoFit/>
+          </a:bodyPr>
+          <a:lstStyle/>
+          <a:p>
+            <a:pPr algn="l"/>
+            <a:r>
+              <a:rPr sz="1100" b="1">
+                <a:solidFill>
+                  <a:srgbClr val="FFFFFF"/>
+                </a:solidFill>
+                <a:latin typeface="Hiragino Sans"/>
+              </a:rPr>
+              <a:t>右側予測</a:t>
+            </a:r>
+          </a:p>
+        </p:txBody>
+      </p:sp>
+      <p:sp>
+        <p:nvSpPr>
+          <p:cNvPr id="45" name="Rounded Rectangle 44"/>
+          <p:cNvSpPr/>
+          <p:nvPr/>
+        </p:nvSpPr>
+        <p:spPr>
+          <a:xfrm>
+            <a:off x="2095447" y="2698682"/>
+            <a:ext cx="1943051" cy="285742"/>
+          </a:xfrm>
+          <a:prstGeom prst="roundRect">
+            <a:avLst/>
+          </a:prstGeom>
+          <a:solidFill>
+            <a:srgbClr val="252E42"/>
+          </a:solidFill>
+          <a:ln>
+            <a:noFill/>
+          </a:ln>
+          <a:effectLst/>
+        </p:spPr>
+        <p:style>
+          <a:lnRef idx="1">
+            <a:schemeClr val="accent1"/>
+          </a:lnRef>
+          <a:fillRef idx="3">
+            <a:schemeClr val="accent1"/>
+          </a:fillRef>
+          <a:effectRef idx="2">
+            <a:schemeClr val="accent1"/>
+          </a:effectRef>
+          <a:fontRef idx="minor">
+            <a:schemeClr val="lt1"/>
+          </a:fontRef>
+        </p:style>
+        <p:txBody>
+          <a:bodyPr rtlCol="0" anchor="ctr"/>
+          <a:lstStyle/>
+          <a:p>
+            <a:pPr algn="ctr"/>
+          </a:p>
+        </p:txBody>
+      </p:sp>
+      <p:sp>
+        <p:nvSpPr>
+          <p:cNvPr id="46" name="TextBox 45"/>
+          <p:cNvSpPr txBox="1"/>
+          <p:nvPr/>
+        </p:nvSpPr>
+        <p:spPr>
+          <a:xfrm>
+            <a:off x="2158946" y="2724081"/>
+            <a:ext cx="1816054" cy="241293"/>
+          </a:xfrm>
+          <a:prstGeom prst="rect">
+            <a:avLst/>
+          </a:prstGeom>
+          <a:noFill/>
+        </p:spPr>
+        <p:txBody>
+          <a:bodyPr wrap="square" anchor="ctr" lIns="45720" rIns="45720">
+            <a:spAutoFit/>
+          </a:bodyPr>
+          <a:lstStyle/>
+          <a:p>
+            <a:pPr algn="l"/>
+            <a:r>
+              <a:rPr sz="1000" b="0">
+                <a:solidFill>
+                  <a:srgbClr val="FFFFFF"/>
+                </a:solidFill>
+                <a:latin typeface="Hiragino Sans"/>
+              </a:rPr>
+              <a:t>Scenario DSL 述語25</a:t>
+            </a:r>
+          </a:p>
+        </p:txBody>
+      </p:sp>
+      <p:sp>
+        <p:nvSpPr>
+          <p:cNvPr id="47" name="Rounded Rectangle 46"/>
+          <p:cNvSpPr/>
+          <p:nvPr/>
+        </p:nvSpPr>
+        <p:spPr>
+          <a:xfrm>
+            <a:off x="4063898" y="2698682"/>
+            <a:ext cx="1943051" cy="285742"/>
+          </a:xfrm>
+          <a:prstGeom prst="roundRect">
+            <a:avLst/>
+          </a:prstGeom>
+          <a:solidFill>
+            <a:srgbClr val="252E42"/>
+          </a:solidFill>
+          <a:ln>
+            <a:noFill/>
+          </a:ln>
+          <a:effectLst/>
+        </p:spPr>
+        <p:style>
+          <a:lnRef idx="1">
+            <a:schemeClr val="accent1"/>
+          </a:lnRef>
+          <a:fillRef idx="3">
+            <a:schemeClr val="accent1"/>
+          </a:fillRef>
+          <a:effectRef idx="2">
+            <a:schemeClr val="accent1"/>
+          </a:effectRef>
+          <a:fontRef idx="minor">
+            <a:schemeClr val="lt1"/>
+          </a:fontRef>
+        </p:style>
+        <p:txBody>
+          <a:bodyPr rtlCol="0" anchor="ctr"/>
+          <a:lstStyle/>
+          <a:p>
+            <a:pPr algn="ctr"/>
+          </a:p>
+        </p:txBody>
+      </p:sp>
+      <p:sp>
+        <p:nvSpPr>
+          <p:cNvPr id="48" name="TextBox 47"/>
+          <p:cNvSpPr txBox="1"/>
+          <p:nvPr/>
+        </p:nvSpPr>
+        <p:spPr>
+          <a:xfrm>
+            <a:off x="4127396" y="2724081"/>
+            <a:ext cx="1816054" cy="241293"/>
+          </a:xfrm>
+          <a:prstGeom prst="rect">
+            <a:avLst/>
+          </a:prstGeom>
+          <a:noFill/>
+        </p:spPr>
+        <p:txBody>
+          <a:bodyPr wrap="square" anchor="ctr" lIns="45720" rIns="45720">
+            <a:spAutoFit/>
+          </a:bodyPr>
+          <a:lstStyle/>
+          <a:p>
+            <a:pPr algn="l"/>
+            <a:r>
+              <a:rPr sz="1000" b="0">
+                <a:solidFill>
+                  <a:srgbClr val="FFFFFF"/>
+                </a:solidFill>
+                <a:latin typeface="Hiragino Sans"/>
+              </a:rPr>
+              <a:t>Probabilistic Deep Hedging</a:t>
+            </a:r>
+          </a:p>
+        </p:txBody>
+      </p:sp>
+      <p:sp>
+        <p:nvSpPr>
+          <p:cNvPr id="49" name="Rounded Rectangle 48"/>
+          <p:cNvSpPr/>
+          <p:nvPr/>
+        </p:nvSpPr>
+        <p:spPr>
+          <a:xfrm>
+            <a:off x="6032349" y="2698682"/>
+            <a:ext cx="2070048" cy="285742"/>
+          </a:xfrm>
+          <a:prstGeom prst="roundRect">
+            <a:avLst/>
+          </a:prstGeom>
+          <a:solidFill>
+            <a:srgbClr val="252E42"/>
+          </a:solidFill>
+          <a:ln>
+            <a:noFill/>
+          </a:ln>
+          <a:effectLst/>
+        </p:spPr>
+        <p:style>
+          <a:lnRef idx="1">
+            <a:schemeClr val="accent1"/>
+          </a:lnRef>
+          <a:fillRef idx="3">
+            <a:schemeClr val="accent1"/>
+          </a:fillRef>
+          <a:effectRef idx="2">
+            <a:schemeClr val="accent1"/>
+          </a:effectRef>
+          <a:fontRef idx="minor">
+            <a:schemeClr val="lt1"/>
+          </a:fontRef>
+        </p:style>
+        <p:txBody>
+          <a:bodyPr rtlCol="0" anchor="ctr"/>
+          <a:lstStyle/>
+          <a:p>
+            <a:pPr algn="ctr"/>
+          </a:p>
+        </p:txBody>
+      </p:sp>
+      <p:sp>
+        <p:nvSpPr>
+          <p:cNvPr id="50" name="TextBox 49"/>
+          <p:cNvSpPr txBox="1"/>
+          <p:nvPr/>
+        </p:nvSpPr>
+        <p:spPr>
+          <a:xfrm>
+            <a:off x="6095847" y="2724081"/>
+            <a:ext cx="1943051" cy="241293"/>
+          </a:xfrm>
+          <a:prstGeom prst="rect">
+            <a:avLst/>
+          </a:prstGeom>
+          <a:noFill/>
+        </p:spPr>
+        <p:txBody>
+          <a:bodyPr wrap="square" anchor="ctr" lIns="45720" rIns="45720">
+            <a:spAutoFit/>
+          </a:bodyPr>
+          <a:lstStyle/>
+          <a:p>
+            <a:pPr algn="l"/>
+            <a:r>
+              <a:rPr sz="1000" b="0">
+                <a:solidFill>
+                  <a:srgbClr val="FFFFFF"/>
+                </a:solidFill>
+                <a:latin typeface="Hiragino Sans"/>
+              </a:rPr>
+              <a:t>3軸 (方向/確信度/危険度)</a:t>
+            </a:r>
+          </a:p>
+        </p:txBody>
+      </p:sp>
+      <p:sp>
+        <p:nvSpPr>
+          <p:cNvPr id="51" name="Rounded Rectangle 50"/>
+          <p:cNvSpPr/>
+          <p:nvPr/>
+        </p:nvSpPr>
+        <p:spPr>
+          <a:xfrm>
+            <a:off x="507987" y="3016174"/>
+            <a:ext cx="1562060" cy="285742"/>
+          </a:xfrm>
+          <a:prstGeom prst="roundRect">
+            <a:avLst/>
+          </a:prstGeom>
+          <a:solidFill>
+            <a:srgbClr val="1A2238"/>
+          </a:solidFill>
+          <a:ln>
+            <a:noFill/>
+          </a:ln>
+          <a:effectLst/>
+        </p:spPr>
+        <p:style>
+          <a:lnRef idx="1">
+            <a:schemeClr val="accent1"/>
+          </a:lnRef>
+          <a:fillRef idx="3">
+            <a:schemeClr val="accent1"/>
+          </a:fillRef>
+          <a:effectRef idx="2">
+            <a:schemeClr val="accent1"/>
+          </a:effectRef>
+          <a:fontRef idx="minor">
+            <a:schemeClr val="lt1"/>
+          </a:fontRef>
+        </p:style>
+        <p:txBody>
+          <a:bodyPr rtlCol="0" anchor="ctr"/>
+          <a:lstStyle/>
+          <a:p>
+            <a:pPr algn="ctr"/>
+          </a:p>
+        </p:txBody>
+      </p:sp>
+      <p:sp>
+        <p:nvSpPr>
+          <p:cNvPr id="52" name="TextBox 51"/>
+          <p:cNvSpPr txBox="1"/>
+          <p:nvPr/>
+        </p:nvSpPr>
+        <p:spPr>
+          <a:xfrm>
+            <a:off x="571485" y="3041573"/>
+            <a:ext cx="1435064" cy="241293"/>
+          </a:xfrm>
+          <a:prstGeom prst="rect">
+            <a:avLst/>
+          </a:prstGeom>
+          <a:noFill/>
+        </p:spPr>
+        <p:txBody>
+          <a:bodyPr wrap="square" anchor="ctr" lIns="45720" rIns="45720">
+            <a:spAutoFit/>
+          </a:bodyPr>
+          <a:lstStyle/>
+          <a:p>
+            <a:pPr algn="l"/>
+            <a:r>
+              <a:rPr sz="1100" b="1">
+                <a:solidFill>
+                  <a:srgbClr val="FFFFFF"/>
+                </a:solidFill>
+                <a:latin typeface="Hiragino Sans"/>
+              </a:rPr>
+              <a:t>レバ</a:t>
+            </a:r>
+          </a:p>
+        </p:txBody>
+      </p:sp>
+      <p:sp>
+        <p:nvSpPr>
+          <p:cNvPr id="53" name="Rounded Rectangle 52"/>
+          <p:cNvSpPr/>
+          <p:nvPr/>
+        </p:nvSpPr>
+        <p:spPr>
+          <a:xfrm>
+            <a:off x="2095447" y="3016174"/>
+            <a:ext cx="1943051" cy="285742"/>
+          </a:xfrm>
+          <a:prstGeom prst="roundRect">
+            <a:avLst/>
+          </a:prstGeom>
+          <a:solidFill>
+            <a:srgbClr val="1A2238"/>
+          </a:solidFill>
+          <a:ln>
+            <a:noFill/>
+          </a:ln>
+          <a:effectLst/>
+        </p:spPr>
+        <p:style>
+          <a:lnRef idx="1">
+            <a:schemeClr val="accent1"/>
+          </a:lnRef>
+          <a:fillRef idx="3">
+            <a:schemeClr val="accent1"/>
+          </a:fillRef>
+          <a:effectRef idx="2">
+            <a:schemeClr val="accent1"/>
+          </a:effectRef>
+          <a:fontRef idx="minor">
+            <a:schemeClr val="lt1"/>
+          </a:fontRef>
+        </p:style>
+        <p:txBody>
+          <a:bodyPr rtlCol="0" anchor="ctr"/>
+          <a:lstStyle/>
+          <a:p>
+            <a:pPr algn="ctr"/>
+          </a:p>
+        </p:txBody>
+      </p:sp>
+      <p:sp>
+        <p:nvSpPr>
+          <p:cNvPr id="54" name="TextBox 53"/>
+          <p:cNvSpPr txBox="1"/>
+          <p:nvPr/>
+        </p:nvSpPr>
+        <p:spPr>
+          <a:xfrm>
+            <a:off x="2158946" y="3041573"/>
+            <a:ext cx="1816054" cy="241293"/>
+          </a:xfrm>
+          <a:prstGeom prst="rect">
+            <a:avLst/>
+          </a:prstGeom>
+          <a:noFill/>
+        </p:spPr>
+        <p:txBody>
+          <a:bodyPr wrap="square" anchor="ctr" lIns="45720" rIns="45720">
+            <a:spAutoFit/>
+          </a:bodyPr>
+          <a:lstStyle/>
+          <a:p>
+            <a:pPr algn="l"/>
+            <a:r>
+              <a:rPr sz="1000" b="0">
+                <a:solidFill>
+                  <a:srgbClr val="FFFFFF"/>
+                </a:solidFill>
+                <a:latin typeface="Hiragino Sans"/>
+              </a:rPr>
+              <a:t>Half-Kelly</a:t>
+            </a:r>
+          </a:p>
+        </p:txBody>
+      </p:sp>
+      <p:sp>
+        <p:nvSpPr>
+          <p:cNvPr id="55" name="Rounded Rectangle 54"/>
+          <p:cNvSpPr/>
+          <p:nvPr/>
+        </p:nvSpPr>
+        <p:spPr>
+          <a:xfrm>
+            <a:off x="4063898" y="3016174"/>
+            <a:ext cx="1943051" cy="285742"/>
+          </a:xfrm>
+          <a:prstGeom prst="roundRect">
+            <a:avLst/>
+          </a:prstGeom>
+          <a:solidFill>
+            <a:srgbClr val="1A2238"/>
+          </a:solidFill>
+          <a:ln>
+            <a:noFill/>
+          </a:ln>
+          <a:effectLst/>
+        </p:spPr>
+        <p:style>
+          <a:lnRef idx="1">
+            <a:schemeClr val="accent1"/>
+          </a:lnRef>
+          <a:fillRef idx="3">
+            <a:schemeClr val="accent1"/>
+          </a:fillRef>
+          <a:effectRef idx="2">
+            <a:schemeClr val="accent1"/>
+          </a:effectRef>
+          <a:fontRef idx="minor">
+            <a:schemeClr val="lt1"/>
+          </a:fontRef>
+        </p:style>
+        <p:txBody>
+          <a:bodyPr rtlCol="0" anchor="ctr"/>
+          <a:lstStyle/>
+          <a:p>
+            <a:pPr algn="ctr"/>
+          </a:p>
+        </p:txBody>
+      </p:sp>
+      <p:sp>
+        <p:nvSpPr>
+          <p:cNvPr id="56" name="TextBox 55"/>
+          <p:cNvSpPr txBox="1"/>
+          <p:nvPr/>
+        </p:nvSpPr>
+        <p:spPr>
+          <a:xfrm>
+            <a:off x="4127396" y="3041573"/>
+            <a:ext cx="1816054" cy="241293"/>
+          </a:xfrm>
+          <a:prstGeom prst="rect">
+            <a:avLst/>
+          </a:prstGeom>
+          <a:noFill/>
+        </p:spPr>
+        <p:txBody>
+          <a:bodyPr wrap="square" anchor="ctr" lIns="45720" rIns="45720">
+            <a:spAutoFit/>
+          </a:bodyPr>
+          <a:lstStyle/>
+          <a:p>
+            <a:pPr algn="l"/>
+            <a:r>
+              <a:rPr sz="1000" b="0">
+                <a:solidFill>
+                  <a:srgbClr val="FFFFFF"/>
+                </a:solidFill>
+                <a:latin typeface="Hiragino Sans"/>
+              </a:rPr>
+              <a:t>Half-Kelly + 制約</a:t>
+            </a:r>
+          </a:p>
+        </p:txBody>
+      </p:sp>
+      <p:sp>
+        <p:nvSpPr>
+          <p:cNvPr id="57" name="Rounded Rectangle 56"/>
+          <p:cNvSpPr/>
+          <p:nvPr/>
+        </p:nvSpPr>
+        <p:spPr>
+          <a:xfrm>
+            <a:off x="6032349" y="3016174"/>
+            <a:ext cx="2070048" cy="285742"/>
+          </a:xfrm>
+          <a:prstGeom prst="roundRect">
+            <a:avLst/>
+          </a:prstGeom>
+          <a:solidFill>
+            <a:srgbClr val="1A2238"/>
+          </a:solidFill>
+          <a:ln>
+            <a:noFill/>
+          </a:ln>
+          <a:effectLst/>
+        </p:spPr>
+        <p:style>
+          <a:lnRef idx="1">
+            <a:schemeClr val="accent1"/>
+          </a:lnRef>
+          <a:fillRef idx="3">
+            <a:schemeClr val="accent1"/>
+          </a:fillRef>
+          <a:effectRef idx="2">
+            <a:schemeClr val="accent1"/>
+          </a:effectRef>
+          <a:fontRef idx="minor">
+            <a:schemeClr val="lt1"/>
+          </a:fontRef>
+        </p:style>
+        <p:txBody>
+          <a:bodyPr rtlCol="0" anchor="ctr"/>
+          <a:lstStyle/>
+          <a:p>
+            <a:pPr algn="ctr"/>
+          </a:p>
+        </p:txBody>
+      </p:sp>
+      <p:sp>
+        <p:nvSpPr>
+          <p:cNvPr id="58" name="TextBox 57"/>
+          <p:cNvSpPr txBox="1"/>
+          <p:nvPr/>
+        </p:nvSpPr>
+        <p:spPr>
+          <a:xfrm>
+            <a:off x="6095847" y="3041573"/>
+            <a:ext cx="1943051" cy="241293"/>
+          </a:xfrm>
+          <a:prstGeom prst="rect">
+            <a:avLst/>
+          </a:prstGeom>
+          <a:noFill/>
+        </p:spPr>
+        <p:txBody>
+          <a:bodyPr wrap="square" anchor="ctr" lIns="45720" rIns="45720">
+            <a:spAutoFit/>
+          </a:bodyPr>
+          <a:lstStyle/>
+          <a:p>
+            <a:pPr algn="l"/>
+            <a:r>
+              <a:rPr sz="1000" b="0">
+                <a:solidFill>
+                  <a:srgbClr val="FFFFFF"/>
+                </a:solidFill>
+                <a:latin typeface="Hiragino Sans"/>
+              </a:rPr>
+              <a:t>Half-Kelly × Confidence × Vol</a:t>
+            </a:r>
+          </a:p>
+        </p:txBody>
+      </p:sp>
+      <p:sp>
+        <p:nvSpPr>
+          <p:cNvPr id="59" name="Rounded Rectangle 58"/>
+          <p:cNvSpPr/>
+          <p:nvPr/>
+        </p:nvSpPr>
+        <p:spPr>
+          <a:xfrm>
+            <a:off x="507987" y="3333666"/>
+            <a:ext cx="1562060" cy="285742"/>
+          </a:xfrm>
+          <a:prstGeom prst="roundRect">
+            <a:avLst/>
+          </a:prstGeom>
+          <a:solidFill>
+            <a:srgbClr val="252E42"/>
+          </a:solidFill>
+          <a:ln>
+            <a:noFill/>
+          </a:ln>
+          <a:effectLst/>
+        </p:spPr>
+        <p:style>
+          <a:lnRef idx="1">
+            <a:schemeClr val="accent1"/>
+          </a:lnRef>
+          <a:fillRef idx="3">
+            <a:schemeClr val="accent1"/>
+          </a:fillRef>
+          <a:effectRef idx="2">
+            <a:schemeClr val="accent1"/>
+          </a:effectRef>
+          <a:fontRef idx="minor">
+            <a:schemeClr val="lt1"/>
+          </a:fontRef>
+        </p:style>
+        <p:txBody>
+          <a:bodyPr rtlCol="0" anchor="ctr"/>
+          <a:lstStyle/>
+          <a:p>
+            <a:pPr algn="ctr"/>
+          </a:p>
+        </p:txBody>
+      </p:sp>
+      <p:sp>
+        <p:nvSpPr>
+          <p:cNvPr id="60" name="TextBox 59"/>
+          <p:cNvSpPr txBox="1"/>
+          <p:nvPr/>
+        </p:nvSpPr>
+        <p:spPr>
+          <a:xfrm>
+            <a:off x="571485" y="3359066"/>
+            <a:ext cx="1435064" cy="241293"/>
+          </a:xfrm>
+          <a:prstGeom prst="rect">
+            <a:avLst/>
+          </a:prstGeom>
+          <a:noFill/>
+        </p:spPr>
+        <p:txBody>
+          <a:bodyPr wrap="square" anchor="ctr" lIns="45720" rIns="45720">
+            <a:spAutoFit/>
+          </a:bodyPr>
+          <a:lstStyle/>
+          <a:p>
+            <a:pPr algn="l"/>
+            <a:r>
+              <a:rPr sz="1100" b="1">
+                <a:solidFill>
+                  <a:srgbClr val="FFFFFF"/>
+                </a:solidFill>
+                <a:latin typeface="Hiragino Sans"/>
+              </a:rPr>
+              <a:t>リスク</a:t>
+            </a:r>
+          </a:p>
+        </p:txBody>
+      </p:sp>
+      <p:sp>
+        <p:nvSpPr>
+          <p:cNvPr id="61" name="Rounded Rectangle 60"/>
+          <p:cNvSpPr/>
+          <p:nvPr/>
+        </p:nvSpPr>
+        <p:spPr>
+          <a:xfrm>
+            <a:off x="2095447" y="3333666"/>
+            <a:ext cx="1943051" cy="285742"/>
+          </a:xfrm>
+          <a:prstGeom prst="roundRect">
+            <a:avLst/>
+          </a:prstGeom>
+          <a:solidFill>
+            <a:srgbClr val="252E42"/>
+          </a:solidFill>
+          <a:ln>
+            <a:noFill/>
+          </a:ln>
+          <a:effectLst/>
+        </p:spPr>
+        <p:style>
+          <a:lnRef idx="1">
+            <a:schemeClr val="accent1"/>
+          </a:lnRef>
+          <a:fillRef idx="3">
+            <a:schemeClr val="accent1"/>
+          </a:fillRef>
+          <a:effectRef idx="2">
+            <a:schemeClr val="accent1"/>
+          </a:effectRef>
+          <a:fontRef idx="minor">
+            <a:schemeClr val="lt1"/>
+          </a:fontRef>
+        </p:style>
+        <p:txBody>
+          <a:bodyPr rtlCol="0" anchor="ctr"/>
+          <a:lstStyle/>
+          <a:p>
+            <a:pPr algn="ctr"/>
+          </a:p>
+        </p:txBody>
+      </p:sp>
+      <p:sp>
+        <p:nvSpPr>
+          <p:cNvPr id="62" name="TextBox 61"/>
+          <p:cNvSpPr txBox="1"/>
+          <p:nvPr/>
+        </p:nvSpPr>
+        <p:spPr>
+          <a:xfrm>
+            <a:off x="2158946" y="3359066"/>
+            <a:ext cx="1816054" cy="241293"/>
+          </a:xfrm>
+          <a:prstGeom prst="rect">
+            <a:avLst/>
+          </a:prstGeom>
+          <a:noFill/>
+        </p:spPr>
+        <p:txBody>
+          <a:bodyPr wrap="square" anchor="ctr" lIns="45720" rIns="45720">
+            <a:spAutoFit/>
+          </a:bodyPr>
+          <a:lstStyle/>
+          <a:p>
+            <a:pPr algn="l"/>
+            <a:r>
+              <a:rPr sz="1000" b="0">
+                <a:solidFill>
+                  <a:srgbClr val="FFFFFF"/>
+                </a:solidFill>
+                <a:latin typeface="Hiragino Sans"/>
+              </a:rPr>
+              <a:t>Risk Engine 6層</a:t>
+            </a:r>
+          </a:p>
+        </p:txBody>
+      </p:sp>
+      <p:sp>
+        <p:nvSpPr>
+          <p:cNvPr id="63" name="Rounded Rectangle 62"/>
+          <p:cNvSpPr/>
+          <p:nvPr/>
+        </p:nvSpPr>
+        <p:spPr>
+          <a:xfrm>
+            <a:off x="4063898" y="3333666"/>
+            <a:ext cx="1943051" cy="285742"/>
+          </a:xfrm>
+          <a:prstGeom prst="roundRect">
+            <a:avLst/>
+          </a:prstGeom>
+          <a:solidFill>
+            <a:srgbClr val="252E42"/>
+          </a:solidFill>
+          <a:ln>
+            <a:noFill/>
+          </a:ln>
+          <a:effectLst/>
+        </p:spPr>
+        <p:style>
+          <a:lnRef idx="1">
+            <a:schemeClr val="accent1"/>
+          </a:lnRef>
+          <a:fillRef idx="3">
+            <a:schemeClr val="accent1"/>
+          </a:fillRef>
+          <a:effectRef idx="2">
+            <a:schemeClr val="accent1"/>
+          </a:effectRef>
+          <a:fontRef idx="minor">
+            <a:schemeClr val="lt1"/>
+          </a:fontRef>
+        </p:style>
+        <p:txBody>
+          <a:bodyPr rtlCol="0" anchor="ctr"/>
+          <a:lstStyle/>
+          <a:p>
+            <a:pPr algn="ctr"/>
+          </a:p>
+        </p:txBody>
+      </p:sp>
+      <p:sp>
+        <p:nvSpPr>
+          <p:cNvPr id="64" name="TextBox 63"/>
+          <p:cNvSpPr txBox="1"/>
+          <p:nvPr/>
+        </p:nvSpPr>
+        <p:spPr>
+          <a:xfrm>
+            <a:off x="4127396" y="3359066"/>
+            <a:ext cx="1816054" cy="241293"/>
+          </a:xfrm>
+          <a:prstGeom prst="rect">
+            <a:avLst/>
+          </a:prstGeom>
+          <a:noFill/>
+        </p:spPr>
+        <p:txBody>
+          <a:bodyPr wrap="square" anchor="ctr" lIns="45720" rIns="45720">
+            <a:spAutoFit/>
+          </a:bodyPr>
+          <a:lstStyle/>
+          <a:p>
+            <a:pPr algn="l"/>
+            <a:r>
+              <a:rPr sz="1000" b="0">
+                <a:solidFill>
+                  <a:srgbClr val="FFFFFF"/>
+                </a:solidFill>
+                <a:latin typeface="Hiragino Sans"/>
+              </a:rPr>
+              <a:t>注文前検問 6step</a:t>
+            </a:r>
+          </a:p>
+        </p:txBody>
+      </p:sp>
+      <p:sp>
+        <p:nvSpPr>
+          <p:cNvPr id="65" name="Rounded Rectangle 64"/>
+          <p:cNvSpPr/>
+          <p:nvPr/>
+        </p:nvSpPr>
+        <p:spPr>
+          <a:xfrm>
+            <a:off x="6032349" y="3333666"/>
+            <a:ext cx="2070048" cy="285742"/>
+          </a:xfrm>
+          <a:prstGeom prst="roundRect">
+            <a:avLst/>
+          </a:prstGeom>
+          <a:solidFill>
+            <a:srgbClr val="252E42"/>
+          </a:solidFill>
+          <a:ln>
+            <a:noFill/>
+          </a:ln>
+          <a:effectLst/>
+        </p:spPr>
+        <p:style>
+          <a:lnRef idx="1">
+            <a:schemeClr val="accent1"/>
+          </a:lnRef>
+          <a:fillRef idx="3">
+            <a:schemeClr val="accent1"/>
+          </a:fillRef>
+          <a:effectRef idx="2">
+            <a:schemeClr val="accent1"/>
+          </a:effectRef>
+          <a:fontRef idx="minor">
+            <a:schemeClr val="lt1"/>
+          </a:fontRef>
+        </p:style>
+        <p:txBody>
+          <a:bodyPr rtlCol="0" anchor="ctr"/>
+          <a:lstStyle/>
+          <a:p>
+            <a:pPr algn="ctr"/>
+          </a:p>
+        </p:txBody>
+      </p:sp>
+      <p:sp>
+        <p:nvSpPr>
+          <p:cNvPr id="66" name="TextBox 65"/>
+          <p:cNvSpPr txBox="1"/>
+          <p:nvPr/>
+        </p:nvSpPr>
+        <p:spPr>
+          <a:xfrm>
+            <a:off x="6095847" y="3359066"/>
+            <a:ext cx="1943051" cy="241293"/>
+          </a:xfrm>
+          <a:prstGeom prst="rect">
+            <a:avLst/>
+          </a:prstGeom>
+          <a:noFill/>
+        </p:spPr>
+        <p:txBody>
+          <a:bodyPr wrap="square" anchor="ctr" lIns="45720" rIns="45720">
+            <a:spAutoFit/>
+          </a:bodyPr>
+          <a:lstStyle/>
+          <a:p>
+            <a:pPr algn="l"/>
+            <a:r>
+              <a:rPr sz="1000" b="0">
+                <a:solidFill>
+                  <a:srgbClr val="FFFFFF"/>
+                </a:solidFill>
+                <a:latin typeface="Hiragino Sans"/>
+              </a:rPr>
+              <a:t>Fast Guard / Risk Engine 二層</a:t>
+            </a:r>
+          </a:p>
+        </p:txBody>
+      </p:sp>
+      <p:sp>
+        <p:nvSpPr>
+          <p:cNvPr id="67" name="Rounded Rectangle 66"/>
+          <p:cNvSpPr/>
+          <p:nvPr/>
+        </p:nvSpPr>
+        <p:spPr>
+          <a:xfrm>
+            <a:off x="507987" y="3651158"/>
+            <a:ext cx="1562060" cy="285742"/>
+          </a:xfrm>
+          <a:prstGeom prst="roundRect">
+            <a:avLst/>
+          </a:prstGeom>
+          <a:solidFill>
+            <a:srgbClr val="1A2238"/>
+          </a:solidFill>
+          <a:ln>
+            <a:noFill/>
+          </a:ln>
+          <a:effectLst/>
+        </p:spPr>
+        <p:style>
+          <a:lnRef idx="1">
+            <a:schemeClr val="accent1"/>
+          </a:lnRef>
+          <a:fillRef idx="3">
+            <a:schemeClr val="accent1"/>
+          </a:fillRef>
+          <a:effectRef idx="2">
+            <a:schemeClr val="accent1"/>
+          </a:effectRef>
+          <a:fontRef idx="minor">
+            <a:schemeClr val="lt1"/>
+          </a:fontRef>
+        </p:style>
+        <p:txBody>
+          <a:bodyPr rtlCol="0" anchor="ctr"/>
+          <a:lstStyle/>
+          <a:p>
+            <a:pPr algn="ctr"/>
+          </a:p>
+        </p:txBody>
+      </p:sp>
+      <p:sp>
+        <p:nvSpPr>
+          <p:cNvPr id="68" name="TextBox 67"/>
+          <p:cNvSpPr txBox="1"/>
+          <p:nvPr/>
+        </p:nvSpPr>
+        <p:spPr>
+          <a:xfrm>
+            <a:off x="571485" y="3676558"/>
+            <a:ext cx="1435064" cy="241293"/>
+          </a:xfrm>
+          <a:prstGeom prst="rect">
+            <a:avLst/>
+          </a:prstGeom>
+          <a:noFill/>
+        </p:spPr>
+        <p:txBody>
+          <a:bodyPr wrap="square" anchor="ctr" lIns="45720" rIns="45720">
+            <a:spAutoFit/>
+          </a:bodyPr>
+          <a:lstStyle/>
+          <a:p>
+            <a:pPr algn="l"/>
+            <a:r>
+              <a:rPr sz="1100" b="1">
+                <a:solidFill>
+                  <a:srgbClr val="FFFFFF"/>
+                </a:solidFill>
+                <a:latin typeface="Hiragino Sans"/>
+              </a:rPr>
+              <a:t>デッドロック</a:t>
+            </a:r>
+          </a:p>
+        </p:txBody>
+      </p:sp>
+      <p:sp>
+        <p:nvSpPr>
+          <p:cNvPr id="69" name="Rounded Rectangle 68"/>
+          <p:cNvSpPr/>
+          <p:nvPr/>
+        </p:nvSpPr>
+        <p:spPr>
+          <a:xfrm>
+            <a:off x="2095447" y="3651158"/>
+            <a:ext cx="1943051" cy="285742"/>
+          </a:xfrm>
+          <a:prstGeom prst="roundRect">
+            <a:avLst/>
+          </a:prstGeom>
+          <a:solidFill>
+            <a:srgbClr val="1A2238"/>
+          </a:solidFill>
+          <a:ln>
+            <a:noFill/>
+          </a:ln>
+          <a:effectLst/>
+        </p:spPr>
+        <p:style>
+          <a:lnRef idx="1">
+            <a:schemeClr val="accent1"/>
+          </a:lnRef>
+          <a:fillRef idx="3">
+            <a:schemeClr val="accent1"/>
+          </a:fillRef>
+          <a:effectRef idx="2">
+            <a:schemeClr val="accent1"/>
+          </a:effectRef>
+          <a:fontRef idx="minor">
+            <a:schemeClr val="lt1"/>
+          </a:fontRef>
+        </p:style>
+        <p:txBody>
+          <a:bodyPr rtlCol="0" anchor="ctr"/>
+          <a:lstStyle/>
+          <a:p>
+            <a:pPr algn="ctr"/>
+          </a:p>
+        </p:txBody>
+      </p:sp>
+      <p:sp>
+        <p:nvSpPr>
+          <p:cNvPr id="70" name="TextBox 69"/>
+          <p:cNvSpPr txBox="1"/>
+          <p:nvPr/>
+        </p:nvSpPr>
+        <p:spPr>
+          <a:xfrm>
+            <a:off x="2158946" y="3676558"/>
+            <a:ext cx="1816054" cy="241293"/>
+          </a:xfrm>
+          <a:prstGeom prst="rect">
+            <a:avLst/>
+          </a:prstGeom>
+          <a:noFill/>
+        </p:spPr>
+        <p:txBody>
+          <a:bodyPr wrap="square" anchor="ctr" lIns="45720" rIns="45720">
+            <a:spAutoFit/>
+          </a:bodyPr>
+          <a:lstStyle/>
+          <a:p>
+            <a:pPr algn="l"/>
+            <a:r>
+              <a:rPr sz="1000" b="0">
+                <a:solidFill>
+                  <a:srgbClr val="FFFFFF"/>
+                </a:solidFill>
+                <a:latin typeface="Hiragino Sans"/>
+              </a:rPr>
+              <a:t>未検討</a:t>
+            </a:r>
+          </a:p>
+        </p:txBody>
+      </p:sp>
+      <p:sp>
+        <p:nvSpPr>
+          <p:cNvPr id="71" name="Rounded Rectangle 70"/>
+          <p:cNvSpPr/>
+          <p:nvPr/>
+        </p:nvSpPr>
+        <p:spPr>
+          <a:xfrm>
+            <a:off x="4063898" y="3651158"/>
+            <a:ext cx="1943051" cy="285742"/>
+          </a:xfrm>
+          <a:prstGeom prst="roundRect">
+            <a:avLst/>
+          </a:prstGeom>
+          <a:solidFill>
+            <a:srgbClr val="1A2238"/>
+          </a:solidFill>
+          <a:ln>
+            <a:noFill/>
+          </a:ln>
+          <a:effectLst/>
+        </p:spPr>
+        <p:style>
+          <a:lnRef idx="1">
+            <a:schemeClr val="accent1"/>
+          </a:lnRef>
+          <a:fillRef idx="3">
+            <a:schemeClr val="accent1"/>
+          </a:fillRef>
+          <a:effectRef idx="2">
+            <a:schemeClr val="accent1"/>
+          </a:effectRef>
+          <a:fontRef idx="minor">
+            <a:schemeClr val="lt1"/>
+          </a:fontRef>
+        </p:style>
+        <p:txBody>
+          <a:bodyPr rtlCol="0" anchor="ctr"/>
+          <a:lstStyle/>
+          <a:p>
+            <a:pPr algn="ctr"/>
+          </a:p>
+        </p:txBody>
+      </p:sp>
+      <p:sp>
+        <p:nvSpPr>
+          <p:cNvPr id="72" name="TextBox 71"/>
+          <p:cNvSpPr txBox="1"/>
+          <p:nvPr/>
+        </p:nvSpPr>
+        <p:spPr>
+          <a:xfrm>
+            <a:off x="4127396" y="3676558"/>
+            <a:ext cx="1816054" cy="241293"/>
+          </a:xfrm>
+          <a:prstGeom prst="rect">
+            <a:avLst/>
+          </a:prstGeom>
+          <a:noFill/>
+        </p:spPr>
+        <p:txBody>
+          <a:bodyPr wrap="square" anchor="ctr" lIns="45720" rIns="45720">
+            <a:spAutoFit/>
+          </a:bodyPr>
+          <a:lstStyle/>
+          <a:p>
+            <a:pPr algn="l"/>
+            <a:r>
+              <a:rPr sz="1000" b="0">
+                <a:solidFill>
+                  <a:srgbClr val="FFFFFF"/>
+                </a:solidFill>
+                <a:latin typeface="Hiragino Sans"/>
+              </a:rPr>
+              <a:t>未検討</a:t>
+            </a:r>
+          </a:p>
+        </p:txBody>
+      </p:sp>
+      <p:sp>
+        <p:nvSpPr>
+          <p:cNvPr id="73" name="Rounded Rectangle 72"/>
+          <p:cNvSpPr/>
+          <p:nvPr/>
+        </p:nvSpPr>
+        <p:spPr>
+          <a:xfrm>
+            <a:off x="6032349" y="3651158"/>
+            <a:ext cx="2070048" cy="285742"/>
+          </a:xfrm>
+          <a:prstGeom prst="roundRect">
+            <a:avLst/>
+          </a:prstGeom>
+          <a:solidFill>
+            <a:srgbClr val="1A2238"/>
+          </a:solidFill>
+          <a:ln>
+            <a:noFill/>
+          </a:ln>
+          <a:effectLst/>
+        </p:spPr>
+        <p:style>
+          <a:lnRef idx="1">
+            <a:schemeClr val="accent1"/>
+          </a:lnRef>
+          <a:fillRef idx="3">
+            <a:schemeClr val="accent1"/>
+          </a:fillRef>
+          <a:effectRef idx="2">
+            <a:schemeClr val="accent1"/>
+          </a:effectRef>
+          <a:fontRef idx="minor">
+            <a:schemeClr val="lt1"/>
+          </a:fontRef>
+        </p:style>
+        <p:txBody>
+          <a:bodyPr rtlCol="0" anchor="ctr"/>
+          <a:lstStyle/>
+          <a:p>
+            <a:pPr algn="ctr"/>
+          </a:p>
+        </p:txBody>
+      </p:sp>
+      <p:sp>
+        <p:nvSpPr>
+          <p:cNvPr id="74" name="TextBox 73"/>
+          <p:cNvSpPr txBox="1"/>
+          <p:nvPr/>
+        </p:nvSpPr>
+        <p:spPr>
+          <a:xfrm>
+            <a:off x="6095847" y="3676558"/>
+            <a:ext cx="1943051" cy="241293"/>
+          </a:xfrm>
+          <a:prstGeom prst="rect">
+            <a:avLst/>
+          </a:prstGeom>
+          <a:noFill/>
+        </p:spPr>
+        <p:txBody>
+          <a:bodyPr wrap="square" anchor="ctr" lIns="45720" rIns="45720">
+            <a:spAutoFit/>
+          </a:bodyPr>
+          <a:lstStyle/>
+          <a:p>
+            <a:pPr algn="l"/>
+            <a:r>
+              <a:rPr sz="1000" b="0">
+                <a:solidFill>
+                  <a:srgbClr val="FFFFFF"/>
+                </a:solidFill>
+                <a:latin typeface="Hiragino Sans"/>
+              </a:rPr>
+              <a:t>TTL + 階層化スタンス (15分)</a:t>
+            </a:r>
+          </a:p>
+        </p:txBody>
+      </p:sp>
+      <p:sp>
+        <p:nvSpPr>
+          <p:cNvPr id="75" name="Rounded Rectangle 74"/>
+          <p:cNvSpPr/>
+          <p:nvPr/>
+        </p:nvSpPr>
+        <p:spPr>
+          <a:xfrm>
+            <a:off x="507987" y="3968650"/>
+            <a:ext cx="1562060" cy="285742"/>
+          </a:xfrm>
+          <a:prstGeom prst="roundRect">
+            <a:avLst/>
+          </a:prstGeom>
+          <a:solidFill>
+            <a:srgbClr val="252E42"/>
+          </a:solidFill>
+          <a:ln>
+            <a:noFill/>
+          </a:ln>
+          <a:effectLst/>
+        </p:spPr>
+        <p:style>
+          <a:lnRef idx="1">
+            <a:schemeClr val="accent1"/>
+          </a:lnRef>
+          <a:fillRef idx="3">
+            <a:schemeClr val="accent1"/>
+          </a:fillRef>
+          <a:effectRef idx="2">
+            <a:schemeClr val="accent1"/>
+          </a:effectRef>
+          <a:fontRef idx="minor">
+            <a:schemeClr val="lt1"/>
+          </a:fontRef>
+        </p:style>
+        <p:txBody>
+          <a:bodyPr rtlCol="0" anchor="ctr"/>
+          <a:lstStyle/>
+          <a:p>
+            <a:pPr algn="ctr"/>
+          </a:p>
+        </p:txBody>
+      </p:sp>
+      <p:sp>
+        <p:nvSpPr>
+          <p:cNvPr id="76" name="TextBox 75"/>
+          <p:cNvSpPr txBox="1"/>
+          <p:nvPr/>
+        </p:nvSpPr>
+        <p:spPr>
+          <a:xfrm>
+            <a:off x="571485" y="3994050"/>
+            <a:ext cx="1435064" cy="241293"/>
+          </a:xfrm>
+          <a:prstGeom prst="rect">
+            <a:avLst/>
+          </a:prstGeom>
+          <a:noFill/>
+        </p:spPr>
+        <p:txBody>
+          <a:bodyPr wrap="square" anchor="ctr" lIns="45720" rIns="45720">
+            <a:spAutoFit/>
+          </a:bodyPr>
+          <a:lstStyle/>
+          <a:p>
+            <a:pPr algn="l"/>
+            <a:r>
+              <a:rPr sz="1100" b="1">
+                <a:solidFill>
+                  <a:srgbClr val="FFFFFF"/>
+                </a:solidFill>
+                <a:latin typeface="Hiragino Sans"/>
+              </a:rPr>
+              <a:t>検証</a:t>
+            </a:r>
+          </a:p>
+        </p:txBody>
+      </p:sp>
+      <p:sp>
+        <p:nvSpPr>
+          <p:cNvPr id="77" name="Rounded Rectangle 76"/>
+          <p:cNvSpPr/>
+          <p:nvPr/>
+        </p:nvSpPr>
+        <p:spPr>
+          <a:xfrm>
+            <a:off x="2095447" y="3968650"/>
+            <a:ext cx="1943051" cy="285742"/>
+          </a:xfrm>
+          <a:prstGeom prst="roundRect">
+            <a:avLst/>
+          </a:prstGeom>
+          <a:solidFill>
+            <a:srgbClr val="252E42"/>
+          </a:solidFill>
+          <a:ln>
+            <a:noFill/>
+          </a:ln>
+          <a:effectLst/>
+        </p:spPr>
+        <p:style>
+          <a:lnRef idx="1">
+            <a:schemeClr val="accent1"/>
+          </a:lnRef>
+          <a:fillRef idx="3">
+            <a:schemeClr val="accent1"/>
+          </a:fillRef>
+          <a:effectRef idx="2">
+            <a:schemeClr val="accent1"/>
+          </a:effectRef>
+          <a:fontRef idx="minor">
+            <a:schemeClr val="lt1"/>
+          </a:fontRef>
+        </p:style>
+        <p:txBody>
+          <a:bodyPr rtlCol="0" anchor="ctr"/>
+          <a:lstStyle/>
+          <a:p>
+            <a:pPr algn="ctr"/>
+          </a:p>
+        </p:txBody>
+      </p:sp>
+      <p:sp>
+        <p:nvSpPr>
+          <p:cNvPr id="78" name="TextBox 77"/>
+          <p:cNvSpPr txBox="1"/>
+          <p:nvPr/>
+        </p:nvSpPr>
+        <p:spPr>
+          <a:xfrm>
+            <a:off x="2158946" y="3994050"/>
+            <a:ext cx="1816054" cy="241293"/>
+          </a:xfrm>
+          <a:prstGeom prst="rect">
+            <a:avLst/>
+          </a:prstGeom>
+          <a:noFill/>
+        </p:spPr>
+        <p:txBody>
+          <a:bodyPr wrap="square" anchor="ctr" lIns="45720" rIns="45720">
+            <a:spAutoFit/>
+          </a:bodyPr>
+          <a:lstStyle/>
+          <a:p>
+            <a:pPr algn="l"/>
+            <a:r>
+              <a:rPr sz="1000" b="0">
+                <a:solidFill>
+                  <a:srgbClr val="FFFFFF"/>
+                </a:solidFill>
+                <a:latin typeface="Hiragino Sans"/>
+              </a:rPr>
+              <a:t>CPCV N=10 / DSR / PSR / PBO</a:t>
+            </a:r>
+          </a:p>
+        </p:txBody>
+      </p:sp>
+      <p:sp>
+        <p:nvSpPr>
+          <p:cNvPr id="79" name="Rounded Rectangle 78"/>
+          <p:cNvSpPr/>
+          <p:nvPr/>
+        </p:nvSpPr>
+        <p:spPr>
+          <a:xfrm>
+            <a:off x="4063898" y="3968650"/>
+            <a:ext cx="1943051" cy="285742"/>
+          </a:xfrm>
+          <a:prstGeom prst="roundRect">
+            <a:avLst/>
+          </a:prstGeom>
+          <a:solidFill>
+            <a:srgbClr val="252E42"/>
+          </a:solidFill>
+          <a:ln>
+            <a:noFill/>
+          </a:ln>
+          <a:effectLst/>
+        </p:spPr>
+        <p:style>
+          <a:lnRef idx="1">
+            <a:schemeClr val="accent1"/>
+          </a:lnRef>
+          <a:fillRef idx="3">
+            <a:schemeClr val="accent1"/>
+          </a:fillRef>
+          <a:effectRef idx="2">
+            <a:schemeClr val="accent1"/>
+          </a:effectRef>
+          <a:fontRef idx="minor">
+            <a:schemeClr val="lt1"/>
+          </a:fontRef>
+        </p:style>
+        <p:txBody>
+          <a:bodyPr rtlCol="0" anchor="ctr"/>
+          <a:lstStyle/>
+          <a:p>
+            <a:pPr algn="ctr"/>
+          </a:p>
+        </p:txBody>
+      </p:sp>
+      <p:sp>
+        <p:nvSpPr>
+          <p:cNvPr id="80" name="TextBox 79"/>
+          <p:cNvSpPr txBox="1"/>
+          <p:nvPr/>
+        </p:nvSpPr>
+        <p:spPr>
+          <a:xfrm>
+            <a:off x="4127396" y="3994050"/>
+            <a:ext cx="1816054" cy="241293"/>
+          </a:xfrm>
+          <a:prstGeom prst="rect">
+            <a:avLst/>
+          </a:prstGeom>
+          <a:noFill/>
+        </p:spPr>
+        <p:txBody>
+          <a:bodyPr wrap="square" anchor="ctr" lIns="45720" rIns="45720">
+            <a:spAutoFit/>
+          </a:bodyPr>
+          <a:lstStyle/>
+          <a:p>
+            <a:pPr algn="l"/>
+            <a:r>
+              <a:rPr sz="1000" b="0">
+                <a:solidFill>
+                  <a:srgbClr val="FFFFFF"/>
+                </a:solidFill>
+                <a:latin typeface="Hiragino Sans"/>
+              </a:rPr>
+              <a:t>CPCV + EVT 併用案</a:t>
+            </a:r>
+          </a:p>
+        </p:txBody>
+      </p:sp>
+      <p:sp>
+        <p:nvSpPr>
+          <p:cNvPr id="81" name="Rounded Rectangle 80"/>
+          <p:cNvSpPr/>
+          <p:nvPr/>
+        </p:nvSpPr>
+        <p:spPr>
+          <a:xfrm>
+            <a:off x="6032349" y="3968650"/>
+            <a:ext cx="2070048" cy="285742"/>
+          </a:xfrm>
+          <a:prstGeom prst="roundRect">
+            <a:avLst/>
+          </a:prstGeom>
+          <a:solidFill>
+            <a:srgbClr val="252E42"/>
+          </a:solidFill>
+          <a:ln>
+            <a:noFill/>
+          </a:ln>
+          <a:effectLst/>
+        </p:spPr>
+        <p:style>
+          <a:lnRef idx="1">
+            <a:schemeClr val="accent1"/>
+          </a:lnRef>
+          <a:fillRef idx="3">
+            <a:schemeClr val="accent1"/>
+          </a:fillRef>
+          <a:effectRef idx="2">
+            <a:schemeClr val="accent1"/>
+          </a:effectRef>
+          <a:fontRef idx="minor">
+            <a:schemeClr val="lt1"/>
+          </a:fontRef>
+        </p:style>
+        <p:txBody>
+          <a:bodyPr rtlCol="0" anchor="ctr"/>
+          <a:lstStyle/>
+          <a:p>
+            <a:pPr algn="ctr"/>
+          </a:p>
+        </p:txBody>
+      </p:sp>
+      <p:sp>
+        <p:nvSpPr>
+          <p:cNvPr id="82" name="TextBox 81"/>
+          <p:cNvSpPr txBox="1"/>
+          <p:nvPr/>
+        </p:nvSpPr>
+        <p:spPr>
+          <a:xfrm>
+            <a:off x="6095847" y="3994050"/>
+            <a:ext cx="1943051" cy="241293"/>
+          </a:xfrm>
+          <a:prstGeom prst="rect">
+            <a:avLst/>
+          </a:prstGeom>
+          <a:noFill/>
+        </p:spPr>
+        <p:txBody>
+          <a:bodyPr wrap="square" anchor="ctr" lIns="45720" rIns="45720">
+            <a:spAutoFit/>
+          </a:bodyPr>
+          <a:lstStyle/>
+          <a:p>
+            <a:pPr algn="l"/>
+            <a:r>
+              <a:rPr sz="1000" b="0">
+                <a:solidFill>
+                  <a:srgbClr val="FFFFFF"/>
+                </a:solidFill>
+                <a:latin typeface="Hiragino Sans"/>
+              </a:rPr>
+              <a:t>CPCV + 動的閾値 + EVT</a:t>
+            </a:r>
+          </a:p>
+        </p:txBody>
+      </p:sp>
+      <p:sp>
+        <p:nvSpPr>
+          <p:cNvPr id="83" name="Rounded Rectangle 82"/>
+          <p:cNvSpPr/>
+          <p:nvPr/>
+        </p:nvSpPr>
+        <p:spPr>
+          <a:xfrm>
+            <a:off x="507987" y="4286142"/>
+            <a:ext cx="1562060" cy="285742"/>
+          </a:xfrm>
+          <a:prstGeom prst="roundRect">
+            <a:avLst/>
+          </a:prstGeom>
+          <a:solidFill>
+            <a:srgbClr val="1A2238"/>
+          </a:solidFill>
+          <a:ln>
+            <a:noFill/>
+          </a:ln>
+          <a:effectLst/>
+        </p:spPr>
+        <p:style>
+          <a:lnRef idx="1">
+            <a:schemeClr val="accent1"/>
+          </a:lnRef>
+          <a:fillRef idx="3">
+            <a:schemeClr val="accent1"/>
+          </a:fillRef>
+          <a:effectRef idx="2">
+            <a:schemeClr val="accent1"/>
+          </a:effectRef>
+          <a:fontRef idx="minor">
+            <a:schemeClr val="lt1"/>
+          </a:fontRef>
+        </p:style>
+        <p:txBody>
+          <a:bodyPr rtlCol="0" anchor="ctr"/>
+          <a:lstStyle/>
+          <a:p>
+            <a:pPr algn="ctr"/>
+          </a:p>
+        </p:txBody>
+      </p:sp>
+      <p:sp>
+        <p:nvSpPr>
+          <p:cNvPr id="84" name="TextBox 83"/>
+          <p:cNvSpPr txBox="1"/>
+          <p:nvPr/>
+        </p:nvSpPr>
+        <p:spPr>
+          <a:xfrm>
+            <a:off x="571485" y="4311542"/>
+            <a:ext cx="1435064" cy="241293"/>
+          </a:xfrm>
+          <a:prstGeom prst="rect">
+            <a:avLst/>
+          </a:prstGeom>
+          <a:noFill/>
+        </p:spPr>
+        <p:txBody>
+          <a:bodyPr wrap="square" anchor="ctr" lIns="45720" rIns="45720">
+            <a:spAutoFit/>
+          </a:bodyPr>
+          <a:lstStyle/>
+          <a:p>
+            <a:pPr algn="l"/>
+            <a:r>
+              <a:rPr sz="1100" b="1">
+                <a:solidFill>
+                  <a:srgbClr val="FFFFFF"/>
+                </a:solidFill>
+                <a:latin typeface="Hiragino Sans"/>
+              </a:rPr>
+              <a:t>多取引所</a:t>
+            </a:r>
+          </a:p>
+        </p:txBody>
+      </p:sp>
+      <p:sp>
+        <p:nvSpPr>
+          <p:cNvPr id="85" name="Rounded Rectangle 84"/>
+          <p:cNvSpPr/>
+          <p:nvPr/>
+        </p:nvSpPr>
+        <p:spPr>
+          <a:xfrm>
+            <a:off x="2095447" y="4286142"/>
+            <a:ext cx="1943051" cy="285742"/>
+          </a:xfrm>
+          <a:prstGeom prst="roundRect">
+            <a:avLst/>
+          </a:prstGeom>
+          <a:solidFill>
+            <a:srgbClr val="1A2238"/>
+          </a:solidFill>
+          <a:ln>
+            <a:noFill/>
+          </a:ln>
+          <a:effectLst/>
+        </p:spPr>
+        <p:style>
+          <a:lnRef idx="1">
+            <a:schemeClr val="accent1"/>
+          </a:lnRef>
+          <a:fillRef idx="3">
+            <a:schemeClr val="accent1"/>
+          </a:fillRef>
+          <a:effectRef idx="2">
+            <a:schemeClr val="accent1"/>
+          </a:effectRef>
+          <a:fontRef idx="minor">
+            <a:schemeClr val="lt1"/>
+          </a:fontRef>
+        </p:style>
+        <p:txBody>
+          <a:bodyPr rtlCol="0" anchor="ctr"/>
+          <a:lstStyle/>
+          <a:p>
+            <a:pPr algn="ctr"/>
+          </a:p>
+        </p:txBody>
+      </p:sp>
+      <p:sp>
+        <p:nvSpPr>
+          <p:cNvPr id="86" name="TextBox 85"/>
+          <p:cNvSpPr txBox="1"/>
+          <p:nvPr/>
+        </p:nvSpPr>
+        <p:spPr>
+          <a:xfrm>
+            <a:off x="2158946" y="4311542"/>
+            <a:ext cx="1816054" cy="241293"/>
+          </a:xfrm>
+          <a:prstGeom prst="rect">
+            <a:avLst/>
+          </a:prstGeom>
+          <a:noFill/>
+        </p:spPr>
+        <p:txBody>
+          <a:bodyPr wrap="square" anchor="ctr" lIns="45720" rIns="45720">
+            <a:spAutoFit/>
+          </a:bodyPr>
+          <a:lstStyle/>
+          <a:p>
+            <a:pPr algn="l"/>
+            <a:r>
+              <a:rPr sz="1000" b="0">
+                <a:solidFill>
+                  <a:srgbClr val="FFFFFF"/>
+                </a:solidFill>
+                <a:latin typeface="Hiragino Sans"/>
+              </a:rPr>
+              <a:t>Bybit + Hyperliquid + OKX</a:t>
+            </a:r>
+          </a:p>
+        </p:txBody>
+      </p:sp>
+      <p:sp>
+        <p:nvSpPr>
+          <p:cNvPr id="87" name="Rounded Rectangle 86"/>
+          <p:cNvSpPr/>
+          <p:nvPr/>
+        </p:nvSpPr>
+        <p:spPr>
+          <a:xfrm>
+            <a:off x="4063898" y="4286142"/>
+            <a:ext cx="1943051" cy="285742"/>
+          </a:xfrm>
+          <a:prstGeom prst="roundRect">
+            <a:avLst/>
+          </a:prstGeom>
+          <a:solidFill>
+            <a:srgbClr val="1A2238"/>
+          </a:solidFill>
+          <a:ln>
+            <a:noFill/>
+          </a:ln>
+          <a:effectLst/>
+        </p:spPr>
+        <p:style>
+          <a:lnRef idx="1">
+            <a:schemeClr val="accent1"/>
+          </a:lnRef>
+          <a:fillRef idx="3">
+            <a:schemeClr val="accent1"/>
+          </a:fillRef>
+          <a:effectRef idx="2">
+            <a:schemeClr val="accent1"/>
+          </a:effectRef>
+          <a:fontRef idx="minor">
+            <a:schemeClr val="lt1"/>
+          </a:fontRef>
+        </p:style>
+        <p:txBody>
+          <a:bodyPr rtlCol="0" anchor="ctr"/>
+          <a:lstStyle/>
+          <a:p>
+            <a:pPr algn="ctr"/>
+          </a:p>
+        </p:txBody>
+      </p:sp>
+      <p:sp>
+        <p:nvSpPr>
+          <p:cNvPr id="88" name="TextBox 87"/>
+          <p:cNvSpPr txBox="1"/>
+          <p:nvPr/>
+        </p:nvSpPr>
+        <p:spPr>
+          <a:xfrm>
+            <a:off x="4127396" y="4311542"/>
+            <a:ext cx="1816054" cy="241293"/>
+          </a:xfrm>
+          <a:prstGeom prst="rect">
+            <a:avLst/>
+          </a:prstGeom>
+          <a:noFill/>
+        </p:spPr>
+        <p:txBody>
+          <a:bodyPr wrap="square" anchor="ctr" lIns="45720" rIns="45720">
+            <a:spAutoFit/>
+          </a:bodyPr>
+          <a:lstStyle/>
+          <a:p>
+            <a:pPr algn="l"/>
+            <a:r>
+              <a:rPr sz="1000" b="0">
+                <a:solidFill>
+                  <a:srgbClr val="FFFFFF"/>
+                </a:solidFill>
+                <a:latin typeface="Hiragino Sans"/>
+              </a:rPr>
+              <a:t>同</a:t>
+            </a:r>
+          </a:p>
+        </p:txBody>
+      </p:sp>
+      <p:sp>
+        <p:nvSpPr>
+          <p:cNvPr id="89" name="Rounded Rectangle 88"/>
+          <p:cNvSpPr/>
+          <p:nvPr/>
+        </p:nvSpPr>
+        <p:spPr>
+          <a:xfrm>
+            <a:off x="6032349" y="4286142"/>
+            <a:ext cx="2070048" cy="285742"/>
+          </a:xfrm>
+          <a:prstGeom prst="roundRect">
+            <a:avLst/>
+          </a:prstGeom>
+          <a:solidFill>
+            <a:srgbClr val="1A2238"/>
+          </a:solidFill>
+          <a:ln>
+            <a:noFill/>
+          </a:ln>
+          <a:effectLst/>
+        </p:spPr>
+        <p:style>
+          <a:lnRef idx="1">
+            <a:schemeClr val="accent1"/>
+          </a:lnRef>
+          <a:fillRef idx="3">
+            <a:schemeClr val="accent1"/>
+          </a:fillRef>
+          <a:effectRef idx="2">
+            <a:schemeClr val="accent1"/>
+          </a:effectRef>
+          <a:fontRef idx="minor">
+            <a:schemeClr val="lt1"/>
+          </a:fontRef>
+        </p:style>
+        <p:txBody>
+          <a:bodyPr rtlCol="0" anchor="ctr"/>
+          <a:lstStyle/>
+          <a:p>
+            <a:pPr algn="ctr"/>
+          </a:p>
+        </p:txBody>
+      </p:sp>
+      <p:sp>
+        <p:nvSpPr>
+          <p:cNvPr id="90" name="TextBox 89"/>
+          <p:cNvSpPr txBox="1"/>
+          <p:nvPr/>
+        </p:nvSpPr>
+        <p:spPr>
+          <a:xfrm>
+            <a:off x="6095847" y="4311542"/>
+            <a:ext cx="1943051" cy="241293"/>
+          </a:xfrm>
+          <a:prstGeom prst="rect">
+            <a:avLst/>
+          </a:prstGeom>
+          <a:noFill/>
+        </p:spPr>
+        <p:txBody>
+          <a:bodyPr wrap="square" anchor="ctr" lIns="45720" rIns="45720">
+            <a:spAutoFit/>
+          </a:bodyPr>
+          <a:lstStyle/>
+          <a:p>
+            <a:pPr algn="l"/>
+            <a:r>
+              <a:rPr sz="1000" b="0">
+                <a:solidFill>
+                  <a:srgbClr val="FFFFFF"/>
+                </a:solidFill>
+                <a:latin typeface="Hiragino Sans"/>
+              </a:rPr>
+              <a:t>同 + Rate Limit 対策</a:t>
+            </a:r>
+          </a:p>
+        </p:txBody>
+      </p:sp>
+      <p:sp>
+        <p:nvSpPr>
+          <p:cNvPr id="91" name="Rounded Rectangle 90"/>
+          <p:cNvSpPr/>
+          <p:nvPr/>
+        </p:nvSpPr>
+        <p:spPr>
+          <a:xfrm>
+            <a:off x="507987" y="4603634"/>
+            <a:ext cx="1562060" cy="285742"/>
+          </a:xfrm>
+          <a:prstGeom prst="roundRect">
+            <a:avLst/>
+          </a:prstGeom>
+          <a:solidFill>
+            <a:srgbClr val="252E42"/>
+          </a:solidFill>
+          <a:ln>
+            <a:noFill/>
+          </a:ln>
+          <a:effectLst/>
+        </p:spPr>
+        <p:style>
+          <a:lnRef idx="1">
+            <a:schemeClr val="accent1"/>
+          </a:lnRef>
+          <a:fillRef idx="3">
+            <a:schemeClr val="accent1"/>
+          </a:fillRef>
+          <a:effectRef idx="2">
+            <a:schemeClr val="accent1"/>
+          </a:effectRef>
+          <a:fontRef idx="minor">
+            <a:schemeClr val="lt1"/>
+          </a:fontRef>
+        </p:style>
+        <p:txBody>
+          <a:bodyPr rtlCol="0" anchor="ctr"/>
+          <a:lstStyle/>
+          <a:p>
+            <a:pPr algn="ctr"/>
+          </a:p>
+        </p:txBody>
+      </p:sp>
+      <p:sp>
+        <p:nvSpPr>
+          <p:cNvPr id="92" name="TextBox 91"/>
+          <p:cNvSpPr txBox="1"/>
+          <p:nvPr/>
+        </p:nvSpPr>
+        <p:spPr>
+          <a:xfrm>
+            <a:off x="571485" y="4629034"/>
+            <a:ext cx="1435064" cy="241293"/>
+          </a:xfrm>
+          <a:prstGeom prst="rect">
+            <a:avLst/>
+          </a:prstGeom>
+          <a:noFill/>
+        </p:spPr>
+        <p:txBody>
+          <a:bodyPr wrap="square" anchor="ctr" lIns="45720" rIns="45720">
+            <a:spAutoFit/>
+          </a:bodyPr>
+          <a:lstStyle/>
+          <a:p>
+            <a:pPr algn="l"/>
+            <a:r>
+              <a:rPr sz="1100" b="1">
+                <a:solidFill>
+                  <a:srgbClr val="FFFFFF"/>
+                </a:solidFill>
+                <a:latin typeface="Hiragino Sans"/>
+              </a:rPr>
+              <a:t>月コスト</a:t>
+            </a:r>
+          </a:p>
+        </p:txBody>
+      </p:sp>
+      <p:sp>
+        <p:nvSpPr>
+          <p:cNvPr id="93" name="Rounded Rectangle 92"/>
+          <p:cNvSpPr/>
+          <p:nvPr/>
+        </p:nvSpPr>
+        <p:spPr>
+          <a:xfrm>
+            <a:off x="2095447" y="4603634"/>
+            <a:ext cx="1943051" cy="285742"/>
+          </a:xfrm>
+          <a:prstGeom prst="roundRect">
+            <a:avLst/>
+          </a:prstGeom>
+          <a:solidFill>
+            <a:srgbClr val="252E42"/>
+          </a:solidFill>
+          <a:ln>
+            <a:noFill/>
+          </a:ln>
+          <a:effectLst/>
+        </p:spPr>
+        <p:style>
+          <a:lnRef idx="1">
+            <a:schemeClr val="accent1"/>
+          </a:lnRef>
+          <a:fillRef idx="3">
+            <a:schemeClr val="accent1"/>
+          </a:fillRef>
+          <a:effectRef idx="2">
+            <a:schemeClr val="accent1"/>
+          </a:effectRef>
+          <a:fontRef idx="minor">
+            <a:schemeClr val="lt1"/>
+          </a:fontRef>
+        </p:style>
+        <p:txBody>
+          <a:bodyPr rtlCol="0" anchor="ctr"/>
+          <a:lstStyle/>
+          <a:p>
+            <a:pPr algn="ctr"/>
+          </a:p>
+        </p:txBody>
+      </p:sp>
+      <p:sp>
+        <p:nvSpPr>
+          <p:cNvPr id="94" name="TextBox 93"/>
+          <p:cNvSpPr txBox="1"/>
+          <p:nvPr/>
+        </p:nvSpPr>
+        <p:spPr>
+          <a:xfrm>
+            <a:off x="2158946" y="4629034"/>
+            <a:ext cx="1816054" cy="241293"/>
+          </a:xfrm>
+          <a:prstGeom prst="rect">
+            <a:avLst/>
+          </a:prstGeom>
+          <a:noFill/>
+        </p:spPr>
+        <p:txBody>
+          <a:bodyPr wrap="square" anchor="ctr" lIns="45720" rIns="45720">
+            <a:spAutoFit/>
+          </a:bodyPr>
+          <a:lstStyle/>
+          <a:p>
+            <a:pPr algn="l"/>
+            <a:r>
+              <a:rPr sz="1000" b="0">
+                <a:solidFill>
+                  <a:srgbClr val="FFFFFF"/>
+                </a:solidFill>
+                <a:latin typeface="Hiragino Sans"/>
+              </a:rPr>
+              <a:t>$135-400 (Phase別)</a:t>
+            </a:r>
+          </a:p>
+        </p:txBody>
+      </p:sp>
+      <p:sp>
+        <p:nvSpPr>
+          <p:cNvPr id="95" name="Rounded Rectangle 94"/>
+          <p:cNvSpPr/>
+          <p:nvPr/>
+        </p:nvSpPr>
+        <p:spPr>
+          <a:xfrm>
+            <a:off x="4063898" y="4603634"/>
+            <a:ext cx="1943051" cy="285742"/>
+          </a:xfrm>
+          <a:prstGeom prst="roundRect">
+            <a:avLst/>
+          </a:prstGeom>
+          <a:solidFill>
+            <a:srgbClr val="252E42"/>
+          </a:solidFill>
+          <a:ln>
+            <a:noFill/>
+          </a:ln>
+          <a:effectLst/>
+        </p:spPr>
+        <p:style>
+          <a:lnRef idx="1">
+            <a:schemeClr val="accent1"/>
+          </a:lnRef>
+          <a:fillRef idx="3">
+            <a:schemeClr val="accent1"/>
+          </a:fillRef>
+          <a:effectRef idx="2">
+            <a:schemeClr val="accent1"/>
+          </a:effectRef>
+          <a:fontRef idx="minor">
+            <a:schemeClr val="lt1"/>
+          </a:fontRef>
+        </p:style>
+        <p:txBody>
+          <a:bodyPr rtlCol="0" anchor="ctr"/>
+          <a:lstStyle/>
+          <a:p>
+            <a:pPr algn="ctr"/>
+          </a:p>
+        </p:txBody>
+      </p:sp>
+      <p:sp>
+        <p:nvSpPr>
+          <p:cNvPr id="96" name="TextBox 95"/>
+          <p:cNvSpPr txBox="1"/>
+          <p:nvPr/>
+        </p:nvSpPr>
+        <p:spPr>
+          <a:xfrm>
+            <a:off x="4127396" y="4629034"/>
+            <a:ext cx="1816054" cy="241293"/>
+          </a:xfrm>
+          <a:prstGeom prst="rect">
+            <a:avLst/>
+          </a:prstGeom>
+          <a:noFill/>
+        </p:spPr>
+        <p:txBody>
+          <a:bodyPr wrap="square" anchor="ctr" lIns="45720" rIns="45720">
+            <a:spAutoFit/>
+          </a:bodyPr>
+          <a:lstStyle/>
+          <a:p>
+            <a:pPr algn="l"/>
+            <a:r>
+              <a:rPr sz="1000" b="0">
+                <a:solidFill>
+                  <a:srgbClr val="FFFFFF"/>
+                </a:solidFill>
+                <a:latin typeface="Hiragino Sans"/>
+              </a:rPr>
+              <a:t>$50-100 (Cache想定)</a:t>
+            </a:r>
+          </a:p>
+        </p:txBody>
+      </p:sp>
+      <p:sp>
+        <p:nvSpPr>
+          <p:cNvPr id="97" name="Rounded Rectangle 96"/>
+          <p:cNvSpPr/>
+          <p:nvPr/>
+        </p:nvSpPr>
+        <p:spPr>
+          <a:xfrm>
+            <a:off x="6032349" y="4603634"/>
+            <a:ext cx="2070048" cy="285742"/>
+          </a:xfrm>
+          <a:prstGeom prst="roundRect">
+            <a:avLst/>
+          </a:prstGeom>
+          <a:solidFill>
+            <a:srgbClr val="252E42"/>
+          </a:solidFill>
+          <a:ln>
+            <a:noFill/>
+          </a:ln>
+          <a:effectLst/>
+        </p:spPr>
+        <p:style>
+          <a:lnRef idx="1">
+            <a:schemeClr val="accent1"/>
+          </a:lnRef>
+          <a:fillRef idx="3">
+            <a:schemeClr val="accent1"/>
+          </a:fillRef>
+          <a:effectRef idx="2">
+            <a:schemeClr val="accent1"/>
+          </a:effectRef>
+          <a:fontRef idx="minor">
+            <a:schemeClr val="lt1"/>
+          </a:fontRef>
+        </p:style>
+        <p:txBody>
+          <a:bodyPr rtlCol="0" anchor="ctr"/>
+          <a:lstStyle/>
+          <a:p>
+            <a:pPr algn="ctr"/>
+          </a:p>
+        </p:txBody>
+      </p:sp>
+      <p:sp>
+        <p:nvSpPr>
+          <p:cNvPr id="98" name="TextBox 97"/>
+          <p:cNvSpPr txBox="1"/>
+          <p:nvPr/>
+        </p:nvSpPr>
+        <p:spPr>
+          <a:xfrm>
+            <a:off x="6095847" y="4629034"/>
+            <a:ext cx="1943051" cy="241293"/>
+          </a:xfrm>
+          <a:prstGeom prst="rect">
+            <a:avLst/>
+          </a:prstGeom>
+          <a:noFill/>
+        </p:spPr>
+        <p:txBody>
+          <a:bodyPr wrap="square" anchor="ctr" lIns="45720" rIns="45720">
+            <a:spAutoFit/>
+          </a:bodyPr>
+          <a:lstStyle/>
+          <a:p>
+            <a:pPr algn="l"/>
+            <a:r>
+              <a:rPr sz="1000" b="0">
+                <a:solidFill>
+                  <a:srgbClr val="FFFFFF"/>
+                </a:solidFill>
+                <a:latin typeface="Hiragino Sans"/>
+              </a:rPr>
+              <a:t>$25-200 (POC後確定)</a:t>
+            </a:r>
+          </a:p>
+        </p:txBody>
+      </p:sp>
+      <p:sp>
+        <p:nvSpPr>
+          <p:cNvPr id="99" name="Rounded Rectangle 98"/>
+          <p:cNvSpPr/>
+          <p:nvPr/>
+        </p:nvSpPr>
+        <p:spPr>
+          <a:xfrm>
+            <a:off x="507987" y="4921126"/>
+            <a:ext cx="1562060" cy="285742"/>
+          </a:xfrm>
+          <a:prstGeom prst="roundRect">
+            <a:avLst/>
+          </a:prstGeom>
+          <a:solidFill>
+            <a:srgbClr val="1A2238"/>
+          </a:solidFill>
+          <a:ln>
+            <a:noFill/>
+          </a:ln>
+          <a:effectLst/>
+        </p:spPr>
+        <p:style>
+          <a:lnRef idx="1">
+            <a:schemeClr val="accent1"/>
+          </a:lnRef>
+          <a:fillRef idx="3">
+            <a:schemeClr val="accent1"/>
+          </a:fillRef>
+          <a:effectRef idx="2">
+            <a:schemeClr val="accent1"/>
+          </a:effectRef>
+          <a:fontRef idx="minor">
+            <a:schemeClr val="lt1"/>
+          </a:fontRef>
+        </p:style>
+        <p:txBody>
+          <a:bodyPr rtlCol="0" anchor="ctr"/>
+          <a:lstStyle/>
+          <a:p>
+            <a:pPr algn="ctr"/>
+          </a:p>
+        </p:txBody>
+      </p:sp>
+      <p:sp>
+        <p:nvSpPr>
+          <p:cNvPr id="100" name="TextBox 99"/>
+          <p:cNvSpPr txBox="1"/>
+          <p:nvPr/>
+        </p:nvSpPr>
+        <p:spPr>
+          <a:xfrm>
+            <a:off x="571485" y="4946526"/>
+            <a:ext cx="1435064" cy="241293"/>
+          </a:xfrm>
+          <a:prstGeom prst="rect">
+            <a:avLst/>
+          </a:prstGeom>
+          <a:noFill/>
+        </p:spPr>
+        <p:txBody>
+          <a:bodyPr wrap="square" anchor="ctr" lIns="45720" rIns="45720">
+            <a:spAutoFit/>
+          </a:bodyPr>
+          <a:lstStyle/>
+          <a:p>
+            <a:pPr algn="l"/>
+            <a:r>
+              <a:rPr sz="1100" b="1">
+                <a:solidFill>
+                  <a:srgbClr val="FFFFFF"/>
+                </a:solidFill>
+                <a:latin typeface="Hiragino Sans"/>
+              </a:rPr>
+              <a:t>Phase</a:t>
+            </a:r>
+          </a:p>
+        </p:txBody>
+      </p:sp>
+      <p:sp>
+        <p:nvSpPr>
+          <p:cNvPr id="101" name="Rounded Rectangle 100"/>
+          <p:cNvSpPr/>
+          <p:nvPr/>
+        </p:nvSpPr>
+        <p:spPr>
+          <a:xfrm>
+            <a:off x="2095447" y="4921126"/>
+            <a:ext cx="1943051" cy="285742"/>
+          </a:xfrm>
+          <a:prstGeom prst="roundRect">
+            <a:avLst/>
+          </a:prstGeom>
+          <a:solidFill>
+            <a:srgbClr val="1A2238"/>
+          </a:solidFill>
+          <a:ln>
+            <a:noFill/>
+          </a:ln>
+          <a:effectLst/>
+        </p:spPr>
+        <p:style>
+          <a:lnRef idx="1">
+            <a:schemeClr val="accent1"/>
+          </a:lnRef>
+          <a:fillRef idx="3">
+            <a:schemeClr val="accent1"/>
+          </a:fillRef>
+          <a:effectRef idx="2">
+            <a:schemeClr val="accent1"/>
+          </a:effectRef>
+          <a:fontRef idx="minor">
+            <a:schemeClr val="lt1"/>
+          </a:fontRef>
+        </p:style>
+        <p:txBody>
+          <a:bodyPr rtlCol="0" anchor="ctr"/>
+          <a:lstStyle/>
+          <a:p>
+            <a:pPr algn="ctr"/>
+          </a:p>
+        </p:txBody>
+      </p:sp>
+      <p:sp>
+        <p:nvSpPr>
+          <p:cNvPr id="102" name="TextBox 101"/>
+          <p:cNvSpPr txBox="1"/>
+          <p:nvPr/>
+        </p:nvSpPr>
+        <p:spPr>
+          <a:xfrm>
+            <a:off x="2158946" y="4946526"/>
+            <a:ext cx="1816054" cy="241293"/>
+          </a:xfrm>
+          <a:prstGeom prst="rect">
+            <a:avLst/>
+          </a:prstGeom>
+          <a:noFill/>
+        </p:spPr>
+        <p:txBody>
+          <a:bodyPr wrap="square" anchor="ctr" lIns="45720" rIns="45720">
+            <a:spAutoFit/>
+          </a:bodyPr>
+          <a:lstStyle/>
+          <a:p>
+            <a:pPr algn="l"/>
+            <a:r>
+              <a:rPr sz="1000" b="0">
+                <a:solidFill>
+                  <a:srgbClr val="FFFFFF"/>
+                </a:solidFill>
+                <a:latin typeface="Hiragino Sans"/>
+              </a:rPr>
+              <a:t>Phase 1-5+ 8ヶ月</a:t>
+            </a:r>
+          </a:p>
+        </p:txBody>
+      </p:sp>
+      <p:sp>
+        <p:nvSpPr>
+          <p:cNvPr id="103" name="Rounded Rectangle 102"/>
+          <p:cNvSpPr/>
+          <p:nvPr/>
+        </p:nvSpPr>
+        <p:spPr>
+          <a:xfrm>
+            <a:off x="4063898" y="4921126"/>
+            <a:ext cx="1943051" cy="285742"/>
+          </a:xfrm>
+          <a:prstGeom prst="roundRect">
+            <a:avLst/>
+          </a:prstGeom>
+          <a:solidFill>
+            <a:srgbClr val="1A2238"/>
+          </a:solidFill>
+          <a:ln>
+            <a:noFill/>
+          </a:ln>
+          <a:effectLst/>
+        </p:spPr>
+        <p:style>
+          <a:lnRef idx="1">
+            <a:schemeClr val="accent1"/>
+          </a:lnRef>
+          <a:fillRef idx="3">
+            <a:schemeClr val="accent1"/>
+          </a:fillRef>
+          <a:effectRef idx="2">
+            <a:schemeClr val="accent1"/>
+          </a:effectRef>
+          <a:fontRef idx="minor">
+            <a:schemeClr val="lt1"/>
+          </a:fontRef>
+        </p:style>
+        <p:txBody>
+          <a:bodyPr rtlCol="0" anchor="ctr"/>
+          <a:lstStyle/>
+          <a:p>
+            <a:pPr algn="ctr"/>
+          </a:p>
+        </p:txBody>
+      </p:sp>
+      <p:sp>
+        <p:nvSpPr>
+          <p:cNvPr id="104" name="TextBox 103"/>
+          <p:cNvSpPr txBox="1"/>
+          <p:nvPr/>
+        </p:nvSpPr>
+        <p:spPr>
+          <a:xfrm>
+            <a:off x="4127396" y="4946526"/>
+            <a:ext cx="1816054" cy="241293"/>
+          </a:xfrm>
+          <a:prstGeom prst="rect">
+            <a:avLst/>
+          </a:prstGeom>
+          <a:noFill/>
+        </p:spPr>
+        <p:txBody>
+          <a:bodyPr wrap="square" anchor="ctr" lIns="45720" rIns="45720">
+            <a:spAutoFit/>
+          </a:bodyPr>
+          <a:lstStyle/>
+          <a:p>
+            <a:pPr algn="l"/>
+            <a:r>
+              <a:rPr sz="1000" b="0">
+                <a:solidFill>
+                  <a:srgbClr val="FFFFFF"/>
+                </a:solidFill>
+                <a:latin typeface="Hiragino Sans"/>
+              </a:rPr>
+              <a:t>同</a:t>
+            </a:r>
+          </a:p>
+        </p:txBody>
+      </p:sp>
+      <p:sp>
+        <p:nvSpPr>
+          <p:cNvPr id="105" name="Rounded Rectangle 104"/>
+          <p:cNvSpPr/>
+          <p:nvPr/>
+        </p:nvSpPr>
+        <p:spPr>
+          <a:xfrm>
+            <a:off x="6032349" y="4921126"/>
+            <a:ext cx="2070048" cy="285742"/>
+          </a:xfrm>
+          <a:prstGeom prst="roundRect">
+            <a:avLst/>
+          </a:prstGeom>
+          <a:solidFill>
+            <a:srgbClr val="1A2238"/>
+          </a:solidFill>
+          <a:ln>
+            <a:noFill/>
+          </a:ln>
+          <a:effectLst/>
+        </p:spPr>
+        <p:style>
+          <a:lnRef idx="1">
+            <a:schemeClr val="accent1"/>
+          </a:lnRef>
+          <a:fillRef idx="3">
+            <a:schemeClr val="accent1"/>
+          </a:fillRef>
+          <a:effectRef idx="2">
+            <a:schemeClr val="accent1"/>
+          </a:effectRef>
+          <a:fontRef idx="minor">
+            <a:schemeClr val="lt1"/>
+          </a:fontRef>
+        </p:style>
+        <p:txBody>
+          <a:bodyPr rtlCol="0" anchor="ctr"/>
+          <a:lstStyle/>
+          <a:p>
+            <a:pPr algn="ctr"/>
+          </a:p>
+        </p:txBody>
+      </p:sp>
+      <p:sp>
+        <p:nvSpPr>
+          <p:cNvPr id="106" name="TextBox 105"/>
+          <p:cNvSpPr txBox="1"/>
+          <p:nvPr/>
+        </p:nvSpPr>
+        <p:spPr>
+          <a:xfrm>
+            <a:off x="6095847" y="4946526"/>
+            <a:ext cx="1943051" cy="241293"/>
+          </a:xfrm>
+          <a:prstGeom prst="rect">
+            <a:avLst/>
+          </a:prstGeom>
+          <a:noFill/>
+        </p:spPr>
+        <p:txBody>
+          <a:bodyPr wrap="square" anchor="ctr" lIns="45720" rIns="45720">
+            <a:spAutoFit/>
+          </a:bodyPr>
+          <a:lstStyle/>
+          <a:p>
+            <a:pPr algn="l"/>
+            <a:r>
+              <a:rPr sz="1000" b="0">
+                <a:solidFill>
+                  <a:srgbClr val="FFFFFF"/>
+                </a:solidFill>
+                <a:latin typeface="Hiragino Sans"/>
+              </a:rPr>
+              <a:t>Day 1-14 動く土台7つ → Phase以降</a:t>
+            </a:r>
+          </a:p>
+        </p:txBody>
+      </p:sp>
+      <p:sp>
+        <p:nvSpPr>
+          <p:cNvPr id="107" name="Rounded Rectangle 106"/>
+          <p:cNvSpPr/>
+          <p:nvPr/>
+        </p:nvSpPr>
+        <p:spPr>
+          <a:xfrm>
+            <a:off x="507987" y="5238619"/>
+            <a:ext cx="1562060" cy="285742"/>
+          </a:xfrm>
+          <a:prstGeom prst="roundRect">
+            <a:avLst/>
+          </a:prstGeom>
+          <a:solidFill>
+            <a:srgbClr val="252E42"/>
+          </a:solidFill>
+          <a:ln>
+            <a:noFill/>
+          </a:ln>
+          <a:effectLst/>
+        </p:spPr>
+        <p:style>
+          <a:lnRef idx="1">
+            <a:schemeClr val="accent1"/>
+          </a:lnRef>
+          <a:fillRef idx="3">
+            <a:schemeClr val="accent1"/>
+          </a:fillRef>
+          <a:effectRef idx="2">
+            <a:schemeClr val="accent1"/>
+          </a:effectRef>
+          <a:fontRef idx="minor">
+            <a:schemeClr val="lt1"/>
+          </a:fontRef>
+        </p:style>
+        <p:txBody>
+          <a:bodyPr rtlCol="0" anchor="ctr"/>
+          <a:lstStyle/>
+          <a:p>
+            <a:pPr algn="ctr"/>
+          </a:p>
+        </p:txBody>
+      </p:sp>
+      <p:sp>
+        <p:nvSpPr>
+          <p:cNvPr id="108" name="TextBox 107"/>
+          <p:cNvSpPr txBox="1"/>
+          <p:nvPr/>
+        </p:nvSpPr>
+        <p:spPr>
+          <a:xfrm>
+            <a:off x="571485" y="5264018"/>
+            <a:ext cx="1435064" cy="241293"/>
+          </a:xfrm>
+          <a:prstGeom prst="rect">
+            <a:avLst/>
+          </a:prstGeom>
+          <a:noFill/>
+        </p:spPr>
+        <p:txBody>
+          <a:bodyPr wrap="square" anchor="ctr" lIns="45720" rIns="45720">
+            <a:spAutoFit/>
+          </a:bodyPr>
+          <a:lstStyle/>
+          <a:p>
+            <a:pPr algn="l"/>
+            <a:r>
+              <a:rPr sz="1100" b="1">
+                <a:solidFill>
+                  <a:srgbClr val="FFFFFF"/>
+                </a:solidFill>
+                <a:latin typeface="Hiragino Sans"/>
+              </a:rPr>
+              <a:t>議事録</a:t>
+            </a:r>
+          </a:p>
+        </p:txBody>
+      </p:sp>
+      <p:sp>
+        <p:nvSpPr>
+          <p:cNvPr id="109" name="Rounded Rectangle 108"/>
+          <p:cNvSpPr/>
+          <p:nvPr/>
+        </p:nvSpPr>
+        <p:spPr>
+          <a:xfrm>
+            <a:off x="2095447" y="5238619"/>
+            <a:ext cx="1943051" cy="285742"/>
+          </a:xfrm>
+          <a:prstGeom prst="roundRect">
+            <a:avLst/>
+          </a:prstGeom>
+          <a:solidFill>
+            <a:srgbClr val="252E42"/>
+          </a:solidFill>
+          <a:ln>
+            <a:noFill/>
+          </a:ln>
+          <a:effectLst/>
+        </p:spPr>
+        <p:style>
+          <a:lnRef idx="1">
+            <a:schemeClr val="accent1"/>
+          </a:lnRef>
+          <a:fillRef idx="3">
+            <a:schemeClr val="accent1"/>
+          </a:fillRef>
+          <a:effectRef idx="2">
+            <a:schemeClr val="accent1"/>
+          </a:effectRef>
+          <a:fontRef idx="minor">
+            <a:schemeClr val="lt1"/>
+          </a:fontRef>
+        </p:style>
+        <p:txBody>
+          <a:bodyPr rtlCol="0" anchor="ctr"/>
+          <a:lstStyle/>
+          <a:p>
+            <a:pPr algn="ctr"/>
+          </a:p>
+        </p:txBody>
+      </p:sp>
+      <p:sp>
+        <p:nvSpPr>
+          <p:cNvPr id="110" name="TextBox 109"/>
+          <p:cNvSpPr txBox="1"/>
+          <p:nvPr/>
+        </p:nvSpPr>
+        <p:spPr>
+          <a:xfrm>
+            <a:off x="2158946" y="5264018"/>
+            <a:ext cx="1816054" cy="241293"/>
+          </a:xfrm>
+          <a:prstGeom prst="rect">
+            <a:avLst/>
+          </a:prstGeom>
+          <a:noFill/>
+        </p:spPr>
+        <p:txBody>
+          <a:bodyPr wrap="square" anchor="ctr" lIns="45720" rIns="45720">
+            <a:spAutoFit/>
+          </a:bodyPr>
+          <a:lstStyle/>
+          <a:p>
+            <a:pPr algn="l"/>
+            <a:r>
+              <a:rPr sz="1000" b="0">
+                <a:solidFill>
+                  <a:srgbClr val="FFFFFF"/>
+                </a:solidFill>
+                <a:latin typeface="Hiragino Sans"/>
+              </a:rPr>
+              <a:t>round_table.md</a:t>
+            </a:r>
+          </a:p>
+        </p:txBody>
+      </p:sp>
+      <p:sp>
+        <p:nvSpPr>
+          <p:cNvPr id="111" name="Rounded Rectangle 110"/>
+          <p:cNvSpPr/>
+          <p:nvPr/>
+        </p:nvSpPr>
+        <p:spPr>
+          <a:xfrm>
+            <a:off x="4063898" y="5238619"/>
+            <a:ext cx="1943051" cy="285742"/>
+          </a:xfrm>
+          <a:prstGeom prst="roundRect">
+            <a:avLst/>
+          </a:prstGeom>
+          <a:solidFill>
+            <a:srgbClr val="252E42"/>
+          </a:solidFill>
+          <a:ln>
+            <a:noFill/>
+          </a:ln>
+          <a:effectLst/>
+        </p:spPr>
+        <p:style>
+          <a:lnRef idx="1">
+            <a:schemeClr val="accent1"/>
+          </a:lnRef>
+          <a:fillRef idx="3">
+            <a:schemeClr val="accent1"/>
+          </a:fillRef>
+          <a:effectRef idx="2">
+            <a:schemeClr val="accent1"/>
+          </a:effectRef>
+          <a:fontRef idx="minor">
+            <a:schemeClr val="lt1"/>
+          </a:fontRef>
+        </p:style>
+        <p:txBody>
+          <a:bodyPr rtlCol="0" anchor="ctr"/>
+          <a:lstStyle/>
+          <a:p>
+            <a:pPr algn="ctr"/>
+          </a:p>
+        </p:txBody>
+      </p:sp>
+      <p:sp>
+        <p:nvSpPr>
+          <p:cNvPr id="112" name="TextBox 111"/>
+          <p:cNvSpPr txBox="1"/>
+          <p:nvPr/>
+        </p:nvSpPr>
+        <p:spPr>
+          <a:xfrm>
+            <a:off x="4127396" y="5264018"/>
+            <a:ext cx="1816054" cy="241293"/>
+          </a:xfrm>
+          <a:prstGeom prst="rect">
+            <a:avLst/>
+          </a:prstGeom>
+          <a:noFill/>
+        </p:spPr>
+        <p:txBody>
+          <a:bodyPr wrap="square" anchor="ctr" lIns="45720" rIns="45720">
+            <a:spAutoFit/>
+          </a:bodyPr>
+          <a:lstStyle/>
+          <a:p>
+            <a:pPr algn="l"/>
+            <a:r>
+              <a:rPr sz="1000" b="0">
+                <a:solidFill>
+                  <a:srgbClr val="FFFFFF"/>
+                </a:solidFill>
+                <a:latin typeface="Hiragino Sans"/>
+              </a:rPr>
+              <a:t>round_table_v2.md</a:t>
+            </a:r>
+          </a:p>
+        </p:txBody>
+      </p:sp>
+      <p:sp>
+        <p:nvSpPr>
+          <p:cNvPr id="113" name="Rounded Rectangle 112"/>
+          <p:cNvSpPr/>
+          <p:nvPr/>
+        </p:nvSpPr>
+        <p:spPr>
+          <a:xfrm>
+            <a:off x="6032349" y="5238619"/>
+            <a:ext cx="2070048" cy="285742"/>
+          </a:xfrm>
+          <a:prstGeom prst="roundRect">
+            <a:avLst/>
+          </a:prstGeom>
+          <a:solidFill>
+            <a:srgbClr val="252E42"/>
+          </a:solidFill>
+          <a:ln>
+            <a:noFill/>
+          </a:ln>
+          <a:effectLst/>
+        </p:spPr>
+        <p:style>
+          <a:lnRef idx="1">
+            <a:schemeClr val="accent1"/>
+          </a:lnRef>
+          <a:fillRef idx="3">
+            <a:schemeClr val="accent1"/>
+          </a:fillRef>
+          <a:effectRef idx="2">
+            <a:schemeClr val="accent1"/>
+          </a:effectRef>
+          <a:fontRef idx="minor">
+            <a:schemeClr val="lt1"/>
+          </a:fontRef>
+        </p:style>
+        <p:txBody>
+          <a:bodyPr rtlCol="0" anchor="ctr"/>
+          <a:lstStyle/>
+          <a:p>
+            <a:pPr algn="ctr"/>
+          </a:p>
+        </p:txBody>
+      </p:sp>
+      <p:sp>
+        <p:nvSpPr>
+          <p:cNvPr id="114" name="TextBox 113"/>
+          <p:cNvSpPr txBox="1"/>
+          <p:nvPr/>
+        </p:nvSpPr>
+        <p:spPr>
+          <a:xfrm>
+            <a:off x="6095847" y="5264018"/>
+            <a:ext cx="1943051" cy="241293"/>
+          </a:xfrm>
+          <a:prstGeom prst="rect">
+            <a:avLst/>
+          </a:prstGeom>
+          <a:noFill/>
+        </p:spPr>
+        <p:txBody>
+          <a:bodyPr wrap="square" anchor="ctr" lIns="45720" rIns="45720">
+            <a:spAutoFit/>
+          </a:bodyPr>
+          <a:lstStyle/>
+          <a:p>
+            <a:pPr algn="l"/>
+            <a:r>
+              <a:rPr sz="1000" b="0">
+                <a:solidFill>
+                  <a:srgbClr val="FFFFFF"/>
+                </a:solidFill>
+                <a:latin typeface="Hiragino Sans"/>
+              </a:rPr>
+              <a:t>round_table_v3.md (Live)</a:t>
+            </a:r>
+          </a:p>
+        </p:txBody>
+      </p:sp>
+      <p:sp>
+        <p:nvSpPr>
+          <p:cNvPr id="115" name="Rounded Rectangle 114"/>
+          <p:cNvSpPr/>
+          <p:nvPr/>
+        </p:nvSpPr>
+        <p:spPr>
+          <a:xfrm>
+            <a:off x="507987" y="5556111"/>
+            <a:ext cx="1562060" cy="285742"/>
+          </a:xfrm>
+          <a:prstGeom prst="roundRect">
+            <a:avLst/>
+          </a:prstGeom>
+          <a:solidFill>
+            <a:srgbClr val="1A2238"/>
+          </a:solidFill>
+          <a:ln>
+            <a:noFill/>
+          </a:ln>
+          <a:effectLst/>
+        </p:spPr>
+        <p:style>
+          <a:lnRef idx="1">
+            <a:schemeClr val="accent1"/>
+          </a:lnRef>
+          <a:fillRef idx="3">
+            <a:schemeClr val="accent1"/>
+          </a:fillRef>
+          <a:effectRef idx="2">
+            <a:schemeClr val="accent1"/>
+          </a:effectRef>
+          <a:fontRef idx="minor">
+            <a:schemeClr val="lt1"/>
+          </a:fontRef>
+        </p:style>
+        <p:txBody>
+          <a:bodyPr rtlCol="0" anchor="ctr"/>
+          <a:lstStyle/>
+          <a:p>
+            <a:pPr algn="ctr"/>
+          </a:p>
+        </p:txBody>
+      </p:sp>
+      <p:sp>
+        <p:nvSpPr>
+          <p:cNvPr id="116" name="TextBox 115"/>
+          <p:cNvSpPr txBox="1"/>
+          <p:nvPr/>
+        </p:nvSpPr>
+        <p:spPr>
+          <a:xfrm>
+            <a:off x="571485" y="5581510"/>
+            <a:ext cx="1435064" cy="241293"/>
+          </a:xfrm>
+          <a:prstGeom prst="rect">
+            <a:avLst/>
+          </a:prstGeom>
+          <a:noFill/>
+        </p:spPr>
+        <p:txBody>
+          <a:bodyPr wrap="square" anchor="ctr" lIns="45720" rIns="45720">
+            <a:spAutoFit/>
+          </a:bodyPr>
+          <a:lstStyle/>
+          <a:p>
+            <a:pPr algn="l"/>
+            <a:r>
+              <a:rPr sz="1100" b="1">
+                <a:solidFill>
+                  <a:srgbClr val="FFC72C"/>
+                </a:solidFill>
+                <a:latin typeface="Hiragino Sans"/>
+              </a:rPr>
+              <a:t>Shuji評価</a:t>
+            </a:r>
+          </a:p>
+        </p:txBody>
+      </p:sp>
+      <p:sp>
+        <p:nvSpPr>
+          <p:cNvPr id="117" name="Rounded Rectangle 116"/>
+          <p:cNvSpPr/>
+          <p:nvPr/>
+        </p:nvSpPr>
+        <p:spPr>
+          <a:xfrm>
+            <a:off x="2095447" y="5556111"/>
+            <a:ext cx="1943051" cy="285742"/>
+          </a:xfrm>
+          <a:prstGeom prst="roundRect">
+            <a:avLst/>
+          </a:prstGeom>
+          <a:solidFill>
+            <a:srgbClr val="1A2238"/>
+          </a:solidFill>
+          <a:ln>
+            <a:noFill/>
+          </a:ln>
+          <a:effectLst/>
+        </p:spPr>
+        <p:style>
+          <a:lnRef idx="1">
+            <a:schemeClr val="accent1"/>
+          </a:lnRef>
+          <a:fillRef idx="3">
+            <a:schemeClr val="accent1"/>
+          </a:fillRef>
+          <a:effectRef idx="2">
+            <a:schemeClr val="accent1"/>
+          </a:effectRef>
+          <a:fontRef idx="minor">
+            <a:schemeClr val="lt1"/>
+          </a:fontRef>
+        </p:style>
+        <p:txBody>
+          <a:bodyPr rtlCol="0" anchor="ctr"/>
+          <a:lstStyle/>
+          <a:p>
+            <a:pPr algn="ctr"/>
+          </a:p>
+        </p:txBody>
+      </p:sp>
+      <p:sp>
+        <p:nvSpPr>
+          <p:cNvPr id="118" name="TextBox 117"/>
+          <p:cNvSpPr txBox="1"/>
+          <p:nvPr/>
+        </p:nvSpPr>
+        <p:spPr>
+          <a:xfrm>
+            <a:off x="2158946" y="5581510"/>
+            <a:ext cx="1816054" cy="241293"/>
+          </a:xfrm>
+          <a:prstGeom prst="rect">
+            <a:avLst/>
+          </a:prstGeom>
+          <a:noFill/>
+        </p:spPr>
+        <p:txBody>
+          <a:bodyPr wrap="square" anchor="ctr" lIns="45720" rIns="45720">
+            <a:spAutoFit/>
+          </a:bodyPr>
+          <a:lstStyle/>
+          <a:p>
+            <a:pPr algn="l"/>
+            <a:r>
+              <a:rPr sz="1000" b="1">
+                <a:solidFill>
+                  <a:srgbClr val="FF4D4D"/>
+                </a:solidFill>
+                <a:latin typeface="Hiragino Sans"/>
+              </a:rPr>
+              <a:t>10年前の新人レベル</a:t>
+            </a:r>
+          </a:p>
+        </p:txBody>
+      </p:sp>
+      <p:sp>
+        <p:nvSpPr>
+          <p:cNvPr id="119" name="Rounded Rectangle 118"/>
+          <p:cNvSpPr/>
+          <p:nvPr/>
+        </p:nvSpPr>
+        <p:spPr>
+          <a:xfrm>
+            <a:off x="4063898" y="5556111"/>
+            <a:ext cx="1943051" cy="285742"/>
+          </a:xfrm>
+          <a:prstGeom prst="roundRect">
+            <a:avLst/>
+          </a:prstGeom>
+          <a:solidFill>
+            <a:srgbClr val="1A2238"/>
+          </a:solidFill>
+          <a:ln>
+            <a:noFill/>
+          </a:ln>
+          <a:effectLst/>
+        </p:spPr>
+        <p:style>
+          <a:lnRef idx="1">
+            <a:schemeClr val="accent1"/>
+          </a:lnRef>
+          <a:fillRef idx="3">
+            <a:schemeClr val="accent1"/>
+          </a:fillRef>
+          <a:effectRef idx="2">
+            <a:schemeClr val="accent1"/>
+          </a:effectRef>
+          <a:fontRef idx="minor">
+            <a:schemeClr val="lt1"/>
+          </a:fontRef>
+        </p:style>
+        <p:txBody>
+          <a:bodyPr rtlCol="0" anchor="ctr"/>
+          <a:lstStyle/>
+          <a:p>
+            <a:pPr algn="ctr"/>
+          </a:p>
+        </p:txBody>
+      </p:sp>
+      <p:sp>
+        <p:nvSpPr>
+          <p:cNvPr id="120" name="TextBox 119"/>
+          <p:cNvSpPr txBox="1"/>
+          <p:nvPr/>
+        </p:nvSpPr>
+        <p:spPr>
+          <a:xfrm>
+            <a:off x="4127396" y="5581510"/>
+            <a:ext cx="1816054" cy="241293"/>
+          </a:xfrm>
+          <a:prstGeom prst="rect">
+            <a:avLst/>
+          </a:prstGeom>
+          <a:noFill/>
+        </p:spPr>
+        <p:txBody>
+          <a:bodyPr wrap="square" anchor="ctr" lIns="45720" rIns="45720">
+            <a:spAutoFit/>
+          </a:bodyPr>
+          <a:lstStyle/>
+          <a:p>
+            <a:pPr algn="l"/>
+            <a:r>
+              <a:rPr sz="1000" b="1">
+                <a:solidFill>
+                  <a:srgbClr val="FFC72C"/>
+                </a:solidFill>
+                <a:latin typeface="Hiragino Sans"/>
+              </a:rPr>
+              <a:t>プロ品質、 ただし2人会議</a:t>
+            </a:r>
+          </a:p>
+        </p:txBody>
+      </p:sp>
+      <p:sp>
+        <p:nvSpPr>
+          <p:cNvPr id="121" name="Rounded Rectangle 120"/>
+          <p:cNvSpPr/>
+          <p:nvPr/>
+        </p:nvSpPr>
+        <p:spPr>
+          <a:xfrm>
+            <a:off x="6032349" y="5556111"/>
+            <a:ext cx="2070048" cy="285742"/>
+          </a:xfrm>
+          <a:prstGeom prst="roundRect">
+            <a:avLst/>
+          </a:prstGeom>
+          <a:solidFill>
+            <a:srgbClr val="1A2238"/>
+          </a:solidFill>
+          <a:ln>
+            <a:noFill/>
+          </a:ln>
+          <a:effectLst/>
+        </p:spPr>
+        <p:style>
+          <a:lnRef idx="1">
+            <a:schemeClr val="accent1"/>
+          </a:lnRef>
+          <a:fillRef idx="3">
+            <a:schemeClr val="accent1"/>
+          </a:fillRef>
+          <a:effectRef idx="2">
+            <a:schemeClr val="accent1"/>
+          </a:effectRef>
+          <a:fontRef idx="minor">
+            <a:schemeClr val="lt1"/>
+          </a:fontRef>
+        </p:style>
+        <p:txBody>
+          <a:bodyPr rtlCol="0" anchor="ctr"/>
+          <a:lstStyle/>
+          <a:p>
+            <a:pPr algn="ctr"/>
+          </a:p>
+        </p:txBody>
+      </p:sp>
+      <p:sp>
+        <p:nvSpPr>
+          <p:cNvPr id="122" name="TextBox 121"/>
+          <p:cNvSpPr txBox="1"/>
+          <p:nvPr/>
+        </p:nvSpPr>
+        <p:spPr>
+          <a:xfrm>
+            <a:off x="6095847" y="5581510"/>
+            <a:ext cx="1943051" cy="241293"/>
+          </a:xfrm>
+          <a:prstGeom prst="rect">
+            <a:avLst/>
+          </a:prstGeom>
+          <a:noFill/>
+        </p:spPr>
+        <p:txBody>
+          <a:bodyPr wrap="square" anchor="ctr" lIns="45720" rIns="45720">
+            <a:spAutoFit/>
+          </a:bodyPr>
+          <a:lstStyle/>
+          <a:p>
+            <a:pPr algn="l"/>
+            <a:r>
+              <a:rPr sz="1000" b="1">
+                <a:solidFill>
+                  <a:srgbClr val="FFC72C"/>
+                </a:solidFill>
+                <a:latin typeface="Hiragino Sans"/>
+              </a:rPr>
+              <a:t>本気3者、 動線改善、 質ベース反映</a:t>
+            </a:r>
+          </a:p>
+        </p:txBody>
+      </p:sp>
+      <p:sp>
+        <p:nvSpPr>
+          <p:cNvPr id="123" name="Rounded Rectangle 122"/>
+          <p:cNvSpPr/>
+          <p:nvPr/>
+        </p:nvSpPr>
+        <p:spPr>
+          <a:xfrm>
+            <a:off x="8381790" y="1047723"/>
+            <a:ext cx="3428914" cy="5524361"/>
+          </a:xfrm>
+          <a:prstGeom prst="roundRect">
+            <a:avLst/>
+          </a:prstGeom>
+          <a:solidFill>
+            <a:srgbClr val="252E42"/>
+          </a:solidFill>
+          <a:ln w="12700">
+            <a:solidFill>
+              <a:srgbClr val="FFC72C"/>
+            </a:solidFill>
+          </a:ln>
+          <a:effectLst/>
+        </p:spPr>
+        <p:style>
+          <a:lnRef idx="1">
+            <a:schemeClr val="accent1"/>
+          </a:lnRef>
+          <a:fillRef idx="3">
+            <a:schemeClr val="accent1"/>
+          </a:fillRef>
+          <a:effectRef idx="2">
+            <a:schemeClr val="accent1"/>
+          </a:effectRef>
+          <a:fontRef idx="minor">
+            <a:schemeClr val="lt1"/>
+          </a:fontRef>
+        </p:style>
+        <p:txBody>
+          <a:bodyPr rtlCol="0" anchor="ctr"/>
+          <a:lstStyle/>
+          <a:p>
+            <a:pPr algn="ctr"/>
+          </a:p>
+        </p:txBody>
+      </p:sp>
+      <p:sp>
+        <p:nvSpPr>
+          <p:cNvPr id="124" name="TextBox 123"/>
+          <p:cNvSpPr txBox="1"/>
+          <p:nvPr/>
+        </p:nvSpPr>
+        <p:spPr>
+          <a:xfrm>
+            <a:off x="8508787" y="1142971"/>
+            <a:ext cx="3174920" cy="285742"/>
+          </a:xfrm>
+          <a:prstGeom prst="rect">
+            <a:avLst/>
+          </a:prstGeom>
+          <a:noFill/>
+        </p:spPr>
+        <p:txBody>
+          <a:bodyPr wrap="square" anchor="t" lIns="45720" rIns="45720">
+            <a:spAutoFit/>
+          </a:bodyPr>
+          <a:lstStyle/>
+          <a:p>
+            <a:pPr algn="l"/>
+            <a:r>
+              <a:rPr sz="1800" b="1">
+                <a:solidFill>
+                  <a:srgbClr val="FFC72C"/>
+                </a:solidFill>
+                <a:latin typeface="Hiragino Sans"/>
+              </a:rPr>
+              <a:t>用語辞書</a:t>
+            </a:r>
+          </a:p>
+        </p:txBody>
+      </p:sp>
+      <p:sp>
+        <p:nvSpPr>
+          <p:cNvPr id="125" name="TextBox 124"/>
+          <p:cNvSpPr txBox="1"/>
+          <p:nvPr/>
+        </p:nvSpPr>
+        <p:spPr>
+          <a:xfrm>
+            <a:off x="8508787" y="1460463"/>
+            <a:ext cx="3174920" cy="5016374"/>
+          </a:xfrm>
+          <a:prstGeom prst="rect">
+            <a:avLst/>
+          </a:prstGeom>
+          <a:noFill/>
+        </p:spPr>
+        <p:txBody>
+          <a:bodyPr wrap="square" lIns="45720" rIns="45720">
+            <a:spAutoFit/>
+          </a:bodyPr>
+          <a:lstStyle/>
+          <a:p>
+            <a:pPr algn="l">
+              <a:lnSpc>
+                <a:spcPct val="120000"/>
+              </a:lnSpc>
+            </a:pPr>
+            <a:r>
+              <a:rPr sz="1300" b="1">
+                <a:solidFill>
+                  <a:srgbClr val="FFC72C"/>
+                </a:solidFill>
+                <a:latin typeface="Hiragino Sans"/>
+              </a:rPr>
+              <a:t>SAC-Lagrangian</a:t>
+            </a:r>
+          </a:p>
+          <a:p>
+            <a:pPr algn="l">
+              <a:lnSpc>
+                <a:spcPct val="120000"/>
+              </a:lnSpc>
+            </a:pPr>
+            <a:r>
+              <a:rPr sz="1100" b="0">
+                <a:solidFill>
+                  <a:srgbClr val="FFFFFF"/>
+                </a:solidFill>
+                <a:latin typeface="Hiragino Sans"/>
+              </a:rPr>
+              <a:t>制約付きSoft Actor-Critic。リスク制約を満たしつつ報酬最大化する強化学習。</a:t>
+            </a:r>
+          </a:p>
+          <a:p>
+            <a:pPr algn="l">
+              <a:lnSpc>
+                <a:spcPct val="120000"/>
+              </a:lnSpc>
+            </a:pPr>
+            <a:r>
+              <a:rPr sz="1300" b="1">
+                <a:solidFill>
+                  <a:srgbClr val="FFC72C"/>
+                </a:solidFill>
+                <a:latin typeface="Hiragino Sans"/>
+              </a:rPr>
+              <a:t>Trade-EHR</a:t>
+            </a:r>
+          </a:p>
+          <a:p>
+            <a:pPr algn="l">
+              <a:lnSpc>
+                <a:spcPct val="120000"/>
+              </a:lnSpc>
+            </a:pPr>
+            <a:r>
+              <a:rPr sz="1100" b="0">
+                <a:solidFill>
+                  <a:srgbClr val="FFFFFF"/>
+                </a:solidFill>
+                <a:latin typeface="Hiragino Sans"/>
+              </a:rPr>
+              <a:t>Equity-Hours Return = NetProfit/(AvgEquity×ElapsedHours)。 時給×元手効率。</a:t>
+            </a:r>
+          </a:p>
+          <a:p>
+            <a:pPr algn="l">
+              <a:lnSpc>
+                <a:spcPct val="120000"/>
+              </a:lnSpc>
+            </a:pPr>
+            <a:r>
+              <a:rPr sz="1300" b="1">
+                <a:solidFill>
+                  <a:srgbClr val="FFC72C"/>
+                </a:solidFill>
+                <a:latin typeface="Hiragino Sans"/>
+              </a:rPr>
+              <a:t>MA30</a:t>
+            </a:r>
+          </a:p>
+          <a:p>
+            <a:pPr algn="l">
+              <a:lnSpc>
+                <a:spcPct val="120000"/>
+              </a:lnSpc>
+            </a:pPr>
+            <a:r>
+              <a:rPr sz="1100" b="0">
+                <a:solidFill>
+                  <a:srgbClr val="FFFFFF"/>
+                </a:solidFill>
+                <a:latin typeface="Hiragino Sans"/>
+              </a:rPr>
+              <a:t>直近30トレードの移動平均。EHRの揺らぎを平準化。</a:t>
+            </a:r>
+          </a:p>
+          <a:p>
+            <a:pPr algn="l">
+              <a:lnSpc>
+                <a:spcPct val="120000"/>
+              </a:lnSpc>
+            </a:pPr>
+            <a:r>
+              <a:rPr sz="1300" b="1">
+                <a:solidFill>
+                  <a:srgbClr val="FFC72C"/>
+                </a:solidFill>
+                <a:latin typeface="Hiragino Sans"/>
+              </a:rPr>
+              <a:t>RAG</a:t>
+            </a:r>
+          </a:p>
+          <a:p>
+            <a:pPr algn="l">
+              <a:lnSpc>
+                <a:spcPct val="120000"/>
+              </a:lnSpc>
+            </a:pPr>
+            <a:r>
+              <a:rPr sz="1100" b="0">
+                <a:solidFill>
+                  <a:srgbClr val="FFFFFF"/>
+                </a:solidFill>
+                <a:latin typeface="Hiragino Sans"/>
+              </a:rPr>
+              <a:t>Retrieval-Augmented Generation。 検索拡張生成。 過去ポストを類似検索。</a:t>
+            </a:r>
+          </a:p>
+          <a:p>
+            <a:pPr algn="l">
+              <a:lnSpc>
+                <a:spcPct val="120000"/>
+              </a:lnSpc>
+            </a:pPr>
+            <a:r>
+              <a:rPr sz="1300" b="1">
+                <a:solidFill>
+                  <a:srgbClr val="FFC72C"/>
+                </a:solidFill>
+                <a:latin typeface="Hiragino Sans"/>
+              </a:rPr>
+              <a:t>GAIA-Triad 2.0</a:t>
+            </a:r>
+          </a:p>
+          <a:p>
+            <a:pPr algn="l">
+              <a:lnSpc>
+                <a:spcPct val="120000"/>
+              </a:lnSpc>
+            </a:pPr>
+            <a:r>
+              <a:rPr sz="1100" b="0">
+                <a:solidFill>
+                  <a:srgbClr val="FFFFFF"/>
+                </a:solidFill>
+                <a:latin typeface="Hiragino Sans"/>
+              </a:rPr>
+              <a:t>Slow Brain+Risk Engine+Fast Guard+Order Gate の4ノード。</a:t>
+            </a:r>
+          </a:p>
+          <a:p>
+            <a:pPr algn="l">
+              <a:lnSpc>
+                <a:spcPct val="120000"/>
+              </a:lnSpc>
+            </a:pPr>
+            <a:r>
+              <a:rPr sz="1300" b="1">
+                <a:solidFill>
+                  <a:srgbClr val="FFC72C"/>
+                </a:solidFill>
+                <a:latin typeface="Hiragino Sans"/>
+              </a:rPr>
+              <a:t>Particle Filter</a:t>
+            </a:r>
+          </a:p>
+          <a:p>
+            <a:pPr algn="l">
+              <a:lnSpc>
+                <a:spcPct val="120000"/>
+              </a:lnSpc>
+            </a:pPr>
+            <a:r>
+              <a:rPr sz="1100" b="0">
+                <a:solidFill>
+                  <a:srgbClr val="FFFFFF"/>
+                </a:solidFill>
+                <a:latin typeface="Hiragino Sans"/>
+              </a:rPr>
+              <a:t>粒子フィルタ。 複数シナリオを並走させ観測で確率を更新。</a:t>
+            </a:r>
+          </a:p>
+          <a:p>
+            <a:pPr algn="l">
+              <a:lnSpc>
+                <a:spcPct val="120000"/>
+              </a:lnSpc>
+            </a:pPr>
+            <a:r>
+              <a:rPr sz="1300" b="1">
+                <a:solidFill>
+                  <a:srgbClr val="FFC72C"/>
+                </a:solidFill>
+                <a:latin typeface="Hiragino Sans"/>
+              </a:rPr>
+              <a:t>Half-Kelly</a:t>
+            </a:r>
+          </a:p>
+          <a:p>
+            <a:pPr algn="l">
+              <a:lnSpc>
+                <a:spcPct val="120000"/>
+              </a:lnSpc>
+            </a:pPr>
+            <a:r>
+              <a:rPr sz="1100" b="0">
+                <a:solidFill>
+                  <a:srgbClr val="FFFFFF"/>
+                </a:solidFill>
+                <a:latin typeface="Hiragino Sans"/>
+              </a:rPr>
+              <a:t>ケリー基準の半分。 安全側にレバを抑える。 p-(1-p)/b の半分。</a:t>
+            </a:r>
+          </a:p>
+          <a:p>
+            <a:pPr algn="l">
+              <a:lnSpc>
+                <a:spcPct val="120000"/>
+              </a:lnSpc>
+            </a:pPr>
+            <a:r>
+              <a:rPr sz="1300" b="1">
+                <a:solidFill>
+                  <a:srgbClr val="FFC72C"/>
+                </a:solidFill>
+                <a:latin typeface="Hiragino Sans"/>
+              </a:rPr>
+              <a:t>TTL</a:t>
+            </a:r>
+          </a:p>
+          <a:p>
+            <a:pPr algn="l">
+              <a:lnSpc>
+                <a:spcPct val="120000"/>
+              </a:lnSpc>
+            </a:pPr>
+            <a:r>
+              <a:rPr sz="1100" b="0">
+                <a:solidFill>
+                  <a:srgbClr val="FFFFFF"/>
+                </a:solidFill>
+                <a:latin typeface="Hiragino Sans"/>
+              </a:rPr>
+              <a:t>Time-To-Live。 判断の賞味期限。 v3 では15分。</a:t>
+            </a:r>
+          </a:p>
+          <a:p>
+            <a:pPr algn="l">
+              <a:lnSpc>
+                <a:spcPct val="120000"/>
+              </a:lnSpc>
+            </a:pPr>
+            <a:r>
+              <a:rPr sz="1300" b="1">
+                <a:solidFill>
+                  <a:srgbClr val="FFC72C"/>
+                </a:solidFill>
+                <a:latin typeface="Hiragino Sans"/>
+              </a:rPr>
+              <a:t>CPCV</a:t>
+            </a:r>
+          </a:p>
+          <a:p>
+            <a:pPr algn="l">
+              <a:lnSpc>
+                <a:spcPct val="120000"/>
+              </a:lnSpc>
+            </a:pPr>
+            <a:r>
+              <a:rPr sz="1100" b="0">
+                <a:solidFill>
+                  <a:srgbClr val="FFFFFF"/>
+                </a:solidFill>
+                <a:latin typeface="Hiragino Sans"/>
+              </a:rPr>
+              <a:t>Combinatorial Purged Cross-Validation。 過学習検出BT。</a:t>
+            </a:r>
+          </a:p>
+          <a:p>
+            <a:pPr algn="l">
+              <a:lnSpc>
+                <a:spcPct val="120000"/>
+              </a:lnSpc>
+            </a:pPr>
+            <a:r>
+              <a:rPr sz="1300" b="1">
+                <a:solidFill>
+                  <a:srgbClr val="FFC72C"/>
+                </a:solidFill>
+                <a:latin typeface="Hiragino Sans"/>
+              </a:rPr>
+              <a:t>DSR/PSR/PBO</a:t>
+            </a:r>
+          </a:p>
+          <a:p>
+            <a:pPr algn="l">
+              <a:lnSpc>
+                <a:spcPct val="120000"/>
+              </a:lnSpc>
+            </a:pPr>
+            <a:r>
+              <a:rPr sz="1100" b="0">
+                <a:solidFill>
+                  <a:srgbClr val="FFFFFF"/>
+                </a:solidFill>
+                <a:latin typeface="Hiragino Sans"/>
+              </a:rPr>
+              <a:t>Deflated/Probabilistic Sharpe Ratio / Probability of Backtest Overfitting。 偶然勝ち検出。</a:t>
+            </a:r>
+          </a:p>
+          <a:p>
+            <a:pPr algn="l">
+              <a:lnSpc>
+                <a:spcPct val="120000"/>
+              </a:lnSpc>
+            </a:pPr>
+            <a:r>
+              <a:rPr sz="1300" b="1">
+                <a:solidFill>
+                  <a:srgbClr val="FFC72C"/>
+                </a:solidFill>
+                <a:latin typeface="Hiragino Sans"/>
+              </a:rPr>
+              <a:t>EVT</a:t>
+            </a:r>
+          </a:p>
+          <a:p>
+            <a:pPr algn="l">
+              <a:lnSpc>
+                <a:spcPct val="120000"/>
+              </a:lnSpc>
+            </a:pPr>
+            <a:r>
+              <a:rPr sz="1100" b="0">
+                <a:solidFill>
+                  <a:srgbClr val="FFFFFF"/>
+                </a:solidFill>
+                <a:latin typeface="Hiragino Sans"/>
+              </a:rPr>
+              <a:t>Extreme Value Theory。 極値統計。 ファットテール対策。</a:t>
+            </a:r>
+          </a:p>
+          <a:p>
+            <a:pPr algn="l">
+              <a:lnSpc>
+                <a:spcPct val="120000"/>
+              </a:lnSpc>
+            </a:pPr>
+            <a:r>
+              <a:rPr sz="1300" b="1">
+                <a:solidFill>
+                  <a:srgbClr val="FFC72C"/>
+                </a:solidFill>
+                <a:latin typeface="Hiragino Sans"/>
+              </a:rPr>
+              <a:t>Probabilistic Deep Hedging</a:t>
+            </a:r>
+          </a:p>
+          <a:p>
+            <a:pPr algn="l">
+              <a:lnSpc>
+                <a:spcPct val="120000"/>
+              </a:lnSpc>
+            </a:pPr>
+            <a:r>
+              <a:rPr sz="1100" b="0">
+                <a:solidFill>
+                  <a:srgbClr val="FFFFFF"/>
+                </a:solidFill>
+                <a:latin typeface="Hiragino Sans"/>
+              </a:rPr>
+              <a:t>複数シナリオに確率分布と最適ヘッジ比率を同時最適化。</a:t>
+            </a:r>
+          </a:p>
+        </p:txBody>
+      </p:sp>
+      <p:sp>
+        <p:nvSpPr>
+          <p:cNvPr id="126" name="TextBox 125"/>
+          <p:cNvSpPr txBox="1"/>
+          <p:nvPr/>
+        </p:nvSpPr>
+        <p:spPr>
+          <a:xfrm>
+            <a:off x="507987" y="6476838"/>
+            <a:ext cx="5079873" cy="253993"/>
+          </a:xfrm>
+          <a:prstGeom prst="rect">
+            <a:avLst/>
+          </a:prstGeom>
+          <a:noFill/>
+        </p:spPr>
+        <p:txBody>
+          <a:bodyPr wrap="square" anchor="t" lIns="45720" rIns="45720">
+            <a:spAutoFit/>
+          </a:bodyPr>
+          <a:lstStyle/>
+          <a:p>
+            <a:pPr algn="l"/>
+            <a:r>
+              <a:rPr sz="1200" b="0">
+                <a:solidFill>
+                  <a:srgbClr val="AFB8C1"/>
+                </a:solidFill>
+                <a:latin typeface="Hiragino Sans"/>
+              </a:rPr>
+              <a:t>Project danjer-GAIA</a:t>
+            </a:r>
+          </a:p>
+        </p:txBody>
+      </p:sp>
+      <p:sp>
+        <p:nvSpPr>
+          <p:cNvPr id="127" name="TextBox 126"/>
+          <p:cNvSpPr txBox="1"/>
+          <p:nvPr/>
+        </p:nvSpPr>
+        <p:spPr>
+          <a:xfrm>
+            <a:off x="10794730" y="6476838"/>
+            <a:ext cx="888977" cy="253993"/>
+          </a:xfrm>
+          <a:prstGeom prst="rect">
+            <a:avLst/>
+          </a:prstGeom>
+          <a:noFill/>
+        </p:spPr>
+        <p:txBody>
+          <a:bodyPr wrap="square" anchor="t" lIns="45720" rIns="45720">
+            <a:spAutoFit/>
+          </a:bodyPr>
+          <a:lstStyle/>
+          <a:p>
+            <a:pPr algn="r"/>
+            <a:r>
+              <a:rPr sz="1200" b="0">
+                <a:solidFill>
+                  <a:srgbClr val="AFB8C1"/>
+                </a:solidFill>
+                <a:latin typeface="Hiragino Sans"/>
+              </a:rPr>
+              <a:t>10 / 09</a:t>
+            </a:r>
+          </a:p>
+        </p:txBody>
+      </p:sp>
+    </p:spTree>
+  </p:cSld>
+  <p:clrMapOvr>
+    <a:masterClrMapping/>
+  </p:clrMapOvr>
+</p:sld>
+</file>
+
+<file path=ppt/slides/slide11.xml><?xml version="1.0" encoding="utf-8"?>
+<p:sld xmlns:a="http://schemas.openxmlformats.org/drawingml/2006/main" xmlns:p="http://schemas.openxmlformats.org/presentationml/2006/main" xmlns:r="http://schemas.openxmlformats.org/officeDocument/2006/relationships">
+  <p:cSld>
+    <p:bg>
+      <p:bgPr>
+        <a:solidFill>
+          <a:srgbClr val="0B132B"/>
+        </a:solidFill>
+        <a:effectLst/>
+      </p:bgPr>
+    </p:bg>
+    <p:spTree>
+      <p:nvGrpSpPr>
+        <p:cNvPr id="1" name=""/>
+        <p:cNvGrpSpPr/>
+        <p:nvPr/>
+      </p:nvGrpSpPr>
+      <p:grpSpPr/>
+      <p:sp>
+        <p:nvSpPr>
+          <p:cNvPr id="2" name="TextBox 1"/>
+          <p:cNvSpPr txBox="1"/>
+          <p:nvPr/>
+        </p:nvSpPr>
+        <p:spPr>
+          <a:xfrm>
+            <a:off x="507987" y="507987"/>
+            <a:ext cx="11175720" cy="380990"/>
+          </a:xfrm>
+          <a:prstGeom prst="rect">
+            <a:avLst/>
+          </a:prstGeom>
+          <a:noFill/>
+        </p:spPr>
+        <p:txBody>
+          <a:bodyPr wrap="square" anchor="t" lIns="45720" rIns="45720">
+            <a:spAutoFit/>
+          </a:bodyPr>
+          <a:lstStyle/>
+          <a:p>
+            <a:pPr algn="l"/>
+            <a:r>
+              <a:rPr sz="3000" b="1">
+                <a:solidFill>
+                  <a:srgbClr val="FFFFFF"/>
+                </a:solidFill>
+                <a:latin typeface="Hiragino Sans"/>
+              </a:rPr>
+              <a:t>v3 仕様書 — システム全体像 / 担当 / 使用ツール</a:t>
+            </a:r>
+          </a:p>
+        </p:txBody>
+      </p:sp>
+      <p:pic>
+        <p:nvPicPr>
+          <p:cNvPr id="3" name="Picture 2" descr="s11_arch.png"/>
+          <p:cNvPicPr>
+            <a:picLocks noChangeAspect="1"/>
+          </p:cNvPicPr>
+          <p:nvPr/>
+        </p:nvPicPr>
+        <p:blipFill>
+          <a:blip r:embed="rId2"/>
+          <a:stretch>
+            <a:fillRect/>
+          </a:stretch>
+        </p:blipFill>
+        <p:spPr>
+          <a:xfrm>
+            <a:off x="507987" y="1015974"/>
+            <a:ext cx="7619809" cy="4111408"/>
+          </a:xfrm>
+          <a:prstGeom prst="rect">
+            <a:avLst/>
+          </a:prstGeom>
+        </p:spPr>
+      </p:pic>
+      <p:sp>
+        <p:nvSpPr>
+          <p:cNvPr id="4" name="TextBox 3"/>
+          <p:cNvSpPr txBox="1"/>
+          <p:nvPr/>
+        </p:nvSpPr>
+        <p:spPr>
+          <a:xfrm>
+            <a:off x="507987" y="4825879"/>
+            <a:ext cx="7619809" cy="253993"/>
+          </a:xfrm>
+          <a:prstGeom prst="rect">
+            <a:avLst/>
+          </a:prstGeom>
+          <a:noFill/>
+        </p:spPr>
+        <p:txBody>
+          <a:bodyPr wrap="square" anchor="t" lIns="45720" rIns="45720">
+            <a:spAutoFit/>
+          </a:bodyPr>
+          <a:lstStyle/>
+          <a:p>
+            <a:pPr algn="l"/>
+            <a:r>
+              <a:rPr sz="1600" b="1">
+                <a:solidFill>
+                  <a:srgbClr val="FFC72C"/>
+                </a:solidFill>
+                <a:latin typeface="Hiragino Sans"/>
+              </a:rPr>
+              <a:t>担当 × 使用ツール</a:t>
+            </a:r>
+          </a:p>
+        </p:txBody>
+      </p:sp>
+      <p:sp>
+        <p:nvSpPr>
+          <p:cNvPr id="5" name="TextBox 4"/>
+          <p:cNvSpPr txBox="1"/>
+          <p:nvPr/>
+        </p:nvSpPr>
+        <p:spPr>
+          <a:xfrm>
+            <a:off x="507987" y="5111622"/>
+            <a:ext cx="2222444" cy="253993"/>
+          </a:xfrm>
+          <a:prstGeom prst="rect">
+            <a:avLst/>
+          </a:prstGeom>
+          <a:noFill/>
+        </p:spPr>
+        <p:txBody>
+          <a:bodyPr wrap="square" anchor="t" lIns="45720" rIns="45720">
+            <a:spAutoFit/>
+          </a:bodyPr>
+          <a:lstStyle/>
+          <a:p>
+            <a:pPr algn="l"/>
+            <a:r>
+              <a:rPr sz="1100" b="1">
+                <a:solidFill>
+                  <a:srgbClr val="FFC72C"/>
+                </a:solidFill>
+                <a:latin typeface="Hiragino Sans"/>
+              </a:rPr>
+              <a:t>Shujiさん</a:t>
+            </a:r>
+          </a:p>
+        </p:txBody>
+      </p:sp>
+      <p:sp>
+        <p:nvSpPr>
+          <p:cNvPr id="6" name="TextBox 5"/>
+          <p:cNvSpPr txBox="1"/>
+          <p:nvPr/>
+        </p:nvSpPr>
+        <p:spPr>
+          <a:xfrm>
+            <a:off x="2730431" y="5111622"/>
+            <a:ext cx="2539936" cy="253993"/>
+          </a:xfrm>
+          <a:prstGeom prst="rect">
+            <a:avLst/>
+          </a:prstGeom>
+          <a:noFill/>
+        </p:spPr>
+        <p:txBody>
+          <a:bodyPr wrap="square" anchor="t" lIns="45720" rIns="45720">
+            <a:spAutoFit/>
+          </a:bodyPr>
+          <a:lstStyle/>
+          <a:p>
+            <a:pPr algn="l"/>
+            <a:r>
+              <a:rPr sz="1000" b="0">
+                <a:solidFill>
+                  <a:srgbClr val="FFFFFF"/>
+                </a:solidFill>
+                <a:latin typeface="Hiragino Sans"/>
+              </a:rPr>
+              <a:t>iPhone Safari / Keynote / GitHub</a:t>
+            </a:r>
+          </a:p>
+        </p:txBody>
+      </p:sp>
+      <p:sp>
+        <p:nvSpPr>
+          <p:cNvPr id="7" name="TextBox 6"/>
+          <p:cNvSpPr txBox="1"/>
+          <p:nvPr/>
+        </p:nvSpPr>
+        <p:spPr>
+          <a:xfrm>
+            <a:off x="5270368" y="5111622"/>
+            <a:ext cx="2857428" cy="253993"/>
+          </a:xfrm>
+          <a:prstGeom prst="rect">
+            <a:avLst/>
+          </a:prstGeom>
+          <a:noFill/>
+        </p:spPr>
+        <p:txBody>
+          <a:bodyPr wrap="square" anchor="t" lIns="45720" rIns="45720">
+            <a:spAutoFit/>
+          </a:bodyPr>
+          <a:lstStyle/>
+          <a:p>
+            <a:pPr algn="l"/>
+            <a:r>
+              <a:rPr sz="1000" b="0">
+                <a:solidFill>
+                  <a:srgbClr val="AFB8C1"/>
+                </a:solidFill>
+                <a:latin typeface="Hiragino Sans"/>
+              </a:rPr>
+              <a:t>最終判断 / 仕様変更指示 / pptx確認</a:t>
+            </a:r>
+          </a:p>
+        </p:txBody>
+      </p:sp>
+      <p:sp>
+        <p:nvSpPr>
+          <p:cNvPr id="8" name="TextBox 7"/>
+          <p:cNvSpPr txBox="1"/>
+          <p:nvPr/>
+        </p:nvSpPr>
+        <p:spPr>
+          <a:xfrm>
+            <a:off x="507987" y="5429114"/>
+            <a:ext cx="2222444" cy="253993"/>
+          </a:xfrm>
+          <a:prstGeom prst="rect">
+            <a:avLst/>
+          </a:prstGeom>
+          <a:noFill/>
+        </p:spPr>
+        <p:txBody>
+          <a:bodyPr wrap="square" anchor="t" lIns="45720" rIns="45720">
+            <a:spAutoFit/>
+          </a:bodyPr>
+          <a:lstStyle/>
+          <a:p>
+            <a:pPr algn="l"/>
+            <a:r>
+              <a:rPr sz="1100" b="1">
+                <a:solidFill>
+                  <a:srgbClr val="FFC72C"/>
+                </a:solidFill>
+                <a:latin typeface="Hiragino Sans"/>
+              </a:rPr>
+              <a:t>Claude Code</a:t>
+            </a:r>
+          </a:p>
+        </p:txBody>
+      </p:sp>
+      <p:sp>
+        <p:nvSpPr>
+          <p:cNvPr id="9" name="TextBox 8"/>
+          <p:cNvSpPr txBox="1"/>
+          <p:nvPr/>
+        </p:nvSpPr>
+        <p:spPr>
+          <a:xfrm>
+            <a:off x="2730431" y="5429114"/>
+            <a:ext cx="2539936" cy="253993"/>
+          </a:xfrm>
+          <a:prstGeom prst="rect">
+            <a:avLst/>
+          </a:prstGeom>
+          <a:noFill/>
+        </p:spPr>
+        <p:txBody>
+          <a:bodyPr wrap="square" anchor="t" lIns="45720" rIns="45720">
+            <a:spAutoFit/>
+          </a:bodyPr>
+          <a:lstStyle/>
+          <a:p>
+            <a:pPr algn="l"/>
+            <a:r>
+              <a:rPr sz="1000" b="0">
+                <a:solidFill>
+                  <a:srgbClr val="FFFFFF"/>
+                </a:solidFill>
+                <a:latin typeface="Hiragino Sans"/>
+              </a:rPr>
+              <a:t>Bash / Python / python-pptx / BigQuery / gcloud / git</a:t>
+            </a:r>
+          </a:p>
+        </p:txBody>
+      </p:sp>
+      <p:sp>
+        <p:nvSpPr>
+          <p:cNvPr id="10" name="TextBox 9"/>
+          <p:cNvSpPr txBox="1"/>
+          <p:nvPr/>
+        </p:nvSpPr>
+        <p:spPr>
+          <a:xfrm>
+            <a:off x="5270368" y="5429114"/>
+            <a:ext cx="2857428" cy="253993"/>
+          </a:xfrm>
+          <a:prstGeom prst="rect">
+            <a:avLst/>
+          </a:prstGeom>
+          <a:noFill/>
+        </p:spPr>
+        <p:txBody>
+          <a:bodyPr wrap="square" anchor="t" lIns="45720" rIns="45720">
+            <a:spAutoFit/>
+          </a:bodyPr>
+          <a:lstStyle/>
+          <a:p>
+            <a:pPr algn="l"/>
+            <a:r>
+              <a:rPr sz="1000" b="0">
+                <a:solidFill>
+                  <a:srgbClr val="AFB8C1"/>
+                </a:solidFill>
+                <a:latin typeface="Hiragino Sans"/>
+              </a:rPr>
+              <a:t>実装全般 / BQ DDL / Cloud Run デプロイ / 議事録</a:t>
+            </a:r>
+          </a:p>
+        </p:txBody>
+      </p:sp>
+      <p:sp>
+        <p:nvSpPr>
+          <p:cNvPr id="11" name="TextBox 10"/>
+          <p:cNvSpPr txBox="1"/>
+          <p:nvPr/>
+        </p:nvSpPr>
+        <p:spPr>
+          <a:xfrm>
+            <a:off x="507987" y="5746606"/>
+            <a:ext cx="2222444" cy="253993"/>
+          </a:xfrm>
+          <a:prstGeom prst="rect">
+            <a:avLst/>
+          </a:prstGeom>
+          <a:noFill/>
+        </p:spPr>
+        <p:txBody>
+          <a:bodyPr wrap="square" anchor="t" lIns="45720" rIns="45720">
+            <a:spAutoFit/>
+          </a:bodyPr>
+          <a:lstStyle/>
+          <a:p>
+            <a:pPr algn="l"/>
+            <a:r>
+              <a:rPr sz="1100" b="1">
+                <a:solidFill>
+                  <a:srgbClr val="FFC72C"/>
+                </a:solidFill>
+                <a:latin typeface="Hiragino Sans"/>
+              </a:rPr>
+              <a:t>GPT (ChatGPT Web)</a:t>
+            </a:r>
+          </a:p>
+        </p:txBody>
+      </p:sp>
+      <p:sp>
+        <p:nvSpPr>
+          <p:cNvPr id="12" name="TextBox 11"/>
+          <p:cNvSpPr txBox="1"/>
+          <p:nvPr/>
+        </p:nvSpPr>
+        <p:spPr>
+          <a:xfrm>
+            <a:off x="2730431" y="5746606"/>
+            <a:ext cx="2539936" cy="253993"/>
+          </a:xfrm>
+          <a:prstGeom prst="rect">
+            <a:avLst/>
+          </a:prstGeom>
+          <a:noFill/>
+        </p:spPr>
+        <p:txBody>
+          <a:bodyPr wrap="square" anchor="t" lIns="45720" rIns="45720">
+            <a:spAutoFit/>
+          </a:bodyPr>
+          <a:lstStyle/>
+          <a:p>
+            <a:pPr algn="l"/>
+            <a:r>
+              <a:rPr sz="1000" b="0">
+                <a:solidFill>
+                  <a:srgbClr val="FFFFFF"/>
+                </a:solidFill>
+                <a:latin typeface="Hiragino Sans"/>
+              </a:rPr>
+              <a:t>ChatGPT (gemini-2.0-flashとは別)</a:t>
+            </a:r>
+          </a:p>
+        </p:txBody>
+      </p:sp>
+      <p:sp>
+        <p:nvSpPr>
+          <p:cNvPr id="13" name="TextBox 12"/>
+          <p:cNvSpPr txBox="1"/>
+          <p:nvPr/>
+        </p:nvSpPr>
+        <p:spPr>
+          <a:xfrm>
+            <a:off x="5270368" y="5746606"/>
+            <a:ext cx="2857428" cy="253993"/>
+          </a:xfrm>
+          <a:prstGeom prst="rect">
+            <a:avLst/>
+          </a:prstGeom>
+          <a:noFill/>
+        </p:spPr>
+        <p:txBody>
+          <a:bodyPr wrap="square" anchor="t" lIns="45720" rIns="45720">
+            <a:spAutoFit/>
+          </a:bodyPr>
+          <a:lstStyle/>
+          <a:p>
+            <a:pPr algn="l"/>
+            <a:r>
+              <a:rPr sz="1000" b="0">
+                <a:solidFill>
+                  <a:srgbClr val="AFB8C1"/>
+                </a:solidFill>
+                <a:latin typeface="Hiragino Sans"/>
+              </a:rPr>
+              <a:t>司会 / 戦略統合 / 整合性監査</a:t>
+            </a:r>
+          </a:p>
+        </p:txBody>
+      </p:sp>
+      <p:sp>
+        <p:nvSpPr>
+          <p:cNvPr id="14" name="TextBox 13"/>
+          <p:cNvSpPr txBox="1"/>
+          <p:nvPr/>
+        </p:nvSpPr>
+        <p:spPr>
+          <a:xfrm>
+            <a:off x="507987" y="6064098"/>
+            <a:ext cx="2222444" cy="253993"/>
+          </a:xfrm>
+          <a:prstGeom prst="rect">
+            <a:avLst/>
+          </a:prstGeom>
+          <a:noFill/>
+        </p:spPr>
+        <p:txBody>
+          <a:bodyPr wrap="square" anchor="t" lIns="45720" rIns="45720">
+            <a:spAutoFit/>
+          </a:bodyPr>
+          <a:lstStyle/>
+          <a:p>
+            <a:pPr algn="l"/>
+            <a:r>
+              <a:rPr sz="1100" b="1">
+                <a:solidFill>
+                  <a:srgbClr val="FFC72C"/>
+                </a:solidFill>
+                <a:latin typeface="Hiragino Sans"/>
+              </a:rPr>
+              <a:t>Gemini (Gemini Web + 3.1 Pro Context Cache)</a:t>
+            </a:r>
+          </a:p>
+        </p:txBody>
+      </p:sp>
+      <p:sp>
+        <p:nvSpPr>
+          <p:cNvPr id="15" name="TextBox 14"/>
+          <p:cNvSpPr txBox="1"/>
+          <p:nvPr/>
+        </p:nvSpPr>
+        <p:spPr>
+          <a:xfrm>
+            <a:off x="2730431" y="6064098"/>
+            <a:ext cx="2539936" cy="253993"/>
+          </a:xfrm>
+          <a:prstGeom prst="rect">
+            <a:avLst/>
+          </a:prstGeom>
+          <a:noFill/>
+        </p:spPr>
+        <p:txBody>
+          <a:bodyPr wrap="square" anchor="t" lIns="45720" rIns="45720">
+            <a:spAutoFit/>
+          </a:bodyPr>
+          <a:lstStyle/>
+          <a:p>
+            <a:pPr algn="l"/>
+            <a:r>
+              <a:rPr sz="1000" b="0">
+                <a:solidFill>
+                  <a:srgbClr val="FFFFFF"/>
+                </a:solidFill>
+                <a:latin typeface="Hiragino Sans"/>
+              </a:rPr>
+              <a:t>Gemini Web (常駐LLM) / Imagen 3</a:t>
+            </a:r>
+          </a:p>
+        </p:txBody>
+      </p:sp>
+      <p:sp>
+        <p:nvSpPr>
+          <p:cNvPr id="16" name="TextBox 15"/>
+          <p:cNvSpPr txBox="1"/>
+          <p:nvPr/>
+        </p:nvSpPr>
+        <p:spPr>
+          <a:xfrm>
+            <a:off x="5270368" y="6064098"/>
+            <a:ext cx="2857428" cy="253993"/>
+          </a:xfrm>
+          <a:prstGeom prst="rect">
+            <a:avLst/>
+          </a:prstGeom>
+          <a:noFill/>
+        </p:spPr>
+        <p:txBody>
+          <a:bodyPr wrap="square" anchor="t" lIns="45720" rIns="45720">
+            <a:spAutoFit/>
+          </a:bodyPr>
+          <a:lstStyle/>
+          <a:p>
+            <a:pPr algn="l"/>
+            <a:r>
+              <a:rPr sz="1000" b="0">
+                <a:solidFill>
+                  <a:srgbClr val="AFB8C1"/>
+                </a:solidFill>
+                <a:latin typeface="Hiragino Sans"/>
+              </a:rPr>
+              <a:t>監査 / Slow Brain本番運用 / ビジュアル設計</a:t>
+            </a:r>
+          </a:p>
+        </p:txBody>
+      </p:sp>
+      <p:sp>
+        <p:nvSpPr>
+          <p:cNvPr id="17" name="Rounded Rectangle 16"/>
+          <p:cNvSpPr/>
+          <p:nvPr/>
+        </p:nvSpPr>
+        <p:spPr>
+          <a:xfrm>
+            <a:off x="8381790" y="1015974"/>
+            <a:ext cx="3428914" cy="5524361"/>
+          </a:xfrm>
+          <a:prstGeom prst="roundRect">
+            <a:avLst/>
+          </a:prstGeom>
+          <a:solidFill>
+            <a:srgbClr val="252E42"/>
+          </a:solidFill>
+          <a:ln w="12700">
+            <a:solidFill>
+              <a:srgbClr val="FFC72C"/>
+            </a:solidFill>
+          </a:ln>
+          <a:effectLst/>
+        </p:spPr>
+        <p:style>
+          <a:lnRef idx="1">
+            <a:schemeClr val="accent1"/>
+          </a:lnRef>
+          <a:fillRef idx="3">
+            <a:schemeClr val="accent1"/>
+          </a:fillRef>
+          <a:effectRef idx="2">
+            <a:schemeClr val="accent1"/>
+          </a:effectRef>
+          <a:fontRef idx="minor">
+            <a:schemeClr val="lt1"/>
+          </a:fontRef>
+        </p:style>
+        <p:txBody>
+          <a:bodyPr rtlCol="0" anchor="ctr"/>
+          <a:lstStyle/>
+          <a:p>
+            <a:pPr algn="ctr"/>
+          </a:p>
+        </p:txBody>
+      </p:sp>
+      <p:sp>
+        <p:nvSpPr>
+          <p:cNvPr id="18" name="TextBox 17"/>
+          <p:cNvSpPr txBox="1"/>
+          <p:nvPr/>
+        </p:nvSpPr>
+        <p:spPr>
+          <a:xfrm>
+            <a:off x="8508787" y="1111222"/>
+            <a:ext cx="3174920" cy="285742"/>
+          </a:xfrm>
+          <a:prstGeom prst="rect">
+            <a:avLst/>
+          </a:prstGeom>
+          <a:noFill/>
+        </p:spPr>
+        <p:txBody>
+          <a:bodyPr wrap="square" anchor="t" lIns="45720" rIns="45720">
+            <a:spAutoFit/>
+          </a:bodyPr>
+          <a:lstStyle/>
+          <a:p>
+            <a:pPr algn="l"/>
+            <a:r>
+              <a:rPr sz="1800" b="1">
+                <a:solidFill>
+                  <a:srgbClr val="FFC72C"/>
+                </a:solidFill>
+                <a:latin typeface="Hiragino Sans"/>
+              </a:rPr>
+              <a:t>用語辞書</a:t>
+            </a:r>
+          </a:p>
+        </p:txBody>
+      </p:sp>
+      <p:sp>
+        <p:nvSpPr>
+          <p:cNvPr id="19" name="TextBox 18"/>
+          <p:cNvSpPr txBox="1"/>
+          <p:nvPr/>
+        </p:nvSpPr>
+        <p:spPr>
+          <a:xfrm>
+            <a:off x="8508787" y="1428714"/>
+            <a:ext cx="3174920" cy="5016374"/>
+          </a:xfrm>
+          <a:prstGeom prst="rect">
+            <a:avLst/>
+          </a:prstGeom>
+          <a:noFill/>
+        </p:spPr>
+        <p:txBody>
+          <a:bodyPr wrap="square" lIns="45720" rIns="45720">
+            <a:spAutoFit/>
+          </a:bodyPr>
+          <a:lstStyle/>
+          <a:p>
+            <a:pPr algn="l">
+              <a:lnSpc>
+                <a:spcPct val="120000"/>
+              </a:lnSpc>
+            </a:pPr>
+            <a:r>
+              <a:rPr sz="1300" b="1">
+                <a:solidFill>
+                  <a:srgbClr val="FFC72C"/>
+                </a:solidFill>
+                <a:latin typeface="Hiragino Sans"/>
+              </a:rPr>
+              <a:t>BigQuery (BQ)</a:t>
+            </a:r>
+          </a:p>
+          <a:p>
+            <a:pPr algn="l">
+              <a:lnSpc>
+                <a:spcPct val="120000"/>
+              </a:lnSpc>
+            </a:pPr>
+            <a:r>
+              <a:rPr sz="1100" b="0">
+                <a:solidFill>
+                  <a:srgbClr val="FFFFFF"/>
+                </a:solidFill>
+                <a:latin typeface="Hiragino Sans"/>
+              </a:rPr>
+              <a:t>Google大規模データウェアハウス。1TiB free tier。</a:t>
+            </a:r>
+          </a:p>
+          <a:p>
+            <a:pPr algn="l">
+              <a:lnSpc>
+                <a:spcPct val="120000"/>
+              </a:lnSpc>
+            </a:pPr>
+            <a:r>
+              <a:rPr sz="1300" b="1">
+                <a:solidFill>
+                  <a:srgbClr val="FFC72C"/>
+                </a:solidFill>
+                <a:latin typeface="Hiragino Sans"/>
+              </a:rPr>
+              <a:t>Context Cache</a:t>
+            </a:r>
+          </a:p>
+          <a:p>
+            <a:pPr algn="l">
+              <a:lnSpc>
+                <a:spcPct val="120000"/>
+              </a:lnSpc>
+            </a:pPr>
+            <a:r>
+              <a:rPr sz="1100" b="0">
+                <a:solidFill>
+                  <a:srgbClr val="FFFFFF"/>
+                </a:solidFill>
+                <a:latin typeface="Hiragino Sans"/>
+              </a:rPr>
+              <a:t>Gemini API のトークン常駐機能。 通常入力の1/4料金。</a:t>
+            </a:r>
+          </a:p>
+          <a:p>
+            <a:pPr algn="l">
+              <a:lnSpc>
+                <a:spcPct val="120000"/>
+              </a:lnSpc>
+            </a:pPr>
+            <a:r>
+              <a:rPr sz="1300" b="1">
+                <a:solidFill>
+                  <a:srgbClr val="FFC72C"/>
+                </a:solidFill>
+                <a:latin typeface="Hiragino Sans"/>
+              </a:rPr>
+              <a:t>Cloud Run</a:t>
+            </a:r>
+          </a:p>
+          <a:p>
+            <a:pPr algn="l">
+              <a:lnSpc>
+                <a:spcPct val="120000"/>
+              </a:lnSpc>
+            </a:pPr>
+            <a:r>
+              <a:rPr sz="1100" b="0">
+                <a:solidFill>
+                  <a:srgbClr val="FFFFFF"/>
+                </a:solidFill>
+                <a:latin typeface="Hiragino Sans"/>
+              </a:rPr>
+              <a:t>GCPのステートレスコンテナ実行サービス。 e2-microは無料tier。</a:t>
+            </a:r>
+          </a:p>
+          <a:p>
+            <a:pPr algn="l">
+              <a:lnSpc>
+                <a:spcPct val="120000"/>
+              </a:lnSpc>
+            </a:pPr>
+            <a:r>
+              <a:rPr sz="1300" b="1">
+                <a:solidFill>
+                  <a:srgbClr val="FFC72C"/>
+                </a:solidFill>
+                <a:latin typeface="Hiragino Sans"/>
+              </a:rPr>
+              <a:t>Slow Brain</a:t>
+            </a:r>
+          </a:p>
+          <a:p>
+            <a:pPr algn="l">
+              <a:lnSpc>
+                <a:spcPct val="120000"/>
+              </a:lnSpc>
+            </a:pPr>
+            <a:r>
+              <a:rPr sz="1100" b="0">
+                <a:solidFill>
+                  <a:srgbClr val="FFFFFF"/>
+                </a:solidFill>
+                <a:latin typeface="Hiragino Sans"/>
+              </a:rPr>
+              <a:t>15分間隔で戦略 (スタンスJSON) を出力する 「頭脳」 ノード。 Gemini 3.1 Pro Context Cache。</a:t>
+            </a:r>
+          </a:p>
+          <a:p>
+            <a:pPr algn="l">
+              <a:lnSpc>
+                <a:spcPct val="120000"/>
+              </a:lnSpc>
+            </a:pPr>
+            <a:r>
+              <a:rPr sz="1300" b="1">
+                <a:solidFill>
+                  <a:srgbClr val="FFC72C"/>
+                </a:solidFill>
+                <a:latin typeface="Hiragino Sans"/>
+              </a:rPr>
+              <a:t>Risk Engine</a:t>
+            </a:r>
+          </a:p>
+          <a:p>
+            <a:pPr algn="l">
+              <a:lnSpc>
+                <a:spcPct val="120000"/>
+              </a:lnSpc>
+            </a:pPr>
+            <a:r>
+              <a:rPr sz="1100" b="0">
+                <a:solidFill>
+                  <a:srgbClr val="FFFFFF"/>
+                </a:solidFill>
+                <a:latin typeface="Hiragino Sans"/>
+              </a:rPr>
+              <a:t>発注前に静的ルールで危険注文を止める検問所。</a:t>
+            </a:r>
+          </a:p>
+          <a:p>
+            <a:pPr algn="l">
+              <a:lnSpc>
+                <a:spcPct val="120000"/>
+              </a:lnSpc>
+            </a:pPr>
+            <a:r>
+              <a:rPr sz="1300" b="1">
+                <a:solidFill>
+                  <a:srgbClr val="FFC72C"/>
+                </a:solidFill>
+                <a:latin typeface="Hiragino Sans"/>
+              </a:rPr>
+              <a:t>Fast Guard</a:t>
+            </a:r>
+          </a:p>
+          <a:p>
+            <a:pPr algn="l">
+              <a:lnSpc>
+                <a:spcPct val="120000"/>
+              </a:lnSpc>
+            </a:pPr>
+            <a:r>
+              <a:rPr sz="1100" b="0">
+                <a:solidFill>
+                  <a:srgbClr val="FFFFFF"/>
+                </a:solidFill>
+                <a:latin typeface="Hiragino Sans"/>
+              </a:rPr>
+              <a:t>ms単位で異常を検知し、 ブレーキのみ独自判断するルールベース層。</a:t>
+            </a:r>
+          </a:p>
+          <a:p>
+            <a:pPr algn="l">
+              <a:lnSpc>
+                <a:spcPct val="120000"/>
+              </a:lnSpc>
+            </a:pPr>
+            <a:r>
+              <a:rPr sz="1300" b="1">
+                <a:solidFill>
+                  <a:srgbClr val="FFC72C"/>
+                </a:solidFill>
+                <a:latin typeface="Hiragino Sans"/>
+              </a:rPr>
+              <a:t>Order Gate</a:t>
+            </a:r>
+          </a:p>
+          <a:p>
+            <a:pPr algn="l">
+              <a:lnSpc>
+                <a:spcPct val="120000"/>
+              </a:lnSpc>
+            </a:pPr>
+            <a:r>
+              <a:rPr sz="1100" b="0">
+                <a:solidFill>
+                  <a:srgbClr val="FFFFFF"/>
+                </a:solidFill>
+                <a:latin typeface="Hiragino Sans"/>
+              </a:rPr>
+              <a:t>注文前 6ステップ最終検問。 SL/レバ/流動性/コスト/類似Pattern/Explainability。</a:t>
+            </a:r>
+          </a:p>
+          <a:p>
+            <a:pPr algn="l">
+              <a:lnSpc>
+                <a:spcPct val="120000"/>
+              </a:lnSpc>
+            </a:pPr>
+            <a:r>
+              <a:rPr sz="1300" b="1">
+                <a:solidFill>
+                  <a:srgbClr val="FFC72C"/>
+                </a:solidFill>
+                <a:latin typeface="Hiragino Sans"/>
+              </a:rPr>
+              <a:t>OHLCV</a:t>
+            </a:r>
+          </a:p>
+          <a:p>
+            <a:pPr algn="l">
+              <a:lnSpc>
+                <a:spcPct val="120000"/>
+              </a:lnSpc>
+            </a:pPr>
+            <a:r>
+              <a:rPr sz="1100" b="0">
+                <a:solidFill>
+                  <a:srgbClr val="FFFFFF"/>
+                </a:solidFill>
+                <a:latin typeface="Hiragino Sans"/>
+              </a:rPr>
+              <a:t>Open/High/Low/Close/Volume。 ローソク足の基本データ。</a:t>
+            </a:r>
+          </a:p>
+          <a:p>
+            <a:pPr algn="l">
+              <a:lnSpc>
+                <a:spcPct val="120000"/>
+              </a:lnSpc>
+            </a:pPr>
+            <a:r>
+              <a:rPr sz="1300" b="1">
+                <a:solidFill>
+                  <a:srgbClr val="FFC72C"/>
+                </a:solidFill>
+                <a:latin typeface="Hiragino Sans"/>
+              </a:rPr>
+              <a:t>OI</a:t>
+            </a:r>
+          </a:p>
+          <a:p>
+            <a:pPr algn="l">
+              <a:lnSpc>
+                <a:spcPct val="120000"/>
+              </a:lnSpc>
+            </a:pPr>
+            <a:r>
+              <a:rPr sz="1100" b="0">
+                <a:solidFill>
+                  <a:srgbClr val="FFFFFF"/>
+                </a:solidFill>
+                <a:latin typeface="Hiragino Sans"/>
+              </a:rPr>
+              <a:t>Open Interest。 未決済建玉。</a:t>
+            </a:r>
+          </a:p>
+          <a:p>
+            <a:pPr algn="l">
+              <a:lnSpc>
+                <a:spcPct val="120000"/>
+              </a:lnSpc>
+            </a:pPr>
+            <a:r>
+              <a:rPr sz="1300" b="1">
+                <a:solidFill>
+                  <a:srgbClr val="FFC72C"/>
+                </a:solidFill>
+                <a:latin typeface="Hiragino Sans"/>
+              </a:rPr>
+              <a:t>FR</a:t>
+            </a:r>
+          </a:p>
+          <a:p>
+            <a:pPr algn="l">
+              <a:lnSpc>
+                <a:spcPct val="120000"/>
+              </a:lnSpc>
+            </a:pPr>
+            <a:r>
+              <a:rPr sz="1100" b="0">
+                <a:solidFill>
+                  <a:srgbClr val="FFFFFF"/>
+                </a:solidFill>
+                <a:latin typeface="Hiragino Sans"/>
+              </a:rPr>
+              <a:t>Funding Rate。 永久先物の資金調達率。</a:t>
+            </a:r>
+          </a:p>
+          <a:p>
+            <a:pPr algn="l">
+              <a:lnSpc>
+                <a:spcPct val="120000"/>
+              </a:lnSpc>
+            </a:pPr>
+            <a:r>
+              <a:rPr sz="1300" b="1">
+                <a:solidFill>
+                  <a:srgbClr val="FFC72C"/>
+                </a:solidFill>
+                <a:latin typeface="Hiragino Sans"/>
+              </a:rPr>
+              <a:t>LS比</a:t>
+            </a:r>
+          </a:p>
+          <a:p>
+            <a:pPr algn="l">
+              <a:lnSpc>
+                <a:spcPct val="120000"/>
+              </a:lnSpc>
+            </a:pPr>
+            <a:r>
+              <a:rPr sz="1100" b="0">
+                <a:solidFill>
+                  <a:srgbClr val="FFFFFF"/>
+                </a:solidFill>
+                <a:latin typeface="Hiragino Sans"/>
+              </a:rPr>
+              <a:t>Long/Short ratio。 ポジション偏り指標。</a:t>
+            </a:r>
+          </a:p>
+          <a:p>
+            <a:pPr algn="l">
+              <a:lnSpc>
+                <a:spcPct val="120000"/>
+              </a:lnSpc>
+            </a:pPr>
+            <a:r>
+              <a:rPr sz="1300" b="1">
+                <a:solidFill>
+                  <a:srgbClr val="FFC72C"/>
+                </a:solidFill>
+                <a:latin typeface="Hiragino Sans"/>
+              </a:rPr>
+              <a:t>Imagen 3</a:t>
+            </a:r>
+          </a:p>
+          <a:p>
+            <a:pPr algn="l">
+              <a:lnSpc>
+                <a:spcPct val="120000"/>
+              </a:lnSpc>
+            </a:pPr>
+            <a:r>
+              <a:rPr sz="1100" b="0">
+                <a:solidFill>
+                  <a:srgbClr val="FFFFFF"/>
+                </a:solidFill>
+                <a:latin typeface="Hiragino Sans"/>
+              </a:rPr>
+              <a:t>Google画像生成AI (Geminiパイプライン)。</a:t>
+            </a:r>
+          </a:p>
+        </p:txBody>
+      </p:sp>
+      <p:sp>
+        <p:nvSpPr>
+          <p:cNvPr id="20" name="TextBox 19"/>
+          <p:cNvSpPr txBox="1"/>
+          <p:nvPr/>
+        </p:nvSpPr>
+        <p:spPr>
+          <a:xfrm>
+            <a:off x="507987" y="6476838"/>
+            <a:ext cx="5079873" cy="253993"/>
+          </a:xfrm>
+          <a:prstGeom prst="rect">
+            <a:avLst/>
+          </a:prstGeom>
+          <a:noFill/>
+        </p:spPr>
+        <p:txBody>
+          <a:bodyPr wrap="square" anchor="t" lIns="45720" rIns="45720">
+            <a:spAutoFit/>
+          </a:bodyPr>
+          <a:lstStyle/>
+          <a:p>
+            <a:pPr algn="l"/>
+            <a:r>
+              <a:rPr sz="1200" b="0">
+                <a:solidFill>
+                  <a:srgbClr val="AFB8C1"/>
+                </a:solidFill>
+                <a:latin typeface="Hiragino Sans"/>
+              </a:rPr>
+              <a:t>Project danjer-GAIA</a:t>
+            </a:r>
+          </a:p>
+        </p:txBody>
+      </p:sp>
+      <p:sp>
+        <p:nvSpPr>
+          <p:cNvPr id="21" name="TextBox 20"/>
+          <p:cNvSpPr txBox="1"/>
+          <p:nvPr/>
+        </p:nvSpPr>
+        <p:spPr>
+          <a:xfrm>
+            <a:off x="10794730" y="6476838"/>
+            <a:ext cx="888977" cy="253993"/>
+          </a:xfrm>
+          <a:prstGeom prst="rect">
+            <a:avLst/>
+          </a:prstGeom>
+          <a:noFill/>
+        </p:spPr>
+        <p:txBody>
+          <a:bodyPr wrap="square" anchor="t" lIns="45720" rIns="45720">
+            <a:spAutoFit/>
+          </a:bodyPr>
+          <a:lstStyle/>
+          <a:p>
+            <a:pPr algn="r"/>
+            <a:r>
+              <a:rPr sz="1200" b="0">
+                <a:solidFill>
+                  <a:srgbClr val="AFB8C1"/>
+                </a:solidFill>
+                <a:latin typeface="Hiragino Sans"/>
+              </a:rPr>
+              <a:t>11 / 09</a:t>
+            </a:r>
+          </a:p>
+        </p:txBody>
+      </p:sp>
+    </p:spTree>
+  </p:cSld>
+  <p:clrMapOvr>
+    <a:masterClrMapping/>
+  </p:clrMapOvr>
+</p:sld>
+</file>
+
+<file path=ppt/slides/slide12.xml><?xml version="1.0" encoding="utf-8"?>
+<p:sld xmlns:a="http://schemas.openxmlformats.org/drawingml/2006/main" xmlns:p="http://schemas.openxmlformats.org/presentationml/2006/main" xmlns:r="http://schemas.openxmlformats.org/officeDocument/2006/relationships">
+  <p:cSld>
+    <p:bg>
+      <p:bgPr>
+        <a:solidFill>
+          <a:srgbClr val="0B132B"/>
+        </a:solidFill>
+        <a:effectLst/>
+      </p:bgPr>
+    </p:bg>
+    <p:spTree>
+      <p:nvGrpSpPr>
+        <p:cNvPr id="1" name=""/>
+        <p:cNvGrpSpPr/>
+        <p:nvPr/>
+      </p:nvGrpSpPr>
+      <p:grpSpPr/>
+      <p:sp>
+        <p:nvSpPr>
+          <p:cNvPr id="2" name="TextBox 1"/>
+          <p:cNvSpPr txBox="1"/>
+          <p:nvPr/>
+        </p:nvSpPr>
+        <p:spPr>
+          <a:xfrm>
+            <a:off x="507987" y="507987"/>
+            <a:ext cx="11175720" cy="380990"/>
+          </a:xfrm>
+          <a:prstGeom prst="rect">
+            <a:avLst/>
+          </a:prstGeom>
+          <a:noFill/>
+        </p:spPr>
+        <p:txBody>
+          <a:bodyPr wrap="square" anchor="t" lIns="45720" rIns="45720">
+            <a:spAutoFit/>
+          </a:bodyPr>
+          <a:lstStyle/>
+          <a:p>
+            <a:pPr algn="l"/>
+            <a:r>
+              <a:rPr sz="3200" b="1">
+                <a:solidFill>
+                  <a:srgbClr val="FFFFFF"/>
+                </a:solidFill>
+                <a:latin typeface="Hiragino Sans"/>
+              </a:rPr>
+              <a:t>コスト見積り明細 — 固定費 / 変動費</a:t>
+            </a:r>
+          </a:p>
+        </p:txBody>
+      </p:sp>
+      <p:sp>
+        <p:nvSpPr>
+          <p:cNvPr id="3" name="TextBox 2"/>
+          <p:cNvSpPr txBox="1"/>
+          <p:nvPr/>
+        </p:nvSpPr>
+        <p:spPr>
+          <a:xfrm>
+            <a:off x="507987" y="952476"/>
+            <a:ext cx="7619809" cy="253993"/>
+          </a:xfrm>
+          <a:prstGeom prst="rect">
+            <a:avLst/>
+          </a:prstGeom>
+          <a:noFill/>
+        </p:spPr>
+        <p:txBody>
+          <a:bodyPr wrap="square" anchor="t" lIns="45720" rIns="45720">
+            <a:spAutoFit/>
+          </a:bodyPr>
+          <a:lstStyle/>
+          <a:p>
+            <a:pPr algn="l"/>
+            <a:r>
+              <a:rPr sz="1400" b="0">
+                <a:solidFill>
+                  <a:srgbClr val="AFB8C1"/>
+                </a:solidFill>
+                <a:latin typeface="Hiragino Sans"/>
+              </a:rPr>
+              <a:t>Phase 1-2 POC段階 / Phase 3-5 拡大時 で 2フェーズ提示</a:t>
+            </a:r>
+          </a:p>
+        </p:txBody>
+      </p:sp>
+      <p:sp>
+        <p:nvSpPr>
+          <p:cNvPr id="4" name="TextBox 3"/>
+          <p:cNvSpPr txBox="1"/>
+          <p:nvPr/>
+        </p:nvSpPr>
+        <p:spPr>
+          <a:xfrm>
+            <a:off x="507987" y="1269968"/>
+            <a:ext cx="3809904" cy="253993"/>
+          </a:xfrm>
+          <a:prstGeom prst="rect">
+            <a:avLst/>
+          </a:prstGeom>
+          <a:noFill/>
+        </p:spPr>
+        <p:txBody>
+          <a:bodyPr wrap="square" anchor="t" lIns="45720" rIns="45720">
+            <a:spAutoFit/>
+          </a:bodyPr>
+          <a:lstStyle/>
+          <a:p>
+            <a:pPr algn="l"/>
+            <a:r>
+              <a:rPr sz="1600" b="1">
+                <a:solidFill>
+                  <a:srgbClr val="FFC72C"/>
+                </a:solidFill>
+                <a:latin typeface="Hiragino Sans"/>
+              </a:rPr>
+              <a:t>【固定費】(毎月発生、 利用量に依らず)</a:t>
+            </a:r>
+          </a:p>
+        </p:txBody>
+      </p:sp>
+      <p:sp>
+        <p:nvSpPr>
+          <p:cNvPr id="5" name="Rounded Rectangle 4"/>
+          <p:cNvSpPr/>
+          <p:nvPr/>
+        </p:nvSpPr>
+        <p:spPr>
+          <a:xfrm>
+            <a:off x="507987" y="1555711"/>
+            <a:ext cx="7619809" cy="228594"/>
+          </a:xfrm>
+          <a:prstGeom prst="roundRect">
+            <a:avLst/>
+          </a:prstGeom>
+          <a:solidFill>
+            <a:srgbClr val="252E42"/>
+          </a:solidFill>
+          <a:ln w="12700">
+            <a:solidFill>
+              <a:srgbClr val="FFC72C"/>
+            </a:solidFill>
+          </a:ln>
+          <a:effectLst/>
+        </p:spPr>
+        <p:style>
+          <a:lnRef idx="1">
+            <a:schemeClr val="accent1"/>
+          </a:lnRef>
+          <a:fillRef idx="3">
+            <a:schemeClr val="accent1"/>
+          </a:fillRef>
+          <a:effectRef idx="2">
+            <a:schemeClr val="accent1"/>
+          </a:effectRef>
+          <a:fontRef idx="minor">
+            <a:schemeClr val="lt1"/>
+          </a:fontRef>
+        </p:style>
+        <p:txBody>
+          <a:bodyPr rtlCol="0" anchor="ctr"/>
+          <a:lstStyle/>
+          <a:p>
+            <a:pPr algn="ctr"/>
+          </a:p>
+        </p:txBody>
+      </p:sp>
+      <p:sp>
+        <p:nvSpPr>
+          <p:cNvPr id="6" name="TextBox 5"/>
+          <p:cNvSpPr txBox="1"/>
+          <p:nvPr/>
+        </p:nvSpPr>
+        <p:spPr>
+          <a:xfrm>
+            <a:off x="571485" y="1581110"/>
+            <a:ext cx="1904952" cy="177795"/>
+          </a:xfrm>
+          <a:prstGeom prst="rect">
+            <a:avLst/>
+          </a:prstGeom>
+          <a:noFill/>
+        </p:spPr>
+        <p:txBody>
+          <a:bodyPr wrap="square" anchor="t" lIns="45720" rIns="45720">
+            <a:spAutoFit/>
+          </a:bodyPr>
+          <a:lstStyle/>
+          <a:p>
+            <a:pPr algn="l"/>
+            <a:r>
+              <a:rPr sz="1200" b="1">
+                <a:solidFill>
+                  <a:srgbClr val="FFC72C"/>
+                </a:solidFill>
+                <a:latin typeface="Hiragino Sans"/>
+              </a:rPr>
+              <a:t>サービス</a:t>
+            </a:r>
+          </a:p>
+        </p:txBody>
+      </p:sp>
+      <p:sp>
+        <p:nvSpPr>
+          <p:cNvPr id="7" name="TextBox 6"/>
+          <p:cNvSpPr txBox="1"/>
+          <p:nvPr/>
+        </p:nvSpPr>
+        <p:spPr>
+          <a:xfrm>
+            <a:off x="2539936" y="1581110"/>
+            <a:ext cx="1269968" cy="177795"/>
+          </a:xfrm>
+          <a:prstGeom prst="rect">
+            <a:avLst/>
+          </a:prstGeom>
+          <a:noFill/>
+        </p:spPr>
+        <p:txBody>
+          <a:bodyPr wrap="square" anchor="t" lIns="45720" rIns="45720">
+            <a:spAutoFit/>
+          </a:bodyPr>
+          <a:lstStyle/>
+          <a:p>
+            <a:pPr algn="l"/>
+            <a:r>
+              <a:rPr sz="1200" b="1">
+                <a:solidFill>
+                  <a:srgbClr val="FFC72C"/>
+                </a:solidFill>
+                <a:latin typeface="Hiragino Sans"/>
+              </a:rPr>
+              <a:t>月額</a:t>
+            </a:r>
+          </a:p>
+        </p:txBody>
+      </p:sp>
+      <p:sp>
+        <p:nvSpPr>
+          <p:cNvPr id="8" name="TextBox 7"/>
+          <p:cNvSpPr txBox="1"/>
+          <p:nvPr/>
+        </p:nvSpPr>
+        <p:spPr>
+          <a:xfrm>
+            <a:off x="3873403" y="1581110"/>
+            <a:ext cx="4190895" cy="177795"/>
+          </a:xfrm>
+          <a:prstGeom prst="rect">
+            <a:avLst/>
+          </a:prstGeom>
+          <a:noFill/>
+        </p:spPr>
+        <p:txBody>
+          <a:bodyPr wrap="square" anchor="t" lIns="45720" rIns="45720">
+            <a:spAutoFit/>
+          </a:bodyPr>
+          <a:lstStyle/>
+          <a:p>
+            <a:pPr algn="l"/>
+            <a:r>
+              <a:rPr sz="1200" b="1">
+                <a:solidFill>
+                  <a:srgbClr val="FFC72C"/>
+                </a:solidFill>
+                <a:latin typeface="Hiragino Sans"/>
+              </a:rPr>
+              <a:t>内訳</a:t>
+            </a:r>
+          </a:p>
+        </p:txBody>
+      </p:sp>
+      <p:sp>
+        <p:nvSpPr>
+          <p:cNvPr id="9" name="Rounded Rectangle 8"/>
+          <p:cNvSpPr/>
+          <p:nvPr/>
+        </p:nvSpPr>
+        <p:spPr>
+          <a:xfrm>
+            <a:off x="507987" y="1809704"/>
+            <a:ext cx="7619809" cy="203194"/>
+          </a:xfrm>
+          <a:prstGeom prst="roundRect">
+            <a:avLst/>
+          </a:prstGeom>
+          <a:solidFill>
+            <a:srgbClr val="252E42"/>
+          </a:solidFill>
+          <a:ln>
+            <a:noFill/>
+          </a:ln>
+          <a:effectLst/>
+        </p:spPr>
+        <p:style>
+          <a:lnRef idx="1">
+            <a:schemeClr val="accent1"/>
+          </a:lnRef>
+          <a:fillRef idx="3">
+            <a:schemeClr val="accent1"/>
+          </a:fillRef>
+          <a:effectRef idx="2">
+            <a:schemeClr val="accent1"/>
+          </a:effectRef>
+          <a:fontRef idx="minor">
+            <a:schemeClr val="lt1"/>
+          </a:fontRef>
+        </p:style>
+        <p:txBody>
+          <a:bodyPr rtlCol="0" anchor="ctr"/>
+          <a:lstStyle/>
+          <a:p>
+            <a:pPr algn="ctr"/>
+          </a:p>
+        </p:txBody>
+      </p:sp>
+      <p:sp>
+        <p:nvSpPr>
+          <p:cNvPr id="10" name="TextBox 9"/>
+          <p:cNvSpPr txBox="1"/>
+          <p:nvPr/>
+        </p:nvSpPr>
+        <p:spPr>
+          <a:xfrm>
+            <a:off x="571485" y="1822404"/>
+            <a:ext cx="1904952" cy="177795"/>
+          </a:xfrm>
+          <a:prstGeom prst="rect">
+            <a:avLst/>
+          </a:prstGeom>
+          <a:noFill/>
+        </p:spPr>
+        <p:txBody>
+          <a:bodyPr wrap="square" anchor="t" lIns="45720" rIns="45720">
+            <a:spAutoFit/>
+          </a:bodyPr>
+          <a:lstStyle/>
+          <a:p>
+            <a:pPr algn="l"/>
+            <a:r>
+              <a:rPr sz="1100" b="1">
+                <a:solidFill>
+                  <a:srgbClr val="FFFFFF"/>
+                </a:solidFill>
+                <a:latin typeface="Hiragino Sans"/>
+              </a:rPr>
+              <a:t>GitHub</a:t>
+            </a:r>
+          </a:p>
+        </p:txBody>
+      </p:sp>
+      <p:sp>
+        <p:nvSpPr>
+          <p:cNvPr id="11" name="TextBox 10"/>
+          <p:cNvSpPr txBox="1"/>
+          <p:nvPr/>
+        </p:nvSpPr>
+        <p:spPr>
+          <a:xfrm>
+            <a:off x="2539936" y="1822404"/>
+            <a:ext cx="1269968" cy="177795"/>
+          </a:xfrm>
+          <a:prstGeom prst="rect">
+            <a:avLst/>
+          </a:prstGeom>
+          <a:noFill/>
+        </p:spPr>
+        <p:txBody>
+          <a:bodyPr wrap="square" anchor="t" lIns="45720" rIns="45720">
+            <a:spAutoFit/>
+          </a:bodyPr>
+          <a:lstStyle/>
+          <a:p>
+            <a:pPr algn="l"/>
+            <a:r>
+              <a:rPr sz="1100" b="0">
+                <a:solidFill>
+                  <a:srgbClr val="FFC72C"/>
+                </a:solidFill>
+                <a:latin typeface="Hiragino Sans"/>
+              </a:rPr>
+              <a:t>無料</a:t>
+            </a:r>
+          </a:p>
+        </p:txBody>
+      </p:sp>
+      <p:sp>
+        <p:nvSpPr>
+          <p:cNvPr id="12" name="TextBox 11"/>
+          <p:cNvSpPr txBox="1"/>
+          <p:nvPr/>
+        </p:nvSpPr>
+        <p:spPr>
+          <a:xfrm>
+            <a:off x="3873403" y="1822404"/>
+            <a:ext cx="4190895" cy="177795"/>
+          </a:xfrm>
+          <a:prstGeom prst="rect">
+            <a:avLst/>
+          </a:prstGeom>
+          <a:noFill/>
+        </p:spPr>
+        <p:txBody>
+          <a:bodyPr wrap="square" anchor="t" lIns="45720" rIns="45720">
+            <a:spAutoFit/>
+          </a:bodyPr>
+          <a:lstStyle/>
+          <a:p>
+            <a:pPr algn="l"/>
+            <a:r>
+              <a:rPr sz="1000" b="0">
+                <a:solidFill>
+                  <a:srgbClr val="AFB8C1"/>
+                </a:solidFill>
+                <a:latin typeface="Hiragino Sans"/>
+              </a:rPr>
+              <a:t>議事録/コード/pptx ホスト</a:t>
+            </a:r>
+          </a:p>
+        </p:txBody>
+      </p:sp>
+      <p:sp>
+        <p:nvSpPr>
+          <p:cNvPr id="13" name="Rounded Rectangle 12"/>
+          <p:cNvSpPr/>
+          <p:nvPr/>
+        </p:nvSpPr>
+        <p:spPr>
+          <a:xfrm>
+            <a:off x="507987" y="2038299"/>
+            <a:ext cx="7619809" cy="203194"/>
+          </a:xfrm>
+          <a:prstGeom prst="roundRect">
+            <a:avLst/>
+          </a:prstGeom>
+          <a:solidFill>
+            <a:srgbClr val="1A2238"/>
+          </a:solidFill>
+          <a:ln>
+            <a:noFill/>
+          </a:ln>
+          <a:effectLst/>
+        </p:spPr>
+        <p:style>
+          <a:lnRef idx="1">
+            <a:schemeClr val="accent1"/>
+          </a:lnRef>
+          <a:fillRef idx="3">
+            <a:schemeClr val="accent1"/>
+          </a:fillRef>
+          <a:effectRef idx="2">
+            <a:schemeClr val="accent1"/>
+          </a:effectRef>
+          <a:fontRef idx="minor">
+            <a:schemeClr val="lt1"/>
+          </a:fontRef>
+        </p:style>
+        <p:txBody>
+          <a:bodyPr rtlCol="0" anchor="ctr"/>
+          <a:lstStyle/>
+          <a:p>
+            <a:pPr algn="ctr"/>
+          </a:p>
+        </p:txBody>
+      </p:sp>
+      <p:sp>
+        <p:nvSpPr>
+          <p:cNvPr id="14" name="TextBox 13"/>
+          <p:cNvSpPr txBox="1"/>
+          <p:nvPr/>
+        </p:nvSpPr>
+        <p:spPr>
+          <a:xfrm>
+            <a:off x="571485" y="2050998"/>
+            <a:ext cx="1904952" cy="177795"/>
+          </a:xfrm>
+          <a:prstGeom prst="rect">
+            <a:avLst/>
+          </a:prstGeom>
+          <a:noFill/>
+        </p:spPr>
+        <p:txBody>
+          <a:bodyPr wrap="square" anchor="t" lIns="45720" rIns="45720">
+            <a:spAutoFit/>
+          </a:bodyPr>
+          <a:lstStyle/>
+          <a:p>
+            <a:pPr algn="l"/>
+            <a:r>
+              <a:rPr sz="1100" b="1">
+                <a:solidFill>
+                  <a:srgbClr val="FFFFFF"/>
+                </a:solidFill>
+                <a:latin typeface="Hiragino Sans"/>
+              </a:rPr>
+              <a:t>BigQuery</a:t>
+            </a:r>
+          </a:p>
+        </p:txBody>
+      </p:sp>
+      <p:sp>
+        <p:nvSpPr>
+          <p:cNvPr id="15" name="TextBox 14"/>
+          <p:cNvSpPr txBox="1"/>
+          <p:nvPr/>
+        </p:nvSpPr>
+        <p:spPr>
+          <a:xfrm>
+            <a:off x="2539936" y="2050998"/>
+            <a:ext cx="1269968" cy="177795"/>
+          </a:xfrm>
+          <a:prstGeom prst="rect">
+            <a:avLst/>
+          </a:prstGeom>
+          <a:noFill/>
+        </p:spPr>
+        <p:txBody>
+          <a:bodyPr wrap="square" anchor="t" lIns="45720" rIns="45720">
+            <a:spAutoFit/>
+          </a:bodyPr>
+          <a:lstStyle/>
+          <a:p>
+            <a:pPr algn="l"/>
+            <a:r>
+              <a:rPr sz="1100" b="0">
+                <a:solidFill>
+                  <a:srgbClr val="FFC72C"/>
+                </a:solidFill>
+                <a:latin typeface="Hiragino Sans"/>
+              </a:rPr>
+              <a:t>$0 (1TiB free)</a:t>
+            </a:r>
+          </a:p>
+        </p:txBody>
+      </p:sp>
+      <p:sp>
+        <p:nvSpPr>
+          <p:cNvPr id="16" name="TextBox 15"/>
+          <p:cNvSpPr txBox="1"/>
+          <p:nvPr/>
+        </p:nvSpPr>
+        <p:spPr>
+          <a:xfrm>
+            <a:off x="3873403" y="2050998"/>
+            <a:ext cx="4190895" cy="177795"/>
+          </a:xfrm>
+          <a:prstGeom prst="rect">
+            <a:avLst/>
+          </a:prstGeom>
+          <a:noFill/>
+        </p:spPr>
+        <p:txBody>
+          <a:bodyPr wrap="square" anchor="t" lIns="45720" rIns="45720">
+            <a:spAutoFit/>
+          </a:bodyPr>
+          <a:lstStyle/>
+          <a:p>
+            <a:pPr algn="l"/>
+            <a:r>
+              <a:rPr sz="1000" b="0">
+                <a:solidFill>
+                  <a:srgbClr val="AFB8C1"/>
+                </a:solidFill>
+                <a:latin typeface="Hiragino Sans"/>
+              </a:rPr>
+              <a:t>クエリ1TiB/月まで無料</a:t>
+            </a:r>
+          </a:p>
+        </p:txBody>
+      </p:sp>
+      <p:sp>
+        <p:nvSpPr>
+          <p:cNvPr id="17" name="Rounded Rectangle 16"/>
+          <p:cNvSpPr/>
+          <p:nvPr/>
+        </p:nvSpPr>
+        <p:spPr>
+          <a:xfrm>
+            <a:off x="507987" y="2266893"/>
+            <a:ext cx="7619809" cy="203194"/>
+          </a:xfrm>
+          <a:prstGeom prst="roundRect">
+            <a:avLst/>
+          </a:prstGeom>
+          <a:solidFill>
+            <a:srgbClr val="252E42"/>
+          </a:solidFill>
+          <a:ln>
+            <a:noFill/>
+          </a:ln>
+          <a:effectLst/>
+        </p:spPr>
+        <p:style>
+          <a:lnRef idx="1">
+            <a:schemeClr val="accent1"/>
+          </a:lnRef>
+          <a:fillRef idx="3">
+            <a:schemeClr val="accent1"/>
+          </a:fillRef>
+          <a:effectRef idx="2">
+            <a:schemeClr val="accent1"/>
+          </a:effectRef>
+          <a:fontRef idx="minor">
+            <a:schemeClr val="lt1"/>
+          </a:fontRef>
+        </p:style>
+        <p:txBody>
+          <a:bodyPr rtlCol="0" anchor="ctr"/>
+          <a:lstStyle/>
+          <a:p>
+            <a:pPr algn="ctr"/>
+          </a:p>
+        </p:txBody>
+      </p:sp>
+      <p:sp>
+        <p:nvSpPr>
+          <p:cNvPr id="18" name="TextBox 17"/>
+          <p:cNvSpPr txBox="1"/>
+          <p:nvPr/>
+        </p:nvSpPr>
+        <p:spPr>
+          <a:xfrm>
+            <a:off x="571485" y="2279593"/>
+            <a:ext cx="1904952" cy="177795"/>
+          </a:xfrm>
+          <a:prstGeom prst="rect">
+            <a:avLst/>
+          </a:prstGeom>
+          <a:noFill/>
+        </p:spPr>
+        <p:txBody>
+          <a:bodyPr wrap="square" anchor="t" lIns="45720" rIns="45720">
+            <a:spAutoFit/>
+          </a:bodyPr>
+          <a:lstStyle/>
+          <a:p>
+            <a:pPr algn="l"/>
+            <a:r>
+              <a:rPr sz="1100" b="1">
+                <a:solidFill>
+                  <a:srgbClr val="FFFFFF"/>
+                </a:solidFill>
+                <a:latin typeface="Hiragino Sans"/>
+              </a:rPr>
+              <a:t>Cloud Run (e2-micro)</a:t>
+            </a:r>
+          </a:p>
+        </p:txBody>
+      </p:sp>
+      <p:sp>
+        <p:nvSpPr>
+          <p:cNvPr id="19" name="TextBox 18"/>
+          <p:cNvSpPr txBox="1"/>
+          <p:nvPr/>
+        </p:nvSpPr>
+        <p:spPr>
+          <a:xfrm>
+            <a:off x="2539936" y="2279593"/>
+            <a:ext cx="1269968" cy="177795"/>
+          </a:xfrm>
+          <a:prstGeom prst="rect">
+            <a:avLst/>
+          </a:prstGeom>
+          <a:noFill/>
+        </p:spPr>
+        <p:txBody>
+          <a:bodyPr wrap="square" anchor="t" lIns="45720" rIns="45720">
+            <a:spAutoFit/>
+          </a:bodyPr>
+          <a:lstStyle/>
+          <a:p>
+            <a:pPr algn="l"/>
+            <a:r>
+              <a:rPr sz="1100" b="0">
+                <a:solidFill>
+                  <a:srgbClr val="FFC72C"/>
+                </a:solidFill>
+                <a:latin typeface="Hiragino Sans"/>
+              </a:rPr>
+              <a:t>$0-5</a:t>
+            </a:r>
+          </a:p>
+        </p:txBody>
+      </p:sp>
+      <p:sp>
+        <p:nvSpPr>
+          <p:cNvPr id="20" name="TextBox 19"/>
+          <p:cNvSpPr txBox="1"/>
+          <p:nvPr/>
+        </p:nvSpPr>
+        <p:spPr>
+          <a:xfrm>
+            <a:off x="3873403" y="2279593"/>
+            <a:ext cx="4190895" cy="177795"/>
+          </a:xfrm>
+          <a:prstGeom prst="rect">
+            <a:avLst/>
+          </a:prstGeom>
+          <a:noFill/>
+        </p:spPr>
+        <p:txBody>
+          <a:bodyPr wrap="square" anchor="t" lIns="45720" rIns="45720">
+            <a:spAutoFit/>
+          </a:bodyPr>
+          <a:lstStyle/>
+          <a:p>
+            <a:pPr algn="l"/>
+            <a:r>
+              <a:rPr sz="1000" b="0">
+                <a:solidFill>
+                  <a:srgbClr val="AFB8C1"/>
+                </a:solidFill>
+                <a:latin typeface="Hiragino Sans"/>
+              </a:rPr>
+              <a:t>常時稼働分。 free tier 内なら$0</a:t>
+            </a:r>
+          </a:p>
+        </p:txBody>
+      </p:sp>
+      <p:sp>
+        <p:nvSpPr>
+          <p:cNvPr id="21" name="Rounded Rectangle 20"/>
+          <p:cNvSpPr/>
+          <p:nvPr/>
+        </p:nvSpPr>
+        <p:spPr>
+          <a:xfrm>
+            <a:off x="507987" y="2495487"/>
+            <a:ext cx="7619809" cy="203194"/>
+          </a:xfrm>
+          <a:prstGeom prst="roundRect">
+            <a:avLst/>
+          </a:prstGeom>
+          <a:solidFill>
+            <a:srgbClr val="1A2238"/>
+          </a:solidFill>
+          <a:ln>
+            <a:noFill/>
+          </a:ln>
+          <a:effectLst/>
+        </p:spPr>
+        <p:style>
+          <a:lnRef idx="1">
+            <a:schemeClr val="accent1"/>
+          </a:lnRef>
+          <a:fillRef idx="3">
+            <a:schemeClr val="accent1"/>
+          </a:fillRef>
+          <a:effectRef idx="2">
+            <a:schemeClr val="accent1"/>
+          </a:effectRef>
+          <a:fontRef idx="minor">
+            <a:schemeClr val="lt1"/>
+          </a:fontRef>
+        </p:style>
+        <p:txBody>
+          <a:bodyPr rtlCol="0" anchor="ctr"/>
+          <a:lstStyle/>
+          <a:p>
+            <a:pPr algn="ctr"/>
+          </a:p>
+        </p:txBody>
+      </p:sp>
+      <p:sp>
+        <p:nvSpPr>
+          <p:cNvPr id="22" name="TextBox 21"/>
+          <p:cNvSpPr txBox="1"/>
+          <p:nvPr/>
+        </p:nvSpPr>
+        <p:spPr>
+          <a:xfrm>
+            <a:off x="571485" y="2508187"/>
+            <a:ext cx="1904952" cy="177795"/>
+          </a:xfrm>
+          <a:prstGeom prst="rect">
+            <a:avLst/>
+          </a:prstGeom>
+          <a:noFill/>
+        </p:spPr>
+        <p:txBody>
+          <a:bodyPr wrap="square" anchor="t" lIns="45720" rIns="45720">
+            <a:spAutoFit/>
+          </a:bodyPr>
+          <a:lstStyle/>
+          <a:p>
+            <a:pPr algn="l"/>
+            <a:r>
+              <a:rPr sz="1100" b="1">
+                <a:solidFill>
+                  <a:srgbClr val="FFFFFF"/>
+                </a:solidFill>
+                <a:latin typeface="Hiragino Sans"/>
+              </a:rPr>
+              <a:t>Cloud Storage</a:t>
+            </a:r>
+          </a:p>
+        </p:txBody>
+      </p:sp>
+      <p:sp>
+        <p:nvSpPr>
+          <p:cNvPr id="23" name="TextBox 22"/>
+          <p:cNvSpPr txBox="1"/>
+          <p:nvPr/>
+        </p:nvSpPr>
+        <p:spPr>
+          <a:xfrm>
+            <a:off x="2539936" y="2508187"/>
+            <a:ext cx="1269968" cy="177795"/>
+          </a:xfrm>
+          <a:prstGeom prst="rect">
+            <a:avLst/>
+          </a:prstGeom>
+          <a:noFill/>
+        </p:spPr>
+        <p:txBody>
+          <a:bodyPr wrap="square" anchor="t" lIns="45720" rIns="45720">
+            <a:spAutoFit/>
+          </a:bodyPr>
+          <a:lstStyle/>
+          <a:p>
+            <a:pPr algn="l"/>
+            <a:r>
+              <a:rPr sz="1100" b="0">
+                <a:solidFill>
+                  <a:srgbClr val="FFC72C"/>
+                </a:solidFill>
+                <a:latin typeface="Hiragino Sans"/>
+              </a:rPr>
+              <a:t>$0-2</a:t>
+            </a:r>
+          </a:p>
+        </p:txBody>
+      </p:sp>
+      <p:sp>
+        <p:nvSpPr>
+          <p:cNvPr id="24" name="TextBox 23"/>
+          <p:cNvSpPr txBox="1"/>
+          <p:nvPr/>
+        </p:nvSpPr>
+        <p:spPr>
+          <a:xfrm>
+            <a:off x="3873403" y="2508187"/>
+            <a:ext cx="4190895" cy="177795"/>
+          </a:xfrm>
+          <a:prstGeom prst="rect">
+            <a:avLst/>
+          </a:prstGeom>
+          <a:noFill/>
+        </p:spPr>
+        <p:txBody>
+          <a:bodyPr wrap="square" anchor="t" lIns="45720" rIns="45720">
+            <a:spAutoFit/>
+          </a:bodyPr>
+          <a:lstStyle/>
+          <a:p>
+            <a:pPr algn="l"/>
+            <a:r>
+              <a:rPr sz="1000" b="0">
+                <a:solidFill>
+                  <a:srgbClr val="AFB8C1"/>
+                </a:solidFill>
+                <a:latin typeface="Hiragino Sans"/>
+              </a:rPr>
+              <a:t>画像/ログ 14日ライフサイクル、 ~10GB想定</a:t>
+            </a:r>
+          </a:p>
+        </p:txBody>
+      </p:sp>
+      <p:sp>
+        <p:nvSpPr>
+          <p:cNvPr id="25" name="Rounded Rectangle 24"/>
+          <p:cNvSpPr/>
+          <p:nvPr/>
+        </p:nvSpPr>
+        <p:spPr>
+          <a:xfrm>
+            <a:off x="507987" y="2724081"/>
+            <a:ext cx="7619809" cy="203194"/>
+          </a:xfrm>
+          <a:prstGeom prst="roundRect">
+            <a:avLst/>
+          </a:prstGeom>
+          <a:solidFill>
+            <a:srgbClr val="252E42"/>
+          </a:solidFill>
+          <a:ln>
+            <a:noFill/>
+          </a:ln>
+          <a:effectLst/>
+        </p:spPr>
+        <p:style>
+          <a:lnRef idx="1">
+            <a:schemeClr val="accent1"/>
+          </a:lnRef>
+          <a:fillRef idx="3">
+            <a:schemeClr val="accent1"/>
+          </a:fillRef>
+          <a:effectRef idx="2">
+            <a:schemeClr val="accent1"/>
+          </a:effectRef>
+          <a:fontRef idx="minor">
+            <a:schemeClr val="lt1"/>
+          </a:fontRef>
+        </p:style>
+        <p:txBody>
+          <a:bodyPr rtlCol="0" anchor="ctr"/>
+          <a:lstStyle/>
+          <a:p>
+            <a:pPr algn="ctr"/>
+          </a:p>
+        </p:txBody>
+      </p:sp>
+      <p:sp>
+        <p:nvSpPr>
+          <p:cNvPr id="26" name="TextBox 25"/>
+          <p:cNvSpPr txBox="1"/>
+          <p:nvPr/>
+        </p:nvSpPr>
+        <p:spPr>
+          <a:xfrm>
+            <a:off x="571485" y="2736781"/>
+            <a:ext cx="1904952" cy="177795"/>
+          </a:xfrm>
+          <a:prstGeom prst="rect">
+            <a:avLst/>
+          </a:prstGeom>
+          <a:noFill/>
+        </p:spPr>
+        <p:txBody>
+          <a:bodyPr wrap="square" anchor="t" lIns="45720" rIns="45720">
+            <a:spAutoFit/>
+          </a:bodyPr>
+          <a:lstStyle/>
+          <a:p>
+            <a:pPr algn="l"/>
+            <a:r>
+              <a:rPr sz="1100" b="1">
+                <a:solidFill>
+                  <a:srgbClr val="FFFFFF"/>
+                </a:solidFill>
+                <a:latin typeface="Hiragino Sans"/>
+              </a:rPr>
+              <a:t>Cloud Scheduler</a:t>
+            </a:r>
+          </a:p>
+        </p:txBody>
+      </p:sp>
+      <p:sp>
+        <p:nvSpPr>
+          <p:cNvPr id="27" name="TextBox 26"/>
+          <p:cNvSpPr txBox="1"/>
+          <p:nvPr/>
+        </p:nvSpPr>
+        <p:spPr>
+          <a:xfrm>
+            <a:off x="2539936" y="2736781"/>
+            <a:ext cx="1269968" cy="177795"/>
+          </a:xfrm>
+          <a:prstGeom prst="rect">
+            <a:avLst/>
+          </a:prstGeom>
+          <a:noFill/>
+        </p:spPr>
+        <p:txBody>
+          <a:bodyPr wrap="square" anchor="t" lIns="45720" rIns="45720">
+            <a:spAutoFit/>
+          </a:bodyPr>
+          <a:lstStyle/>
+          <a:p>
+            <a:pPr algn="l"/>
+            <a:r>
+              <a:rPr sz="1100" b="0">
+                <a:solidFill>
+                  <a:srgbClr val="FFC72C"/>
+                </a:solidFill>
+                <a:latin typeface="Hiragino Sans"/>
+              </a:rPr>
+              <a:t>$0</a:t>
+            </a:r>
+          </a:p>
+        </p:txBody>
+      </p:sp>
+      <p:sp>
+        <p:nvSpPr>
+          <p:cNvPr id="28" name="TextBox 27"/>
+          <p:cNvSpPr txBox="1"/>
+          <p:nvPr/>
+        </p:nvSpPr>
+        <p:spPr>
+          <a:xfrm>
+            <a:off x="3873403" y="2736781"/>
+            <a:ext cx="4190895" cy="177795"/>
+          </a:xfrm>
+          <a:prstGeom prst="rect">
+            <a:avLst/>
+          </a:prstGeom>
+          <a:noFill/>
+        </p:spPr>
+        <p:txBody>
+          <a:bodyPr wrap="square" anchor="t" lIns="45720" rIns="45720">
+            <a:spAutoFit/>
+          </a:bodyPr>
+          <a:lstStyle/>
+          <a:p>
+            <a:pPr algn="l"/>
+            <a:r>
+              <a:rPr sz="1000" b="0">
+                <a:solidFill>
+                  <a:srgbClr val="AFB8C1"/>
+                </a:solidFill>
+                <a:latin typeface="Hiragino Sans"/>
+              </a:rPr>
+              <a:t>5ジョブまで無料</a:t>
+            </a:r>
+          </a:p>
+        </p:txBody>
+      </p:sp>
+      <p:sp>
+        <p:nvSpPr>
+          <p:cNvPr id="29" name="TextBox 28"/>
+          <p:cNvSpPr txBox="1"/>
+          <p:nvPr/>
+        </p:nvSpPr>
+        <p:spPr>
+          <a:xfrm>
+            <a:off x="507987" y="3003474"/>
+            <a:ext cx="7619809" cy="203194"/>
+          </a:xfrm>
+          <a:prstGeom prst="rect">
+            <a:avLst/>
+          </a:prstGeom>
+          <a:noFill/>
+        </p:spPr>
+        <p:txBody>
+          <a:bodyPr wrap="square" anchor="t" lIns="45720" rIns="45720">
+            <a:spAutoFit/>
+          </a:bodyPr>
+          <a:lstStyle/>
+          <a:p>
+            <a:pPr algn="l"/>
+            <a:r>
+              <a:rPr sz="1400" b="1">
+                <a:solidFill>
+                  <a:srgbClr val="FFC72C"/>
+                </a:solidFill>
+                <a:latin typeface="Hiragino Sans"/>
+              </a:rPr>
+              <a:t>固定費合計 (Phase 1-2): 月 $0-7</a:t>
+            </a:r>
+          </a:p>
+        </p:txBody>
+      </p:sp>
+      <p:sp>
+        <p:nvSpPr>
+          <p:cNvPr id="30" name="TextBox 29"/>
+          <p:cNvSpPr txBox="1"/>
+          <p:nvPr/>
+        </p:nvSpPr>
+        <p:spPr>
+          <a:xfrm>
+            <a:off x="507987" y="3047923"/>
+            <a:ext cx="7619809" cy="253993"/>
+          </a:xfrm>
+          <a:prstGeom prst="rect">
+            <a:avLst/>
+          </a:prstGeom>
+          <a:noFill/>
+        </p:spPr>
+        <p:txBody>
+          <a:bodyPr wrap="square" anchor="t" lIns="45720" rIns="45720">
+            <a:spAutoFit/>
+          </a:bodyPr>
+          <a:lstStyle/>
+          <a:p>
+            <a:pPr algn="l"/>
+            <a:r>
+              <a:rPr sz="1600" b="1">
+                <a:solidFill>
+                  <a:srgbClr val="FFC72C"/>
+                </a:solidFill>
+                <a:latin typeface="Hiragino Sans"/>
+              </a:rPr>
+              <a:t>【変動費】(利用量に応じて、 取引活動・モデル学習量に比例)</a:t>
+            </a:r>
+          </a:p>
+        </p:txBody>
+      </p:sp>
+      <p:sp>
+        <p:nvSpPr>
+          <p:cNvPr id="31" name="Rounded Rectangle 30"/>
+          <p:cNvSpPr/>
+          <p:nvPr/>
+        </p:nvSpPr>
+        <p:spPr>
+          <a:xfrm>
+            <a:off x="507987" y="3333666"/>
+            <a:ext cx="7619809" cy="228594"/>
+          </a:xfrm>
+          <a:prstGeom prst="roundRect">
+            <a:avLst/>
+          </a:prstGeom>
+          <a:solidFill>
+            <a:srgbClr val="252E42"/>
+          </a:solidFill>
+          <a:ln w="12700">
+            <a:solidFill>
+              <a:srgbClr val="FFC72C"/>
+            </a:solidFill>
+          </a:ln>
+          <a:effectLst/>
+        </p:spPr>
+        <p:style>
+          <a:lnRef idx="1">
+            <a:schemeClr val="accent1"/>
+          </a:lnRef>
+          <a:fillRef idx="3">
+            <a:schemeClr val="accent1"/>
+          </a:fillRef>
+          <a:effectRef idx="2">
+            <a:schemeClr val="accent1"/>
+          </a:effectRef>
+          <a:fontRef idx="minor">
+            <a:schemeClr val="lt1"/>
+          </a:fontRef>
+        </p:style>
+        <p:txBody>
+          <a:bodyPr rtlCol="0" anchor="ctr"/>
+          <a:lstStyle/>
+          <a:p>
+            <a:pPr algn="ctr"/>
+          </a:p>
+        </p:txBody>
+      </p:sp>
+      <p:sp>
+        <p:nvSpPr>
+          <p:cNvPr id="32" name="TextBox 31"/>
+          <p:cNvSpPr txBox="1"/>
+          <p:nvPr/>
+        </p:nvSpPr>
+        <p:spPr>
+          <a:xfrm>
+            <a:off x="571485" y="3359066"/>
+            <a:ext cx="2412939" cy="177795"/>
+          </a:xfrm>
+          <a:prstGeom prst="rect">
+            <a:avLst/>
+          </a:prstGeom>
+          <a:noFill/>
+        </p:spPr>
+        <p:txBody>
+          <a:bodyPr wrap="square" anchor="t" lIns="45720" rIns="45720">
+            <a:spAutoFit/>
+          </a:bodyPr>
+          <a:lstStyle/>
+          <a:p>
+            <a:pPr algn="l"/>
+            <a:r>
+              <a:rPr sz="1200" b="1">
+                <a:solidFill>
+                  <a:srgbClr val="FFC72C"/>
+                </a:solidFill>
+                <a:latin typeface="Hiragino Sans"/>
+              </a:rPr>
+              <a:t>サービス</a:t>
+            </a:r>
+          </a:p>
+        </p:txBody>
+      </p:sp>
+      <p:sp>
+        <p:nvSpPr>
+          <p:cNvPr id="33" name="TextBox 32"/>
+          <p:cNvSpPr txBox="1"/>
+          <p:nvPr/>
+        </p:nvSpPr>
+        <p:spPr>
+          <a:xfrm>
+            <a:off x="3047923" y="3359066"/>
+            <a:ext cx="1142971" cy="177795"/>
+          </a:xfrm>
+          <a:prstGeom prst="rect">
+            <a:avLst/>
+          </a:prstGeom>
+          <a:noFill/>
+        </p:spPr>
+        <p:txBody>
+          <a:bodyPr wrap="square" anchor="t" lIns="45720" rIns="45720">
+            <a:spAutoFit/>
+          </a:bodyPr>
+          <a:lstStyle/>
+          <a:p>
+            <a:pPr algn="l"/>
+            <a:r>
+              <a:rPr sz="1200" b="1">
+                <a:solidFill>
+                  <a:srgbClr val="FFC72C"/>
+                </a:solidFill>
+                <a:latin typeface="Hiragino Sans"/>
+              </a:rPr>
+              <a:t>月額</a:t>
+            </a:r>
+          </a:p>
+        </p:txBody>
+      </p:sp>
+      <p:sp>
+        <p:nvSpPr>
+          <p:cNvPr id="34" name="TextBox 33"/>
+          <p:cNvSpPr txBox="1"/>
+          <p:nvPr/>
+        </p:nvSpPr>
+        <p:spPr>
+          <a:xfrm>
+            <a:off x="4254393" y="3359066"/>
+            <a:ext cx="3809904" cy="177795"/>
+          </a:xfrm>
+          <a:prstGeom prst="rect">
+            <a:avLst/>
+          </a:prstGeom>
+          <a:noFill/>
+        </p:spPr>
+        <p:txBody>
+          <a:bodyPr wrap="square" anchor="t" lIns="45720" rIns="45720">
+            <a:spAutoFit/>
+          </a:bodyPr>
+          <a:lstStyle/>
+          <a:p>
+            <a:pPr algn="l"/>
+            <a:r>
+              <a:rPr sz="1200" b="1">
+                <a:solidFill>
+                  <a:srgbClr val="FFC72C"/>
+                </a:solidFill>
+                <a:latin typeface="Hiragino Sans"/>
+              </a:rPr>
+              <a:t>内訳</a:t>
+            </a:r>
+          </a:p>
+        </p:txBody>
+      </p:sp>
+      <p:sp>
+        <p:nvSpPr>
+          <p:cNvPr id="35" name="Rounded Rectangle 34"/>
+          <p:cNvSpPr/>
+          <p:nvPr/>
+        </p:nvSpPr>
+        <p:spPr>
+          <a:xfrm>
+            <a:off x="507987" y="3587660"/>
+            <a:ext cx="7619809" cy="203194"/>
+          </a:xfrm>
+          <a:prstGeom prst="roundRect">
+            <a:avLst/>
+          </a:prstGeom>
+          <a:solidFill>
+            <a:srgbClr val="252E42"/>
+          </a:solidFill>
+          <a:ln>
+            <a:noFill/>
+          </a:ln>
+          <a:effectLst/>
+        </p:spPr>
+        <p:style>
+          <a:lnRef idx="1">
+            <a:schemeClr val="accent1"/>
+          </a:lnRef>
+          <a:fillRef idx="3">
+            <a:schemeClr val="accent1"/>
+          </a:fillRef>
+          <a:effectRef idx="2">
+            <a:schemeClr val="accent1"/>
+          </a:effectRef>
+          <a:fontRef idx="minor">
+            <a:schemeClr val="lt1"/>
+          </a:fontRef>
+        </p:style>
+        <p:txBody>
+          <a:bodyPr rtlCol="0" anchor="ctr"/>
+          <a:lstStyle/>
+          <a:p>
+            <a:pPr algn="ctr"/>
+          </a:p>
+        </p:txBody>
+      </p:sp>
+      <p:sp>
+        <p:nvSpPr>
+          <p:cNvPr id="36" name="TextBox 35"/>
+          <p:cNvSpPr txBox="1"/>
+          <p:nvPr/>
+        </p:nvSpPr>
+        <p:spPr>
+          <a:xfrm>
+            <a:off x="571485" y="3600359"/>
+            <a:ext cx="2412939" cy="177795"/>
+          </a:xfrm>
+          <a:prstGeom prst="rect">
+            <a:avLst/>
+          </a:prstGeom>
+          <a:noFill/>
+        </p:spPr>
+        <p:txBody>
+          <a:bodyPr wrap="square" anchor="t" lIns="45720" rIns="45720">
+            <a:spAutoFit/>
+          </a:bodyPr>
+          <a:lstStyle/>
+          <a:p>
+            <a:pPr algn="l"/>
+            <a:r>
+              <a:rPr sz="1000" b="1">
+                <a:solidFill>
+                  <a:srgbClr val="FFFFFF"/>
+                </a:solidFill>
+                <a:latin typeface="Hiragino Sans"/>
+              </a:rPr>
+              <a:t>Gemini 3.1 Pro Context Cache 常駐</a:t>
+            </a:r>
+          </a:p>
+        </p:txBody>
+      </p:sp>
+      <p:sp>
+        <p:nvSpPr>
+          <p:cNvPr id="37" name="TextBox 36"/>
+          <p:cNvSpPr txBox="1"/>
+          <p:nvPr/>
+        </p:nvSpPr>
+        <p:spPr>
+          <a:xfrm>
+            <a:off x="3047923" y="3600359"/>
+            <a:ext cx="1142971" cy="177795"/>
+          </a:xfrm>
+          <a:prstGeom prst="rect">
+            <a:avLst/>
+          </a:prstGeom>
+          <a:noFill/>
+        </p:spPr>
+        <p:txBody>
+          <a:bodyPr wrap="square" anchor="t" lIns="45720" rIns="45720">
+            <a:spAutoFit/>
+          </a:bodyPr>
+          <a:lstStyle/>
+          <a:p>
+            <a:pPr algn="l"/>
+            <a:r>
+              <a:rPr sz="1000" b="0">
+                <a:solidFill>
+                  <a:srgbClr val="FFC72C"/>
+                </a:solidFill>
+                <a:latin typeface="Hiragino Sans"/>
+              </a:rPr>
+              <a:t>$10-20</a:t>
+            </a:r>
+          </a:p>
+        </p:txBody>
+      </p:sp>
+      <p:sp>
+        <p:nvSpPr>
+          <p:cNvPr id="38" name="TextBox 37"/>
+          <p:cNvSpPr txBox="1"/>
+          <p:nvPr/>
+        </p:nvSpPr>
+        <p:spPr>
+          <a:xfrm>
+            <a:off x="4254393" y="3600359"/>
+            <a:ext cx="3809904" cy="177795"/>
+          </a:xfrm>
+          <a:prstGeom prst="rect">
+            <a:avLst/>
+          </a:prstGeom>
+          <a:noFill/>
+        </p:spPr>
+        <p:txBody>
+          <a:bodyPr wrap="square" anchor="t" lIns="45720" rIns="45720">
+            <a:spAutoFit/>
+          </a:bodyPr>
+          <a:lstStyle/>
+          <a:p>
+            <a:pPr algn="l"/>
+            <a:r>
+              <a:rPr sz="900" b="0">
+                <a:solidFill>
+                  <a:srgbClr val="AFB8C1"/>
+                </a:solidFill>
+                <a:latin typeface="Hiragino Sans"/>
+              </a:rPr>
+              <a:t>49,667ポストの30-40% (~300K tokens) を24/7常駐</a:t>
+            </a:r>
+          </a:p>
+        </p:txBody>
+      </p:sp>
+      <p:sp>
+        <p:nvSpPr>
+          <p:cNvPr id="39" name="Rounded Rectangle 38"/>
+          <p:cNvSpPr/>
+          <p:nvPr/>
+        </p:nvSpPr>
+        <p:spPr>
+          <a:xfrm>
+            <a:off x="507987" y="3816254"/>
+            <a:ext cx="7619809" cy="203194"/>
+          </a:xfrm>
+          <a:prstGeom prst="roundRect">
+            <a:avLst/>
+          </a:prstGeom>
+          <a:solidFill>
+            <a:srgbClr val="1A2238"/>
+          </a:solidFill>
+          <a:ln>
+            <a:noFill/>
+          </a:ln>
+          <a:effectLst/>
+        </p:spPr>
+        <p:style>
+          <a:lnRef idx="1">
+            <a:schemeClr val="accent1"/>
+          </a:lnRef>
+          <a:fillRef idx="3">
+            <a:schemeClr val="accent1"/>
+          </a:fillRef>
+          <a:effectRef idx="2">
+            <a:schemeClr val="accent1"/>
+          </a:effectRef>
+          <a:fontRef idx="minor">
+            <a:schemeClr val="lt1"/>
+          </a:fontRef>
+        </p:style>
+        <p:txBody>
+          <a:bodyPr rtlCol="0" anchor="ctr"/>
+          <a:lstStyle/>
+          <a:p>
+            <a:pPr algn="ctr"/>
+          </a:p>
+        </p:txBody>
+      </p:sp>
+      <p:sp>
+        <p:nvSpPr>
+          <p:cNvPr id="40" name="TextBox 39"/>
+          <p:cNvSpPr txBox="1"/>
+          <p:nvPr/>
+        </p:nvSpPr>
+        <p:spPr>
+          <a:xfrm>
+            <a:off x="571485" y="3828954"/>
+            <a:ext cx="2412939" cy="177795"/>
+          </a:xfrm>
+          <a:prstGeom prst="rect">
+            <a:avLst/>
+          </a:prstGeom>
+          <a:noFill/>
+        </p:spPr>
+        <p:txBody>
+          <a:bodyPr wrap="square" anchor="t" lIns="45720" rIns="45720">
+            <a:spAutoFit/>
+          </a:bodyPr>
+          <a:lstStyle/>
+          <a:p>
+            <a:pPr algn="l"/>
+            <a:r>
+              <a:rPr sz="1000" b="1">
+                <a:solidFill>
+                  <a:srgbClr val="FFFFFF"/>
+                </a:solidFill>
+                <a:latin typeface="Hiragino Sans"/>
+              </a:rPr>
+              <a:t>Gemini クエリ (15分間隔)</a:t>
+            </a:r>
+          </a:p>
+        </p:txBody>
+      </p:sp>
+      <p:sp>
+        <p:nvSpPr>
+          <p:cNvPr id="41" name="TextBox 40"/>
+          <p:cNvSpPr txBox="1"/>
+          <p:nvPr/>
+        </p:nvSpPr>
+        <p:spPr>
+          <a:xfrm>
+            <a:off x="3047923" y="3828954"/>
+            <a:ext cx="1142971" cy="177795"/>
+          </a:xfrm>
+          <a:prstGeom prst="rect">
+            <a:avLst/>
+          </a:prstGeom>
+          <a:noFill/>
+        </p:spPr>
+        <p:txBody>
+          <a:bodyPr wrap="square" anchor="t" lIns="45720" rIns="45720">
+            <a:spAutoFit/>
+          </a:bodyPr>
+          <a:lstStyle/>
+          <a:p>
+            <a:pPr algn="l"/>
+            <a:r>
+              <a:rPr sz="1000" b="0">
+                <a:solidFill>
+                  <a:srgbClr val="FFC72C"/>
+                </a:solidFill>
+                <a:latin typeface="Hiragino Sans"/>
+              </a:rPr>
+              <a:t>$5-30</a:t>
+            </a:r>
+          </a:p>
+        </p:txBody>
+      </p:sp>
+      <p:sp>
+        <p:nvSpPr>
+          <p:cNvPr id="42" name="TextBox 41"/>
+          <p:cNvSpPr txBox="1"/>
+          <p:nvPr/>
+        </p:nvSpPr>
+        <p:spPr>
+          <a:xfrm>
+            <a:off x="4254393" y="3828954"/>
+            <a:ext cx="3809904" cy="177795"/>
+          </a:xfrm>
+          <a:prstGeom prst="rect">
+            <a:avLst/>
+          </a:prstGeom>
+          <a:noFill/>
+        </p:spPr>
+        <p:txBody>
+          <a:bodyPr wrap="square" anchor="t" lIns="45720" rIns="45720">
+            <a:spAutoFit/>
+          </a:bodyPr>
+          <a:lstStyle/>
+          <a:p>
+            <a:pPr algn="l"/>
+            <a:r>
+              <a:rPr sz="900" b="0">
+                <a:solidFill>
+                  <a:srgbClr val="AFB8C1"/>
+                </a:solidFill>
+                <a:latin typeface="Hiragino Sans"/>
+              </a:rPr>
+              <a:t>日96クエリ × 30日 = 2,880回/月、 出力tokens変動</a:t>
+            </a:r>
+          </a:p>
+        </p:txBody>
+      </p:sp>
+      <p:sp>
+        <p:nvSpPr>
+          <p:cNvPr id="43" name="Rounded Rectangle 42"/>
+          <p:cNvSpPr/>
+          <p:nvPr/>
+        </p:nvSpPr>
+        <p:spPr>
+          <a:xfrm>
+            <a:off x="507987" y="4044848"/>
+            <a:ext cx="7619809" cy="203194"/>
+          </a:xfrm>
+          <a:prstGeom prst="roundRect">
+            <a:avLst/>
+          </a:prstGeom>
+          <a:solidFill>
+            <a:srgbClr val="252E42"/>
+          </a:solidFill>
+          <a:ln>
+            <a:noFill/>
+          </a:ln>
+          <a:effectLst/>
+        </p:spPr>
+        <p:style>
+          <a:lnRef idx="1">
+            <a:schemeClr val="accent1"/>
+          </a:lnRef>
+          <a:fillRef idx="3">
+            <a:schemeClr val="accent1"/>
+          </a:fillRef>
+          <a:effectRef idx="2">
+            <a:schemeClr val="accent1"/>
+          </a:effectRef>
+          <a:fontRef idx="minor">
+            <a:schemeClr val="lt1"/>
+          </a:fontRef>
+        </p:style>
+        <p:txBody>
+          <a:bodyPr rtlCol="0" anchor="ctr"/>
+          <a:lstStyle/>
+          <a:p>
+            <a:pPr algn="ctr"/>
+          </a:p>
+        </p:txBody>
+      </p:sp>
+      <p:sp>
+        <p:nvSpPr>
+          <p:cNvPr id="44" name="TextBox 43"/>
+          <p:cNvSpPr txBox="1"/>
+          <p:nvPr/>
+        </p:nvSpPr>
+        <p:spPr>
+          <a:xfrm>
+            <a:off x="571485" y="4057548"/>
+            <a:ext cx="2412939" cy="177795"/>
+          </a:xfrm>
+          <a:prstGeom prst="rect">
+            <a:avLst/>
+          </a:prstGeom>
+          <a:noFill/>
+        </p:spPr>
+        <p:txBody>
+          <a:bodyPr wrap="square" anchor="t" lIns="45720" rIns="45720">
+            <a:spAutoFit/>
+          </a:bodyPr>
+          <a:lstStyle/>
+          <a:p>
+            <a:pPr algn="l"/>
+            <a:r>
+              <a:rPr sz="1000" b="1">
+                <a:solidFill>
+                  <a:srgbClr val="FFFFFF"/>
+                </a:solidFill>
+                <a:latin typeface="Hiragino Sans"/>
+              </a:rPr>
+              <a:t>Gemini Embedding API (DNA初期化)</a:t>
+            </a:r>
+          </a:p>
+        </p:txBody>
+      </p:sp>
+      <p:sp>
+        <p:nvSpPr>
+          <p:cNvPr id="45" name="TextBox 44"/>
+          <p:cNvSpPr txBox="1"/>
+          <p:nvPr/>
+        </p:nvSpPr>
+        <p:spPr>
+          <a:xfrm>
+            <a:off x="3047923" y="4057548"/>
+            <a:ext cx="1142971" cy="177795"/>
+          </a:xfrm>
+          <a:prstGeom prst="rect">
+            <a:avLst/>
+          </a:prstGeom>
+          <a:noFill/>
+        </p:spPr>
+        <p:txBody>
+          <a:bodyPr wrap="square" anchor="t" lIns="45720" rIns="45720">
+            <a:spAutoFit/>
+          </a:bodyPr>
+          <a:lstStyle/>
+          <a:p>
+            <a:pPr algn="l"/>
+            <a:r>
+              <a:rPr sz="1000" b="0">
+                <a:solidFill>
+                  <a:srgbClr val="FFC72C"/>
+                </a:solidFill>
+                <a:latin typeface="Hiragino Sans"/>
+              </a:rPr>
+              <a:t>$2-5 (一回限り)</a:t>
+            </a:r>
+          </a:p>
+        </p:txBody>
+      </p:sp>
+      <p:sp>
+        <p:nvSpPr>
+          <p:cNvPr id="46" name="TextBox 45"/>
+          <p:cNvSpPr txBox="1"/>
+          <p:nvPr/>
+        </p:nvSpPr>
+        <p:spPr>
+          <a:xfrm>
+            <a:off x="4254393" y="4057548"/>
+            <a:ext cx="3809904" cy="177795"/>
+          </a:xfrm>
+          <a:prstGeom prst="rect">
+            <a:avLst/>
+          </a:prstGeom>
+          <a:noFill/>
+        </p:spPr>
+        <p:txBody>
+          <a:bodyPr wrap="square" anchor="t" lIns="45720" rIns="45720">
+            <a:spAutoFit/>
+          </a:bodyPr>
+          <a:lstStyle/>
+          <a:p>
+            <a:pPr algn="l"/>
+            <a:r>
+              <a:rPr sz="900" b="0">
+                <a:solidFill>
+                  <a:srgbClr val="AFB8C1"/>
+                </a:solidFill>
+                <a:latin typeface="Hiragino Sans"/>
+              </a:rPr>
+              <a:t>49,667ポスト × 1024dim embedding。 Phase 1で1回</a:t>
+            </a:r>
+          </a:p>
+        </p:txBody>
+      </p:sp>
+      <p:sp>
+        <p:nvSpPr>
+          <p:cNvPr id="47" name="Rounded Rectangle 46"/>
+          <p:cNvSpPr/>
+          <p:nvPr/>
+        </p:nvSpPr>
+        <p:spPr>
+          <a:xfrm>
+            <a:off x="507987" y="4273443"/>
+            <a:ext cx="7619809" cy="203194"/>
+          </a:xfrm>
+          <a:prstGeom prst="roundRect">
+            <a:avLst/>
+          </a:prstGeom>
+          <a:solidFill>
+            <a:srgbClr val="1A2238"/>
+          </a:solidFill>
+          <a:ln>
+            <a:noFill/>
+          </a:ln>
+          <a:effectLst/>
+        </p:spPr>
+        <p:style>
+          <a:lnRef idx="1">
+            <a:schemeClr val="accent1"/>
+          </a:lnRef>
+          <a:fillRef idx="3">
+            <a:schemeClr val="accent1"/>
+          </a:fillRef>
+          <a:effectRef idx="2">
+            <a:schemeClr val="accent1"/>
+          </a:effectRef>
+          <a:fontRef idx="minor">
+            <a:schemeClr val="lt1"/>
+          </a:fontRef>
+        </p:style>
+        <p:txBody>
+          <a:bodyPr rtlCol="0" anchor="ctr"/>
+          <a:lstStyle/>
+          <a:p>
+            <a:pPr algn="ctr"/>
+          </a:p>
+        </p:txBody>
+      </p:sp>
+      <p:sp>
+        <p:nvSpPr>
+          <p:cNvPr id="48" name="TextBox 47"/>
+          <p:cNvSpPr txBox="1"/>
+          <p:nvPr/>
+        </p:nvSpPr>
+        <p:spPr>
+          <a:xfrm>
+            <a:off x="571485" y="4286142"/>
+            <a:ext cx="2412939" cy="177795"/>
+          </a:xfrm>
+          <a:prstGeom prst="rect">
+            <a:avLst/>
+          </a:prstGeom>
+          <a:noFill/>
+        </p:spPr>
+        <p:txBody>
+          <a:bodyPr wrap="square" anchor="t" lIns="45720" rIns="45720">
+            <a:spAutoFit/>
+          </a:bodyPr>
+          <a:lstStyle/>
+          <a:p>
+            <a:pPr algn="l"/>
+            <a:r>
+              <a:rPr sz="1000" b="1">
+                <a:solidFill>
+                  <a:srgbClr val="FFFFFF"/>
+                </a:solidFill>
+                <a:latin typeface="Hiragino Sans"/>
+              </a:rPr>
+              <a:t>GPU Spot (A100 1h/週)</a:t>
+            </a:r>
+          </a:p>
+        </p:txBody>
+      </p:sp>
+      <p:sp>
+        <p:nvSpPr>
+          <p:cNvPr id="49" name="TextBox 48"/>
+          <p:cNvSpPr txBox="1"/>
+          <p:nvPr/>
+        </p:nvSpPr>
+        <p:spPr>
+          <a:xfrm>
+            <a:off x="3047923" y="4286142"/>
+            <a:ext cx="1142971" cy="177795"/>
+          </a:xfrm>
+          <a:prstGeom prst="rect">
+            <a:avLst/>
+          </a:prstGeom>
+          <a:noFill/>
+        </p:spPr>
+        <p:txBody>
+          <a:bodyPr wrap="square" anchor="t" lIns="45720" rIns="45720">
+            <a:spAutoFit/>
+          </a:bodyPr>
+          <a:lstStyle/>
+          <a:p>
+            <a:pPr algn="l"/>
+            <a:r>
+              <a:rPr sz="1000" b="0">
+                <a:solidFill>
+                  <a:srgbClr val="FFC72C"/>
+                </a:solidFill>
+                <a:latin typeface="Hiragino Sans"/>
+              </a:rPr>
+              <a:t>$6-15</a:t>
+            </a:r>
+          </a:p>
+        </p:txBody>
+      </p:sp>
+      <p:sp>
+        <p:nvSpPr>
+          <p:cNvPr id="50" name="TextBox 49"/>
+          <p:cNvSpPr txBox="1"/>
+          <p:nvPr/>
+        </p:nvSpPr>
+        <p:spPr>
+          <a:xfrm>
+            <a:off x="4254393" y="4286142"/>
+            <a:ext cx="3809904" cy="177795"/>
+          </a:xfrm>
+          <a:prstGeom prst="rect">
+            <a:avLst/>
+          </a:prstGeom>
+          <a:noFill/>
+        </p:spPr>
+        <p:txBody>
+          <a:bodyPr wrap="square" anchor="t" lIns="45720" rIns="45720">
+            <a:spAutoFit/>
+          </a:bodyPr>
+          <a:lstStyle/>
+          <a:p>
+            <a:pPr algn="l"/>
+            <a:r>
+              <a:rPr sz="900" b="0">
+                <a:solidFill>
+                  <a:srgbClr val="AFB8C1"/>
+                </a:solidFill>
+                <a:latin typeface="Hiragino Sans"/>
+              </a:rPr>
+              <a:t>週1回 RL/PBT 学習。 Spot価格変動あり</a:t>
+            </a:r>
+          </a:p>
+        </p:txBody>
+      </p:sp>
+      <p:sp>
+        <p:nvSpPr>
+          <p:cNvPr id="51" name="Rounded Rectangle 50"/>
+          <p:cNvSpPr/>
+          <p:nvPr/>
+        </p:nvSpPr>
+        <p:spPr>
+          <a:xfrm>
+            <a:off x="507987" y="4502037"/>
+            <a:ext cx="7619809" cy="203194"/>
+          </a:xfrm>
+          <a:prstGeom prst="roundRect">
+            <a:avLst/>
+          </a:prstGeom>
+          <a:solidFill>
+            <a:srgbClr val="252E42"/>
+          </a:solidFill>
+          <a:ln>
+            <a:noFill/>
+          </a:ln>
+          <a:effectLst/>
+        </p:spPr>
+        <p:style>
+          <a:lnRef idx="1">
+            <a:schemeClr val="accent1"/>
+          </a:lnRef>
+          <a:fillRef idx="3">
+            <a:schemeClr val="accent1"/>
+          </a:fillRef>
+          <a:effectRef idx="2">
+            <a:schemeClr val="accent1"/>
+          </a:effectRef>
+          <a:fontRef idx="minor">
+            <a:schemeClr val="lt1"/>
+          </a:fontRef>
+        </p:style>
+        <p:txBody>
+          <a:bodyPr rtlCol="0" anchor="ctr"/>
+          <a:lstStyle/>
+          <a:p>
+            <a:pPr algn="ctr"/>
+          </a:p>
+        </p:txBody>
+      </p:sp>
+      <p:sp>
+        <p:nvSpPr>
+          <p:cNvPr id="52" name="TextBox 51"/>
+          <p:cNvSpPr txBox="1"/>
+          <p:nvPr/>
+        </p:nvSpPr>
+        <p:spPr>
+          <a:xfrm>
+            <a:off x="571485" y="4514737"/>
+            <a:ext cx="2412939" cy="177795"/>
+          </a:xfrm>
+          <a:prstGeom prst="rect">
+            <a:avLst/>
+          </a:prstGeom>
+          <a:noFill/>
+        </p:spPr>
+        <p:txBody>
+          <a:bodyPr wrap="square" anchor="t" lIns="45720" rIns="45720">
+            <a:spAutoFit/>
+          </a:bodyPr>
+          <a:lstStyle/>
+          <a:p>
+            <a:pPr algn="l"/>
+            <a:r>
+              <a:rPr sz="1000" b="1">
+                <a:solidFill>
+                  <a:srgbClr val="FFFFFF"/>
+                </a:solidFill>
+                <a:latin typeface="Hiragino Sans"/>
+              </a:rPr>
+              <a:t>Bybit/Hyperliquid API</a:t>
+            </a:r>
+          </a:p>
+        </p:txBody>
+      </p:sp>
+      <p:sp>
+        <p:nvSpPr>
+          <p:cNvPr id="53" name="TextBox 52"/>
+          <p:cNvSpPr txBox="1"/>
+          <p:nvPr/>
+        </p:nvSpPr>
+        <p:spPr>
+          <a:xfrm>
+            <a:off x="3047923" y="4514737"/>
+            <a:ext cx="1142971" cy="177795"/>
+          </a:xfrm>
+          <a:prstGeom prst="rect">
+            <a:avLst/>
+          </a:prstGeom>
+          <a:noFill/>
+        </p:spPr>
+        <p:txBody>
+          <a:bodyPr wrap="square" anchor="t" lIns="45720" rIns="45720">
+            <a:spAutoFit/>
+          </a:bodyPr>
+          <a:lstStyle/>
+          <a:p>
+            <a:pPr algn="l"/>
+            <a:r>
+              <a:rPr sz="1000" b="0">
+                <a:solidFill>
+                  <a:srgbClr val="FFC72C"/>
+                </a:solidFill>
+                <a:latin typeface="Hiragino Sans"/>
+              </a:rPr>
+              <a:t>$0</a:t>
+            </a:r>
+          </a:p>
+        </p:txBody>
+      </p:sp>
+      <p:sp>
+        <p:nvSpPr>
+          <p:cNvPr id="54" name="TextBox 53"/>
+          <p:cNvSpPr txBox="1"/>
+          <p:nvPr/>
+        </p:nvSpPr>
+        <p:spPr>
+          <a:xfrm>
+            <a:off x="4254393" y="4514737"/>
+            <a:ext cx="3809904" cy="177795"/>
+          </a:xfrm>
+          <a:prstGeom prst="rect">
+            <a:avLst/>
+          </a:prstGeom>
+          <a:noFill/>
+        </p:spPr>
+        <p:txBody>
+          <a:bodyPr wrap="square" anchor="t" lIns="45720" rIns="45720">
+            <a:spAutoFit/>
+          </a:bodyPr>
+          <a:lstStyle/>
+          <a:p>
+            <a:pPr algn="l"/>
+            <a:r>
+              <a:rPr sz="900" b="0">
+                <a:solidFill>
+                  <a:srgbClr val="AFB8C1"/>
+                </a:solidFill>
+                <a:latin typeface="Hiragino Sans"/>
+              </a:rPr>
+              <a:t>読取無料、 取引手数料は別</a:t>
+            </a:r>
+          </a:p>
+        </p:txBody>
+      </p:sp>
+      <p:sp>
+        <p:nvSpPr>
+          <p:cNvPr id="55" name="Rounded Rectangle 54"/>
+          <p:cNvSpPr/>
+          <p:nvPr/>
+        </p:nvSpPr>
+        <p:spPr>
+          <a:xfrm>
+            <a:off x="507987" y="4730631"/>
+            <a:ext cx="7619809" cy="203194"/>
+          </a:xfrm>
+          <a:prstGeom prst="roundRect">
+            <a:avLst/>
+          </a:prstGeom>
+          <a:solidFill>
+            <a:srgbClr val="1A2238"/>
+          </a:solidFill>
+          <a:ln>
+            <a:noFill/>
+          </a:ln>
+          <a:effectLst/>
+        </p:spPr>
+        <p:style>
+          <a:lnRef idx="1">
+            <a:schemeClr val="accent1"/>
+          </a:lnRef>
+          <a:fillRef idx="3">
+            <a:schemeClr val="accent1"/>
+          </a:fillRef>
+          <a:effectRef idx="2">
+            <a:schemeClr val="accent1"/>
+          </a:effectRef>
+          <a:fontRef idx="minor">
+            <a:schemeClr val="lt1"/>
+          </a:fontRef>
+        </p:style>
+        <p:txBody>
+          <a:bodyPr rtlCol="0" anchor="ctr"/>
+          <a:lstStyle/>
+          <a:p>
+            <a:pPr algn="ctr"/>
+          </a:p>
+        </p:txBody>
+      </p:sp>
+      <p:sp>
+        <p:nvSpPr>
+          <p:cNvPr id="56" name="TextBox 55"/>
+          <p:cNvSpPr txBox="1"/>
+          <p:nvPr/>
+        </p:nvSpPr>
+        <p:spPr>
+          <a:xfrm>
+            <a:off x="571485" y="4743331"/>
+            <a:ext cx="2412939" cy="177795"/>
+          </a:xfrm>
+          <a:prstGeom prst="rect">
+            <a:avLst/>
+          </a:prstGeom>
+          <a:noFill/>
+        </p:spPr>
+        <p:txBody>
+          <a:bodyPr wrap="square" anchor="t" lIns="45720" rIns="45720">
+            <a:spAutoFit/>
+          </a:bodyPr>
+          <a:lstStyle/>
+          <a:p>
+            <a:pPr algn="l"/>
+            <a:r>
+              <a:rPr sz="1000" b="1">
+                <a:solidFill>
+                  <a:srgbClr val="FFFFFF"/>
+                </a:solidFill>
+                <a:latin typeface="Hiragino Sans"/>
+              </a:rPr>
+              <a:t>取引手数料 (Phase 5以降)</a:t>
+            </a:r>
+          </a:p>
+        </p:txBody>
+      </p:sp>
+      <p:sp>
+        <p:nvSpPr>
+          <p:cNvPr id="57" name="TextBox 56"/>
+          <p:cNvSpPr txBox="1"/>
+          <p:nvPr/>
+        </p:nvSpPr>
+        <p:spPr>
+          <a:xfrm>
+            <a:off x="3047923" y="4743331"/>
+            <a:ext cx="1142971" cy="177795"/>
+          </a:xfrm>
+          <a:prstGeom prst="rect">
+            <a:avLst/>
+          </a:prstGeom>
+          <a:noFill/>
+        </p:spPr>
+        <p:txBody>
+          <a:bodyPr wrap="square" anchor="t" lIns="45720" rIns="45720">
+            <a:spAutoFit/>
+          </a:bodyPr>
+          <a:lstStyle/>
+          <a:p>
+            <a:pPr algn="l"/>
+            <a:r>
+              <a:rPr sz="1000" b="0">
+                <a:solidFill>
+                  <a:srgbClr val="FFC72C"/>
+                </a:solidFill>
+                <a:latin typeface="Hiragino Sans"/>
+              </a:rPr>
+              <a:t>別途</a:t>
+            </a:r>
+          </a:p>
+        </p:txBody>
+      </p:sp>
+      <p:sp>
+        <p:nvSpPr>
+          <p:cNvPr id="58" name="TextBox 57"/>
+          <p:cNvSpPr txBox="1"/>
+          <p:nvPr/>
+        </p:nvSpPr>
+        <p:spPr>
+          <a:xfrm>
+            <a:off x="4254393" y="4743331"/>
+            <a:ext cx="3809904" cy="177795"/>
+          </a:xfrm>
+          <a:prstGeom prst="rect">
+            <a:avLst/>
+          </a:prstGeom>
+          <a:noFill/>
+        </p:spPr>
+        <p:txBody>
+          <a:bodyPr wrap="square" anchor="t" lIns="45720" rIns="45720">
+            <a:spAutoFit/>
+          </a:bodyPr>
+          <a:lstStyle/>
+          <a:p>
+            <a:pPr algn="l"/>
+            <a:r>
+              <a:rPr sz="900" b="0">
+                <a:solidFill>
+                  <a:srgbClr val="AFB8C1"/>
+                </a:solidFill>
+                <a:latin typeface="Hiragino Sans"/>
+              </a:rPr>
+              <a:t>Maker -0.025% / Taker 0.075% × 取引量</a:t>
+            </a:r>
+          </a:p>
+        </p:txBody>
+      </p:sp>
+      <p:sp>
+        <p:nvSpPr>
+          <p:cNvPr id="59" name="TextBox 58"/>
+          <p:cNvSpPr txBox="1"/>
+          <p:nvPr/>
+        </p:nvSpPr>
+        <p:spPr>
+          <a:xfrm>
+            <a:off x="507987" y="5010024"/>
+            <a:ext cx="7619809" cy="203194"/>
+          </a:xfrm>
+          <a:prstGeom prst="rect">
+            <a:avLst/>
+          </a:prstGeom>
+          <a:noFill/>
+        </p:spPr>
+        <p:txBody>
+          <a:bodyPr wrap="square" anchor="t" lIns="45720" rIns="45720">
+            <a:spAutoFit/>
+          </a:bodyPr>
+          <a:lstStyle/>
+          <a:p>
+            <a:pPr algn="l"/>
+            <a:r>
+              <a:rPr sz="1400" b="1">
+                <a:solidFill>
+                  <a:srgbClr val="FFC72C"/>
+                </a:solidFill>
+                <a:latin typeface="Hiragino Sans"/>
+              </a:rPr>
+              <a:t>変動費合計 (Phase 1-2): 月 $25-65  /  Phase 3-5 拡大時: 月 $50-200</a:t>
+            </a:r>
+          </a:p>
+        </p:txBody>
+      </p:sp>
+      <p:sp>
+        <p:nvSpPr>
+          <p:cNvPr id="60" name="Rounded Rectangle 59"/>
+          <p:cNvSpPr/>
+          <p:nvPr/>
+        </p:nvSpPr>
+        <p:spPr>
+          <a:xfrm>
+            <a:off x="507987" y="6032349"/>
+            <a:ext cx="7619809" cy="444488"/>
+          </a:xfrm>
+          <a:prstGeom prst="roundRect">
+            <a:avLst/>
+          </a:prstGeom>
+          <a:solidFill>
+            <a:srgbClr val="252E42"/>
+          </a:solidFill>
+          <a:ln w="12700">
+            <a:solidFill>
+              <a:srgbClr val="FFC72C"/>
+            </a:solidFill>
+          </a:ln>
+          <a:effectLst/>
+        </p:spPr>
+        <p:style>
+          <a:lnRef idx="1">
+            <a:schemeClr val="accent1"/>
+          </a:lnRef>
+          <a:fillRef idx="3">
+            <a:schemeClr val="accent1"/>
+          </a:fillRef>
+          <a:effectRef idx="2">
+            <a:schemeClr val="accent1"/>
+          </a:effectRef>
+          <a:fontRef idx="minor">
+            <a:schemeClr val="lt1"/>
+          </a:fontRef>
+        </p:style>
+        <p:txBody>
+          <a:bodyPr rtlCol="0" anchor="ctr"/>
+          <a:lstStyle/>
+          <a:p>
+            <a:pPr algn="ctr"/>
+          </a:p>
+        </p:txBody>
+      </p:sp>
+      <p:sp>
+        <p:nvSpPr>
+          <p:cNvPr id="61" name="TextBox 60"/>
+          <p:cNvSpPr txBox="1"/>
+          <p:nvPr/>
+        </p:nvSpPr>
+        <p:spPr>
+          <a:xfrm>
+            <a:off x="507987" y="6032349"/>
+            <a:ext cx="7619809" cy="444488"/>
+          </a:xfrm>
+          <a:prstGeom prst="rect">
+            <a:avLst/>
+          </a:prstGeom>
+          <a:noFill/>
+        </p:spPr>
+        <p:txBody>
+          <a:bodyPr wrap="square" anchor="ctr" lIns="45720" rIns="45720">
+            <a:spAutoFit/>
+          </a:bodyPr>
+          <a:lstStyle/>
+          <a:p>
+            <a:pPr algn="ctr"/>
+            <a:r>
+              <a:rPr sz="1800" b="1">
+                <a:solidFill>
+                  <a:srgbClr val="FFC72C"/>
+                </a:solidFill>
+                <a:latin typeface="Hiragino Sans"/>
+              </a:rPr>
+              <a:t>【総額】 Phase 1-2 POC: 月 $25-72  /  Phase 3-5 本格運用: 月 $50-207</a:t>
+            </a:r>
+          </a:p>
+        </p:txBody>
+      </p:sp>
+      <p:sp>
+        <p:nvSpPr>
+          <p:cNvPr id="62" name="Rounded Rectangle 61"/>
+          <p:cNvSpPr/>
+          <p:nvPr/>
+        </p:nvSpPr>
+        <p:spPr>
+          <a:xfrm>
+            <a:off x="8381790" y="1015974"/>
+            <a:ext cx="3428914" cy="5524361"/>
+          </a:xfrm>
+          <a:prstGeom prst="roundRect">
+            <a:avLst/>
+          </a:prstGeom>
+          <a:solidFill>
+            <a:srgbClr val="252E42"/>
+          </a:solidFill>
+          <a:ln w="12700">
+            <a:solidFill>
+              <a:srgbClr val="FFC72C"/>
+            </a:solidFill>
+          </a:ln>
+          <a:effectLst/>
+        </p:spPr>
+        <p:style>
+          <a:lnRef idx="1">
+            <a:schemeClr val="accent1"/>
+          </a:lnRef>
+          <a:fillRef idx="3">
+            <a:schemeClr val="accent1"/>
+          </a:fillRef>
+          <a:effectRef idx="2">
+            <a:schemeClr val="accent1"/>
+          </a:effectRef>
+          <a:fontRef idx="minor">
+            <a:schemeClr val="lt1"/>
+          </a:fontRef>
+        </p:style>
+        <p:txBody>
+          <a:bodyPr rtlCol="0" anchor="ctr"/>
+          <a:lstStyle/>
+          <a:p>
+            <a:pPr algn="ctr"/>
+          </a:p>
+        </p:txBody>
+      </p:sp>
+      <p:sp>
+        <p:nvSpPr>
+          <p:cNvPr id="63" name="TextBox 62"/>
+          <p:cNvSpPr txBox="1"/>
+          <p:nvPr/>
+        </p:nvSpPr>
+        <p:spPr>
+          <a:xfrm>
+            <a:off x="8508787" y="1111222"/>
+            <a:ext cx="3174920" cy="285742"/>
+          </a:xfrm>
+          <a:prstGeom prst="rect">
+            <a:avLst/>
+          </a:prstGeom>
+          <a:noFill/>
+        </p:spPr>
+        <p:txBody>
+          <a:bodyPr wrap="square" anchor="t" lIns="45720" rIns="45720">
+            <a:spAutoFit/>
+          </a:bodyPr>
+          <a:lstStyle/>
+          <a:p>
+            <a:pPr algn="l"/>
+            <a:r>
+              <a:rPr sz="1800" b="1">
+                <a:solidFill>
+                  <a:srgbClr val="FFC72C"/>
+                </a:solidFill>
+                <a:latin typeface="Hiragino Sans"/>
+              </a:rPr>
+              <a:t>用語辞書</a:t>
+            </a:r>
+          </a:p>
+        </p:txBody>
+      </p:sp>
+      <p:sp>
+        <p:nvSpPr>
+          <p:cNvPr id="64" name="TextBox 63"/>
+          <p:cNvSpPr txBox="1"/>
+          <p:nvPr/>
+        </p:nvSpPr>
+        <p:spPr>
+          <a:xfrm>
+            <a:off x="8508787" y="1428714"/>
+            <a:ext cx="3174920" cy="5016374"/>
+          </a:xfrm>
+          <a:prstGeom prst="rect">
+            <a:avLst/>
+          </a:prstGeom>
+          <a:noFill/>
+        </p:spPr>
+        <p:txBody>
+          <a:bodyPr wrap="square" lIns="45720" rIns="45720">
+            <a:spAutoFit/>
+          </a:bodyPr>
+          <a:lstStyle/>
+          <a:p>
+            <a:pPr algn="l">
+              <a:lnSpc>
+                <a:spcPct val="120000"/>
+              </a:lnSpc>
+            </a:pPr>
+            <a:r>
+              <a:rPr sz="1300" b="1">
+                <a:solidFill>
+                  <a:srgbClr val="FFC72C"/>
+                </a:solidFill>
+                <a:latin typeface="Hiragino Sans"/>
+              </a:rPr>
+              <a:t>POC</a:t>
+            </a:r>
+          </a:p>
+          <a:p>
+            <a:pPr algn="l">
+              <a:lnSpc>
+                <a:spcPct val="120000"/>
+              </a:lnSpc>
+            </a:pPr>
+            <a:r>
+              <a:rPr sz="1100" b="0">
+                <a:solidFill>
+                  <a:srgbClr val="FFFFFF"/>
+                </a:solidFill>
+                <a:latin typeface="Hiragino Sans"/>
+              </a:rPr>
+              <a:t>Proof of Concept。 概念実証。 実コストや実機能を最小実装で測る段階。</a:t>
+            </a:r>
+          </a:p>
+          <a:p>
+            <a:pPr algn="l">
+              <a:lnSpc>
+                <a:spcPct val="120000"/>
+              </a:lnSpc>
+            </a:pPr>
+            <a:r>
+              <a:rPr sz="1300" b="1">
+                <a:solidFill>
+                  <a:srgbClr val="FFC72C"/>
+                </a:solidFill>
+                <a:latin typeface="Hiragino Sans"/>
+              </a:rPr>
+              <a:t>Free Tier</a:t>
+            </a:r>
+          </a:p>
+          <a:p>
+            <a:pPr algn="l">
+              <a:lnSpc>
+                <a:spcPct val="120000"/>
+              </a:lnSpc>
+            </a:pPr>
+            <a:r>
+              <a:rPr sz="1100" b="0">
+                <a:solidFill>
+                  <a:srgbClr val="FFFFFF"/>
+                </a:solidFill>
+                <a:latin typeface="Hiragino Sans"/>
+              </a:rPr>
+              <a:t>GCPの無料利用枠。 BigQuery 1TiB/月、 Cloud Run e2-micro 等。</a:t>
+            </a:r>
+          </a:p>
+          <a:p>
+            <a:pPr algn="l">
+              <a:lnSpc>
+                <a:spcPct val="120000"/>
+              </a:lnSpc>
+            </a:pPr>
+            <a:r>
+              <a:rPr sz="1300" b="1">
+                <a:solidFill>
+                  <a:srgbClr val="FFC72C"/>
+                </a:solidFill>
+                <a:latin typeface="Hiragino Sans"/>
+              </a:rPr>
+              <a:t>Context Cache</a:t>
+            </a:r>
+          </a:p>
+          <a:p>
+            <a:pPr algn="l">
+              <a:lnSpc>
+                <a:spcPct val="120000"/>
+              </a:lnSpc>
+            </a:pPr>
+            <a:r>
+              <a:rPr sz="1100" b="0">
+                <a:solidFill>
+                  <a:srgbClr val="FFFFFF"/>
+                </a:solidFill>
+                <a:latin typeface="Hiragino Sans"/>
+              </a:rPr>
+              <a:t>Gemini入力tokenを24時間キャッシュ。 通常料金の1/4。</a:t>
+            </a:r>
+          </a:p>
+          <a:p>
+            <a:pPr algn="l">
+              <a:lnSpc>
+                <a:spcPct val="120000"/>
+              </a:lnSpc>
+            </a:pPr>
+            <a:r>
+              <a:rPr sz="1300" b="1">
+                <a:solidFill>
+                  <a:srgbClr val="FFC72C"/>
+                </a:solidFill>
+                <a:latin typeface="Hiragino Sans"/>
+              </a:rPr>
+              <a:t>Embedding API</a:t>
+            </a:r>
+          </a:p>
+          <a:p>
+            <a:pPr algn="l">
+              <a:lnSpc>
+                <a:spcPct val="120000"/>
+              </a:lnSpc>
+            </a:pPr>
+            <a:r>
+              <a:rPr sz="1100" b="0">
+                <a:solidFill>
+                  <a:srgbClr val="FFFFFF"/>
+                </a:solidFill>
+                <a:latin typeface="Hiragino Sans"/>
+              </a:rPr>
+              <a:t>テキスト/画像をベクトル化するAPI。 類似検索の前処理。</a:t>
+            </a:r>
+          </a:p>
+          <a:p>
+            <a:pPr algn="l">
+              <a:lnSpc>
+                <a:spcPct val="120000"/>
+              </a:lnSpc>
+            </a:pPr>
+            <a:r>
+              <a:rPr sz="1300" b="1">
+                <a:solidFill>
+                  <a:srgbClr val="FFC72C"/>
+                </a:solidFill>
+                <a:latin typeface="Hiragino Sans"/>
+              </a:rPr>
+              <a:t>GPU Spot</a:t>
+            </a:r>
+          </a:p>
+          <a:p>
+            <a:pPr algn="l">
+              <a:lnSpc>
+                <a:spcPct val="120000"/>
+              </a:lnSpc>
+            </a:pPr>
+            <a:r>
+              <a:rPr sz="1100" b="0">
+                <a:solidFill>
+                  <a:srgbClr val="FFFFFF"/>
+                </a:solidFill>
+                <a:latin typeface="Hiragino Sans"/>
+              </a:rPr>
+              <a:t>中断可能だが安価なGPUインスタンス。 A100 で 約 $1.5/h。</a:t>
+            </a:r>
+          </a:p>
+          <a:p>
+            <a:pPr algn="l">
+              <a:lnSpc>
+                <a:spcPct val="120000"/>
+              </a:lnSpc>
+            </a:pPr>
+            <a:r>
+              <a:rPr sz="1300" b="1">
+                <a:solidFill>
+                  <a:srgbClr val="FFC72C"/>
+                </a:solidFill>
+                <a:latin typeface="Hiragino Sans"/>
+              </a:rPr>
+              <a:t>A100</a:t>
+            </a:r>
+          </a:p>
+          <a:p>
+            <a:pPr algn="l">
+              <a:lnSpc>
+                <a:spcPct val="120000"/>
+              </a:lnSpc>
+            </a:pPr>
+            <a:r>
+              <a:rPr sz="1100" b="0">
+                <a:solidFill>
+                  <a:srgbClr val="FFFFFF"/>
+                </a:solidFill>
+                <a:latin typeface="Hiragino Sans"/>
+              </a:rPr>
+              <a:t>NVIDIA データセンターGPU。 RL学習で主流。</a:t>
+            </a:r>
+          </a:p>
+          <a:p>
+            <a:pPr algn="l">
+              <a:lnSpc>
+                <a:spcPct val="120000"/>
+              </a:lnSpc>
+            </a:pPr>
+            <a:r>
+              <a:rPr sz="1300" b="1">
+                <a:solidFill>
+                  <a:srgbClr val="FFC72C"/>
+                </a:solidFill>
+                <a:latin typeface="Hiragino Sans"/>
+              </a:rPr>
+              <a:t>PBT</a:t>
+            </a:r>
+          </a:p>
+          <a:p>
+            <a:pPr algn="l">
+              <a:lnSpc>
+                <a:spcPct val="120000"/>
+              </a:lnSpc>
+            </a:pPr>
+            <a:r>
+              <a:rPr sz="1100" b="0">
+                <a:solidFill>
+                  <a:srgbClr val="FFFFFF"/>
+                </a:solidFill>
+                <a:latin typeface="Hiragino Sans"/>
+              </a:rPr>
+              <a:t>Population Based Training。 個体並走進化学習。</a:t>
+            </a:r>
+          </a:p>
+          <a:p>
+            <a:pPr algn="l">
+              <a:lnSpc>
+                <a:spcPct val="120000"/>
+              </a:lnSpc>
+            </a:pPr>
+            <a:r>
+              <a:rPr sz="1300" b="1">
+                <a:solidFill>
+                  <a:srgbClr val="FFC72C"/>
+                </a:solidFill>
+                <a:latin typeface="Hiragino Sans"/>
+              </a:rPr>
+              <a:t>Maker / Taker</a:t>
+            </a:r>
+          </a:p>
+          <a:p>
+            <a:pPr algn="l">
+              <a:lnSpc>
+                <a:spcPct val="120000"/>
+              </a:lnSpc>
+            </a:pPr>
+            <a:r>
+              <a:rPr sz="1100" b="0">
+                <a:solidFill>
+                  <a:srgbClr val="FFFFFF"/>
+                </a:solidFill>
+                <a:latin typeface="Hiragino Sans"/>
+              </a:rPr>
+              <a:t>指値約定 (Maker、 流動性提供) / 成行約定 (Taker、 流動性消費) の手数料区分。</a:t>
+            </a:r>
+          </a:p>
+          <a:p>
+            <a:pPr algn="l">
+              <a:lnSpc>
+                <a:spcPct val="120000"/>
+              </a:lnSpc>
+            </a:pPr>
+            <a:r>
+              <a:rPr sz="1300" b="1">
+                <a:solidFill>
+                  <a:srgbClr val="FFC72C"/>
+                </a:solidFill>
+                <a:latin typeface="Hiragino Sans"/>
+              </a:rPr>
+              <a:t>Funding Rate</a:t>
+            </a:r>
+          </a:p>
+          <a:p>
+            <a:pPr algn="l">
+              <a:lnSpc>
+                <a:spcPct val="120000"/>
+              </a:lnSpc>
+            </a:pPr>
+            <a:r>
+              <a:rPr sz="1100" b="0">
+                <a:solidFill>
+                  <a:srgbClr val="FFFFFF"/>
+                </a:solidFill>
+                <a:latin typeface="Hiragino Sans"/>
+              </a:rPr>
+              <a:t>永久先物の資金調達料。 ロングが多いとロングがショートに支払う。</a:t>
+            </a:r>
+          </a:p>
+          <a:p>
+            <a:pPr algn="l">
+              <a:lnSpc>
+                <a:spcPct val="120000"/>
+              </a:lnSpc>
+            </a:pPr>
+            <a:r>
+              <a:rPr sz="1300" b="1">
+                <a:solidFill>
+                  <a:srgbClr val="FFC72C"/>
+                </a:solidFill>
+                <a:latin typeface="Hiragino Sans"/>
+              </a:rPr>
+              <a:t>OHLCV取得</a:t>
+            </a:r>
+          </a:p>
+          <a:p>
+            <a:pPr algn="l">
+              <a:lnSpc>
+                <a:spcPct val="120000"/>
+              </a:lnSpc>
+            </a:pPr>
+            <a:r>
+              <a:rPr sz="1100" b="0">
+                <a:solidFill>
+                  <a:srgbClr val="FFFFFF"/>
+                </a:solidFill>
+                <a:latin typeface="Hiragino Sans"/>
+              </a:rPr>
+              <a:t>ローソク足データ。 Bybit/Hyperliquid REST APIで無料取得可。</a:t>
+            </a:r>
+          </a:p>
+          <a:p>
+            <a:pPr algn="l">
+              <a:lnSpc>
+                <a:spcPct val="120000"/>
+              </a:lnSpc>
+            </a:pPr>
+            <a:r>
+              <a:rPr sz="1300" b="1">
+                <a:solidFill>
+                  <a:srgbClr val="FFC72C"/>
+                </a:solidFill>
+                <a:latin typeface="Hiragino Sans"/>
+              </a:rPr>
+              <a:t>Cloud Scheduler</a:t>
+            </a:r>
+          </a:p>
+          <a:p>
+            <a:pPr algn="l">
+              <a:lnSpc>
+                <a:spcPct val="120000"/>
+              </a:lnSpc>
+            </a:pPr>
+            <a:r>
+              <a:rPr sz="1100" b="0">
+                <a:solidFill>
+                  <a:srgbClr val="FFFFFF"/>
+                </a:solidFill>
+                <a:latin typeface="Hiragino Sans"/>
+              </a:rPr>
+              <a:t>GCPのcron代替。 5ジョブまで無料。</a:t>
+            </a:r>
+          </a:p>
+          <a:p>
+            <a:pPr algn="l">
+              <a:lnSpc>
+                <a:spcPct val="120000"/>
+              </a:lnSpc>
+            </a:pPr>
+            <a:r>
+              <a:rPr sz="1300" b="1">
+                <a:solidFill>
+                  <a:srgbClr val="FFC72C"/>
+                </a:solidFill>
+                <a:latin typeface="Hiragino Sans"/>
+              </a:rPr>
+              <a:t>Cloud Run</a:t>
+            </a:r>
+          </a:p>
+          <a:p>
+            <a:pPr algn="l">
+              <a:lnSpc>
+                <a:spcPct val="120000"/>
+              </a:lnSpc>
+            </a:pPr>
+            <a:r>
+              <a:rPr sz="1100" b="0">
+                <a:solidFill>
+                  <a:srgbClr val="FFFFFF"/>
+                </a:solidFill>
+                <a:latin typeface="Hiragino Sans"/>
+              </a:rPr>
+              <a:t>コンテナ実行サービス。 リクエスト時のみ起動で課金最小化。</a:t>
+            </a:r>
+          </a:p>
+        </p:txBody>
+      </p:sp>
+      <p:sp>
+        <p:nvSpPr>
+          <p:cNvPr id="65" name="TextBox 64"/>
+          <p:cNvSpPr txBox="1"/>
+          <p:nvPr/>
+        </p:nvSpPr>
+        <p:spPr>
+          <a:xfrm>
+            <a:off x="507987" y="6476838"/>
+            <a:ext cx="5079873" cy="253993"/>
+          </a:xfrm>
+          <a:prstGeom prst="rect">
+            <a:avLst/>
+          </a:prstGeom>
+          <a:noFill/>
+        </p:spPr>
+        <p:txBody>
+          <a:bodyPr wrap="square" anchor="t" lIns="45720" rIns="45720">
+            <a:spAutoFit/>
+          </a:bodyPr>
+          <a:lstStyle/>
+          <a:p>
+            <a:pPr algn="l"/>
+            <a:r>
+              <a:rPr sz="1200" b="0">
+                <a:solidFill>
+                  <a:srgbClr val="AFB8C1"/>
+                </a:solidFill>
+                <a:latin typeface="Hiragino Sans"/>
+              </a:rPr>
+              <a:t>Project danjer-GAIA</a:t>
+            </a:r>
+          </a:p>
+        </p:txBody>
+      </p:sp>
+      <p:sp>
+        <p:nvSpPr>
+          <p:cNvPr id="66" name="TextBox 65"/>
+          <p:cNvSpPr txBox="1"/>
+          <p:nvPr/>
+        </p:nvSpPr>
+        <p:spPr>
+          <a:xfrm>
+            <a:off x="10794730" y="6476838"/>
+            <a:ext cx="888977" cy="253993"/>
+          </a:xfrm>
+          <a:prstGeom prst="rect">
+            <a:avLst/>
+          </a:prstGeom>
+          <a:noFill/>
+        </p:spPr>
+        <p:txBody>
+          <a:bodyPr wrap="square" anchor="t" lIns="45720" rIns="45720">
+            <a:spAutoFit/>
+          </a:bodyPr>
+          <a:lstStyle/>
+          <a:p>
+            <a:pPr algn="r"/>
+            <a:r>
+              <a:rPr sz="1200" b="0">
+                <a:solidFill>
+                  <a:srgbClr val="AFB8C1"/>
+                </a:solidFill>
+                <a:latin typeface="Hiragino Sans"/>
+              </a:rPr>
+              <a:t>12 / 09</a:t>
             </a:r>
           </a:p>
         </p:txBody>
